--- a/90_通用工具_全学期复用/90-C14_课堂活动与课后任务_上课投影_v1.0_20260821.pptx
+++ b/90_通用工具_全学期复用/90-C14_课堂活动与课后任务_上课投影_v1.0_20260821.pptx
@@ -34,22 +34,6 @@
     <p:sldId id="282" r:id="rId33"/>
     <p:sldId id="283" r:id="rId34"/>
     <p:sldId id="284" r:id="rId35"/>
-    <p:sldId id="285" r:id="rId36"/>
-    <p:sldId id="286" r:id="rId37"/>
-    <p:sldId id="287" r:id="rId38"/>
-    <p:sldId id="288" r:id="rId39"/>
-    <p:sldId id="289" r:id="rId40"/>
-    <p:sldId id="290" r:id="rId41"/>
-    <p:sldId id="291" r:id="rId42"/>
-    <p:sldId id="292" r:id="rId43"/>
-    <p:sldId id="293" r:id="rId44"/>
-    <p:sldId id="294" r:id="rId45"/>
-    <p:sldId id="295" r:id="rId46"/>
-    <p:sldId id="296" r:id="rId47"/>
-    <p:sldId id="297" r:id="rId48"/>
-    <p:sldId id="298" r:id="rId49"/>
-    <p:sldId id="299" r:id="rId50"/>
-    <p:sldId id="300" r:id="rId51"/>
   </p:sldIdLst>
   <p:sldSz cx="12191695" cy="6858000" type="screen4x3"/>
   <p:notesSz cx="6858000" cy="9144000"/>
@@ -3226,8 +3210,8 @@
         </p:nvSpPr>
         <p:spPr>
           <a:xfrm>
-            <a:off x="548640" y="1920240"/>
-            <a:ext cx="10972800" cy="1188720"/>
+            <a:off x="548640" y="1645920"/>
+            <a:ext cx="10972800" cy="1280160"/>
           </a:xfrm>
           <a:prstGeom prst="rect">
             <a:avLst/>
@@ -3246,7 +3230,7 @@
               </a:spcAft>
             </a:pPr>
             <a:r>
-              <a:rPr sz="3600" b="1">
+              <a:rPr sz="3400" b="1">
                 <a:solidFill>
                   <a:srgbClr val="FFFFFF"/>
                 </a:solidFill>
@@ -3254,7 +3238,7 @@
                 <a:ea typeface="微软雅黑"/>
                 <a:cs typeface="微软雅黑"/>
               </a:rPr>
-              <a:t>课堂活动 · 课后任务</a:t>
+              <a:t>活动日专用　平时不要打开</a:t>
             </a:r>
           </a:p>
         </p:txBody>
@@ -3267,8 +3251,8 @@
         </p:nvSpPr>
         <p:spPr>
           <a:xfrm>
-            <a:off x="548640" y="3200400"/>
-            <a:ext cx="10972800" cy="1371600"/>
+            <a:off x="548640" y="3108960"/>
+            <a:ext cx="10972800" cy="1828800"/>
           </a:xfrm>
           <a:prstGeom prst="rect">
             <a:avLst/>
@@ -3295,32 +3279,9 @@
                 <a:ea typeface="微软雅黑"/>
                 <a:cs typeface="微软雅黑"/>
               </a:rPr>
-              <a:t>配音、找茬、举牌、带红笔、书后题——都写在这里。</a:t>
-            </a:r>
-          </a:p>
-        </p:txBody>
-      </p:sp>
-      <p:sp>
-        <p:nvSpPr>
-          <p:cNvPr id="6" name="TextBox 5"/>
-          <p:cNvSpPr txBox="1"/>
-          <p:nvPr/>
-        </p:nvSpPr>
-        <p:spPr>
-          <a:xfrm>
-            <a:off x="548640" y="5623560"/>
-            <a:ext cx="10972800" cy="1005840"/>
-          </a:xfrm>
-          <a:prstGeom prst="rect">
-            <a:avLst/>
-          </a:prstGeom>
-          <a:noFill/>
-        </p:spPr>
-        <p:txBody>
-          <a:bodyPr wrap="square">
-            <a:spAutoFit/>
-          </a:bodyPr>
-          <a:lstStyle/>
+              <a:t>下课布置作业：翻正在讲的那份课件最后的「收工」页。</a:t>
+            </a:r>
+          </a:p>
           <a:p>
             <a:pPr>
               <a:spcAft>
@@ -3328,15 +3289,56 @@
               </a:spcAft>
             </a:pPr>
             <a:r>
-              <a:rPr sz="1600" b="1">
-                <a:solidFill>
-                  <a:srgbClr val="FFFFFF"/>
+              <a:rPr sz="2000" b="0">
+                <a:solidFill>
+                  <a:srgbClr val="FFCC80"/>
                 </a:solidFill>
                 <a:latin typeface="微软雅黑"/>
                 <a:ea typeface="微软雅黑"/>
                 <a:cs typeface="微软雅黑"/>
               </a:rPr>
-              <a:t>下课前翻「收工」。活动日前一天翻「活动日」。学生也能看懂。</a:t>
+              <a:t>不要用这份去布置项目一、项目四的配音。</a:t>
+            </a:r>
+          </a:p>
+        </p:txBody>
+      </p:sp>
+      <p:sp>
+        <p:nvSpPr>
+          <p:cNvPr id="6" name="TextBox 5"/>
+          <p:cNvSpPr txBox="1"/>
+          <p:nvPr/>
+        </p:nvSpPr>
+        <p:spPr>
+          <a:xfrm>
+            <a:off x="548640" y="5623560"/>
+            <a:ext cx="10972800" cy="914400"/>
+          </a:xfrm>
+          <a:prstGeom prst="rect">
+            <a:avLst/>
+          </a:prstGeom>
+          <a:noFill/>
+        </p:spPr>
+        <p:txBody>
+          <a:bodyPr wrap="square">
+            <a:spAutoFit/>
+          </a:bodyPr>
+          <a:lstStyle/>
+          <a:p>
+            <a:pPr>
+              <a:spcAft>
+                <a:spcPts val="400"/>
+              </a:spcAft>
+            </a:pPr>
+            <a:r>
+              <a:rPr sz="1600" b="1">
+                <a:solidFill>
+                  <a:srgbClr val="FFFFFF"/>
+                </a:solidFill>
+                <a:latin typeface="微软雅黑"/>
+                <a:ea typeface="微软雅黑"/>
+                <a:cs typeface="微软雅黑"/>
+              </a:rPr>
+              <a:t>只有分组活动日才投后面的举牌、天平。</a:t>
             </a:r>
           </a:p>
         </p:txBody>
@@ -3374,7 +3376,7 @@
             <a:avLst/>
           </a:prstGeom>
           <a:solidFill>
-            <a:srgbClr val="E3F2FD"/>
+            <a:srgbClr val="FFF8E1"/>
           </a:solidFill>
           <a:ln>
             <a:noFill/>
@@ -3417,7 +3419,7 @@
             <a:avLst/>
           </a:prstGeom>
           <a:solidFill>
-            <a:srgbClr val="BF360C"/>
+            <a:srgbClr val="F9A825"/>
           </a:solidFill>
           <a:ln>
             <a:noFill/>
@@ -3481,7 +3483,7 @@
                 <a:ea typeface="微软雅黑"/>
                 <a:cs typeface="微软雅黑"/>
               </a:rPr>
-              <a:t>任务②　找茬挑战（代替闷的互审）</a:t>
+              <a:t>揭晓 3/8</a:t>
             </a:r>
           </a:p>
         </p:txBody>
@@ -3522,7 +3524,7 @@
                 <a:ea typeface="微软雅黑"/>
                 <a:cs typeface="微软雅黑"/>
               </a:rPr>
-              <a:t>不是同桌互相改作业。全班盯同一张有错的凭证抢着找。</a:t>
+              <a:t>实收资本</a:t>
             </a:r>
           </a:p>
           <a:p>
@@ -3540,7 +3542,7 @@
                 <a:ea typeface="微软雅黑"/>
                 <a:cs typeface="微软雅黑"/>
               </a:rPr>
-              <a:t>下一页有 3 处错。写在记录册。1 分钟。</a:t>
+              <a:t/>
             </a:r>
           </a:p>
           <a:p>
@@ -3558,25 +3560,7 @@
                 <a:ea typeface="微软雅黑"/>
                 <a:cs typeface="微软雅黑"/>
               </a:rPr>
-              <a:t>抽人：找出 2 处 2 分，3 处全对 5 分。</a:t>
-            </a:r>
-          </a:p>
-          <a:p>
-            <a:pPr>
-              <a:spcAft>
-                <a:spcPts val="400"/>
-              </a:spcAft>
-            </a:pPr>
-            <a:r>
-              <a:rPr sz="2200" b="0">
-                <a:solidFill>
-                  <a:srgbClr val="212121"/>
-                </a:solidFill>
-                <a:latin typeface="微软雅黑"/>
-                <a:ea typeface="微软雅黑"/>
-                <a:cs typeface="微软雅黑"/>
-              </a:rPr>
-              <a:t>自己填的自己不审。</a:t>
+              <a:t>→　所有者权益组举牌</a:t>
             </a:r>
           </a:p>
         </p:txBody>
@@ -3660,7 +3644,7 @@
                 <a:ea typeface="微软雅黑"/>
                 <a:cs typeface="微软雅黑"/>
               </a:rPr>
-              <a:t>现在你：听规则。下一页才是错凭证。先别写。</a:t>
+              <a:t>现在你：错了，全组用小新腔喊一遍。</a:t>
             </a:r>
           </a:p>
         </p:txBody>
@@ -3698,7 +3682,7 @@
             <a:avLst/>
           </a:prstGeom>
           <a:solidFill>
-            <a:srgbClr val="E3F2FD"/>
+            <a:srgbClr val="FFF8E1"/>
           </a:solidFill>
           <a:ln>
             <a:noFill/>
@@ -3805,7 +3789,7 @@
                 <a:ea typeface="微软雅黑"/>
                 <a:cs typeface="微软雅黑"/>
               </a:rPr>
-              <a:t>找茬　这张通用记账凭证有 3 处错</a:t>
+              <a:t>举牌 4/8</a:t>
             </a:r>
           </a:p>
         </p:txBody>
@@ -3846,97 +3830,7 @@
                 <a:ea typeface="微软雅黑"/>
                 <a:cs typeface="微软雅黑"/>
               </a:rPr>
-              <a:t>日期：2026年3月15日　　记字第 3 号</a:t>
-            </a:r>
-          </a:p>
-          <a:p>
-            <a:pPr>
-              <a:spcAft>
-                <a:spcPts val="400"/>
-              </a:spcAft>
-            </a:pPr>
-            <a:r>
-              <a:rPr sz="2200" b="0">
-                <a:solidFill>
-                  <a:srgbClr val="212121"/>
-                </a:solidFill>
-                <a:latin typeface="微软雅黑"/>
-                <a:ea typeface="微软雅黑"/>
-                <a:cs typeface="微软雅黑"/>
-              </a:rPr>
-              <a:t>摘要：付电费</a:t>
-            </a:r>
-          </a:p>
-          <a:p>
-            <a:pPr>
-              <a:spcAft>
-                <a:spcPts val="400"/>
-              </a:spcAft>
-            </a:pPr>
-            <a:r>
-              <a:rPr sz="2200" b="0">
-                <a:solidFill>
-                  <a:srgbClr val="212121"/>
-                </a:solidFill>
-                <a:latin typeface="微软雅黑"/>
-                <a:ea typeface="微软雅黑"/>
-                <a:cs typeface="微软雅黑"/>
-              </a:rPr>
-              <a:t>借：管理费用　　800</a:t>
-            </a:r>
-          </a:p>
-          <a:p>
-            <a:pPr>
-              <a:spcAft>
-                <a:spcPts val="400"/>
-              </a:spcAft>
-            </a:pPr>
-            <a:r>
-              <a:rPr sz="2200" b="0">
-                <a:solidFill>
-                  <a:srgbClr val="212121"/>
-                </a:solidFill>
-                <a:latin typeface="微软雅黑"/>
-                <a:ea typeface="微软雅黑"/>
-                <a:cs typeface="微软雅黑"/>
-              </a:rPr>
-              <a:t>贷：库存现金　　800</a:t>
-            </a:r>
-          </a:p>
-          <a:p>
-            <a:pPr>
-              <a:spcAft>
-                <a:spcPts val="400"/>
-              </a:spcAft>
-            </a:pPr>
-            <a:r>
-              <a:rPr sz="2200" b="0">
-                <a:solidFill>
-                  <a:srgbClr val="212121"/>
-                </a:solidFill>
-                <a:latin typeface="微软雅黑"/>
-                <a:ea typeface="微软雅黑"/>
-                <a:cs typeface="微软雅黑"/>
-              </a:rPr>
-              <a:t>附件：0 张　　制单：张三　　审核：张三</a:t>
-            </a:r>
-          </a:p>
-          <a:p>
-            <a:pPr>
-              <a:spcAft>
-                <a:spcPts val="400"/>
-              </a:spcAft>
-            </a:pPr>
-            <a:r>
-              <a:rPr sz="2200" b="0">
-                <a:solidFill>
-                  <a:srgbClr val="212121"/>
-                </a:solidFill>
-                <a:latin typeface="微软雅黑"/>
-                <a:ea typeface="微软雅黑"/>
-                <a:cs typeface="微软雅黑"/>
-              </a:rPr>
-              <a:t>题目其实是：用银行存款支付本月电费 800 元。</a:t>
+              <a:t>主营业务收入</a:t>
             </a:r>
           </a:p>
         </p:txBody>
@@ -4020,7 +3914,7 @@
                 <a:ea typeface="微软雅黑"/>
                 <a:cs typeface="微软雅黑"/>
               </a:rPr>
-              <a:t>现在你：写在册子上，哪三处错。1 分钟。不用交。抽到再举册子。</a:t>
+              <a:t>现在你：数到 3，是本组的举牌。</a:t>
             </a:r>
           </a:p>
         </p:txBody>
@@ -4058,7 +3952,7 @@
             <a:avLst/>
           </a:prstGeom>
           <a:solidFill>
-            <a:srgbClr val="E3F2FD"/>
+            <a:srgbClr val="FFF8E1"/>
           </a:solidFill>
           <a:ln>
             <a:noFill/>
@@ -4101,7 +3995,7 @@
             <a:avLst/>
           </a:prstGeom>
           <a:solidFill>
-            <a:srgbClr val="BF360C"/>
+            <a:srgbClr val="F9A825"/>
           </a:solidFill>
           <a:ln>
             <a:noFill/>
@@ -4165,7 +4059,7 @@
                 <a:ea typeface="微软雅黑"/>
                 <a:cs typeface="微软雅黑"/>
               </a:rPr>
-              <a:t>揭晓　三处错</a:t>
+              <a:t>揭晓 4/8</a:t>
             </a:r>
           </a:p>
         </p:txBody>
@@ -4206,7 +4100,7 @@
                 <a:ea typeface="微软雅黑"/>
                 <a:cs typeface="微软雅黑"/>
               </a:rPr>
-              <a:t>1. 贷方写成了库存现金，应是银行存款。</a:t>
+              <a:t>主营业务收入</a:t>
             </a:r>
           </a:p>
           <a:p>
@@ -4224,7 +4118,7 @@
                 <a:ea typeface="微软雅黑"/>
                 <a:cs typeface="微软雅黑"/>
               </a:rPr>
-              <a:t>2. 附件写成 0，电费单至少 1 张。</a:t>
+              <a:t/>
             </a:r>
           </a:p>
           <a:p>
@@ -4242,25 +4136,7 @@
                 <a:ea typeface="微软雅黑"/>
                 <a:cs typeface="微软雅黑"/>
               </a:rPr>
-              <a:t>3. 审核栏签了自己的名，自己填的自己不能审。</a:t>
-            </a:r>
-          </a:p>
-          <a:p>
-            <a:pPr>
-              <a:spcAft>
-                <a:spcPts val="400"/>
-              </a:spcAft>
-            </a:pPr>
-            <a:r>
-              <a:rPr sz="2200" b="0">
-                <a:solidFill>
-                  <a:srgbClr val="212121"/>
-                </a:solidFill>
-                <a:latin typeface="微软雅黑"/>
-                <a:ea typeface="微软雅黑"/>
-                <a:cs typeface="微软雅黑"/>
-              </a:rPr>
-              <a:t>没有「该填付款凭证」这种错。只认通用记账凭证。</a:t>
+              <a:t>→　收入组举牌</a:t>
             </a:r>
           </a:p>
         </p:txBody>
@@ -4344,7 +4220,7 @@
                 <a:ea typeface="微软雅黑"/>
                 <a:cs typeface="微软雅黑"/>
               </a:rPr>
-              <a:t>现在你：对照册子，改在旁边。不用交。</a:t>
+              <a:t>现在你：错了，全组用小新腔喊一遍。</a:t>
             </a:r>
           </a:p>
         </p:txBody>
@@ -4382,7 +4258,7 @@
             <a:avLst/>
           </a:prstGeom>
           <a:solidFill>
-            <a:srgbClr val="E3F2FD"/>
+            <a:srgbClr val="FFF8E1"/>
           </a:solidFill>
           <a:ln>
             <a:noFill/>
@@ -4489,7 +4365,7 @@
                 <a:ea typeface="微软雅黑"/>
                 <a:cs typeface="微软雅黑"/>
               </a:rPr>
-              <a:t>活动日怎么上（不是每节课）</a:t>
+              <a:t>举牌 5/8</a:t>
             </a:r>
           </a:p>
         </p:txBody>
@@ -4530,61 +4406,7 @@
                 <a:ea typeface="微软雅黑"/>
                 <a:cs typeface="微软雅黑"/>
               </a:rPr>
-              <a:t>每个项目最多 1 次。前一天群里发：什么活动、几组、谁坐哪、牌上写什么。</a:t>
-            </a:r>
-          </a:p>
-          <a:p>
-            <a:pPr>
-              <a:spcAft>
-                <a:spcPts val="400"/>
-              </a:spcAft>
-            </a:pPr>
-            <a:r>
-              <a:rPr sz="2200" b="0">
-                <a:solidFill>
-                  <a:srgbClr val="212121"/>
-                </a:solidFill>
-                <a:latin typeface="微软雅黑"/>
-                <a:ea typeface="微软雅黑"/>
-                <a:cs typeface="微软雅黑"/>
-              </a:rPr>
-              <a:t>进门按桌签坐。10～15 分钟。结束收回，下次重切。</a:t>
-            </a:r>
-          </a:p>
-          <a:p>
-            <a:pPr>
-              <a:spcAft>
-                <a:spcPts val="400"/>
-              </a:spcAft>
-            </a:pPr>
-            <a:r>
-              <a:rPr sz="2200" b="0">
-                <a:solidFill>
-                  <a:srgbClr val="212121"/>
-                </a:solidFill>
-                <a:latin typeface="微软雅黑"/>
-                <a:ea typeface="微软雅黑"/>
-                <a:cs typeface="微软雅黑"/>
-              </a:rPr>
-              <a:t>口令写在投影上，只有一个答案。</a:t>
-            </a:r>
-          </a:p>
-          <a:p>
-            <a:pPr>
-              <a:spcAft>
-                <a:spcPts val="400"/>
-              </a:spcAft>
-            </a:pPr>
-            <a:r>
-              <a:rPr sz="2200" b="0">
-                <a:solidFill>
-                  <a:srgbClr val="212121"/>
-                </a:solidFill>
-                <a:latin typeface="微软雅黑"/>
-                <a:ea typeface="微软雅黑"/>
-                <a:cs typeface="微软雅黑"/>
-              </a:rPr>
-              <a:t>没接住：全组用小新腔把正确答案喊一遍，20 秒。不写检讨。</a:t>
+              <a:t>管理费用</a:t>
             </a:r>
           </a:p>
         </p:txBody>
@@ -4668,7 +4490,7 @@
                 <a:ea typeface="微软雅黑"/>
                 <a:cs typeface="微软雅黑"/>
               </a:rPr>
-              <a:t>现在你：看规则。先别写。</a:t>
+              <a:t>现在你：数到 3，是本组的举牌。</a:t>
             </a:r>
           </a:p>
         </p:txBody>
@@ -4706,7 +4528,7 @@
             <a:avLst/>
           </a:prstGeom>
           <a:solidFill>
-            <a:srgbClr val="E3F2FD"/>
+            <a:srgbClr val="FFF8E1"/>
           </a:solidFill>
           <a:ln>
             <a:noFill/>
@@ -4749,7 +4571,7 @@
             <a:avLst/>
           </a:prstGeom>
           <a:solidFill>
-            <a:srgbClr val="BF360C"/>
+            <a:srgbClr val="F9A825"/>
           </a:solidFill>
           <a:ln>
             <a:noFill/>
@@ -4813,7 +4635,7 @@
                 <a:ea typeface="微软雅黑"/>
                 <a:cs typeface="微软雅黑"/>
               </a:rPr>
-              <a:t>活动日　六要素举牌　规则</a:t>
+              <a:t>揭晓 5/8</a:t>
             </a:r>
           </a:p>
         </p:txBody>
@@ -4854,7 +4676,7 @@
                 <a:ea typeface="微软雅黑"/>
                 <a:cs typeface="微软雅黑"/>
               </a:rPr>
-              <a:t>6 组：资产 / 负债 / 所有者权益 / 收入 / 费用 / 利润</a:t>
+              <a:t>管理费用</a:t>
             </a:r>
           </a:p>
           <a:p>
@@ -4872,7 +4694,7 @@
                 <a:ea typeface="微软雅黑"/>
                 <a:cs typeface="微软雅黑"/>
               </a:rPr>
-              <a:t>老师投出科目。数到 3，是你们组的就举牌。不是的不要举。</a:t>
+              <a:t/>
             </a:r>
           </a:p>
           <a:p>
@@ -4890,7 +4712,7 @@
                 <a:ea typeface="微软雅黑"/>
                 <a:cs typeface="微软雅黑"/>
               </a:rPr>
-              <a:t>举错或该举没举：全组用小新腔把正确答案喊一遍。下面 8 题每题一个答案。</a:t>
+              <a:t>→　费用组举牌</a:t>
             </a:r>
           </a:p>
         </p:txBody>
@@ -4974,7 +4796,7 @@
                 <a:ea typeface="微软雅黑"/>
                 <a:cs typeface="微软雅黑"/>
               </a:rPr>
-              <a:t>现在你：按桌签入座。听到口令再举牌。</a:t>
+              <a:t>现在你：错了，全组用小新腔喊一遍。</a:t>
             </a:r>
           </a:p>
         </p:txBody>
@@ -5119,7 +4941,7 @@
                 <a:ea typeface="微软雅黑"/>
                 <a:cs typeface="微软雅黑"/>
               </a:rPr>
-              <a:t>举牌 1/8</a:t>
+              <a:t>举牌 6/8</a:t>
             </a:r>
           </a:p>
         </p:txBody>
@@ -5160,7 +4982,7 @@
                 <a:ea typeface="微软雅黑"/>
                 <a:cs typeface="微软雅黑"/>
               </a:rPr>
-              <a:t>库存现金</a:t>
+              <a:t>本年利润</a:t>
             </a:r>
           </a:p>
         </p:txBody>
@@ -5244,7 +5066,7 @@
                 <a:ea typeface="微软雅黑"/>
                 <a:cs typeface="微软雅黑"/>
               </a:rPr>
-              <a:t>现在你：数到 3，是本组的举牌。不是的别举。</a:t>
+              <a:t>现在你：数到 3，是本组的举牌。</a:t>
             </a:r>
           </a:p>
         </p:txBody>
@@ -5389,7 +5211,7 @@
                 <a:ea typeface="微软雅黑"/>
                 <a:cs typeface="微软雅黑"/>
               </a:rPr>
-              <a:t>揭晓 1/8</a:t>
+              <a:t>揭晓 6/8</a:t>
             </a:r>
           </a:p>
         </p:txBody>
@@ -5430,7 +5252,7 @@
                 <a:ea typeface="微软雅黑"/>
                 <a:cs typeface="微软雅黑"/>
               </a:rPr>
-              <a:t>库存现金</a:t>
+              <a:t>本年利润</a:t>
             </a:r>
           </a:p>
           <a:p>
@@ -5466,7 +5288,7 @@
                 <a:ea typeface="微软雅黑"/>
                 <a:cs typeface="微软雅黑"/>
               </a:rPr>
-              <a:t>→　资产组举牌</a:t>
+              <a:t>→　利润组举牌</a:t>
             </a:r>
           </a:p>
         </p:txBody>
@@ -5550,7 +5372,7 @@
                 <a:ea typeface="微软雅黑"/>
                 <a:cs typeface="微软雅黑"/>
               </a:rPr>
-              <a:t>现在你：错了，全组用小新腔把这句喊一遍。</a:t>
+              <a:t>现在你：错了，全组用小新腔喊一遍。</a:t>
             </a:r>
           </a:p>
         </p:txBody>
@@ -5695,7 +5517,7 @@
                 <a:ea typeface="微软雅黑"/>
                 <a:cs typeface="微软雅黑"/>
               </a:rPr>
-              <a:t>举牌 2/8</a:t>
+              <a:t>举牌 7/8</a:t>
             </a:r>
           </a:p>
         </p:txBody>
@@ -5736,7 +5558,7 @@
                 <a:ea typeface="微软雅黑"/>
                 <a:cs typeface="微软雅黑"/>
               </a:rPr>
-              <a:t>短期借款</a:t>
+              <a:t>原材料</a:t>
             </a:r>
           </a:p>
         </p:txBody>
@@ -5820,7 +5642,7 @@
                 <a:ea typeface="微软雅黑"/>
                 <a:cs typeface="微软雅黑"/>
               </a:rPr>
-              <a:t>现在你：数到 3，是本组的举牌。不是的别举。</a:t>
+              <a:t>现在你：数到 3，是本组的举牌。</a:t>
             </a:r>
           </a:p>
         </p:txBody>
@@ -5965,7 +5787,7 @@
                 <a:ea typeface="微软雅黑"/>
                 <a:cs typeface="微软雅黑"/>
               </a:rPr>
-              <a:t>揭晓 2/8</a:t>
+              <a:t>揭晓 7/8</a:t>
             </a:r>
           </a:p>
         </p:txBody>
@@ -6006,7 +5828,7 @@
                 <a:ea typeface="微软雅黑"/>
                 <a:cs typeface="微软雅黑"/>
               </a:rPr>
-              <a:t>短期借款</a:t>
+              <a:t>原材料</a:t>
             </a:r>
           </a:p>
           <a:p>
@@ -6042,7 +5864,7 @@
                 <a:ea typeface="微软雅黑"/>
                 <a:cs typeface="微软雅黑"/>
               </a:rPr>
-              <a:t>→　负债组举牌</a:t>
+              <a:t>→　资产组举牌</a:t>
             </a:r>
           </a:p>
         </p:txBody>
@@ -6126,7 +5948,7 @@
                 <a:ea typeface="微软雅黑"/>
                 <a:cs typeface="微软雅黑"/>
               </a:rPr>
-              <a:t>现在你：错了，全组用小新腔把这句喊一遍。</a:t>
+              <a:t>现在你：错了，全组用小新腔喊一遍。</a:t>
             </a:r>
           </a:p>
         </p:txBody>
@@ -6271,7 +6093,7 @@
                 <a:ea typeface="微软雅黑"/>
                 <a:cs typeface="微软雅黑"/>
               </a:rPr>
-              <a:t>举牌 3/8</a:t>
+              <a:t>举牌 8/8</a:t>
             </a:r>
           </a:p>
         </p:txBody>
@@ -6312,7 +6134,7 @@
                 <a:ea typeface="微软雅黑"/>
                 <a:cs typeface="微软雅黑"/>
               </a:rPr>
-              <a:t>实收资本</a:t>
+              <a:t>应付账款</a:t>
             </a:r>
           </a:p>
         </p:txBody>
@@ -6396,7 +6218,7 @@
                 <a:ea typeface="微软雅黑"/>
                 <a:cs typeface="微软雅黑"/>
               </a:rPr>
-              <a:t>现在你：数到 3，是本组的举牌。不是的别举。</a:t>
+              <a:t>现在你：数到 3，是本组的举牌。</a:t>
             </a:r>
           </a:p>
         </p:txBody>
@@ -6541,7 +6363,7 @@
                 <a:ea typeface="微软雅黑"/>
                 <a:cs typeface="微软雅黑"/>
               </a:rPr>
-              <a:t>这份投影怎么用（老师也看这一页）</a:t>
+              <a:t>平时作业在哪一页（对照）</a:t>
             </a:r>
           </a:p>
         </p:txBody>
@@ -6582,7 +6404,7 @@
                 <a:ea typeface="微软雅黑"/>
                 <a:cs typeface="微软雅黑"/>
               </a:rPr>
-              <a:t>下课前 3 分钟：翻到本项目「收工」那几页投出来。</a:t>
+              <a:t>项目一：讲完「十二块和二十五块」后面那一页 + 最后「收工」。</a:t>
             </a:r>
           </a:p>
           <a:p>
@@ -6600,7 +6422,7 @@
                 <a:ea typeface="微软雅黑"/>
                 <a:cs typeface="微软雅黑"/>
               </a:rPr>
-              <a:t>活动日前一天：名单发群，第二天翻活动日。</a:t>
+              <a:t>项目二：课件最后「收工」。</a:t>
             </a:r>
           </a:p>
           <a:p>
@@ -6618,7 +6440,7 @@
                 <a:ea typeface="微软雅黑"/>
                 <a:cs typeface="微软雅黑"/>
               </a:rPr>
-              <a:t>项目四前一节：必须投「下一节带红笔」。</a:t>
+              <a:t>项目三：课件最后「收工」（带红笔）。</a:t>
             </a:r>
           </a:p>
           <a:p>
@@ -6636,7 +6458,7 @@
                 <a:ea typeface="微软雅黑"/>
                 <a:cs typeface="微软雅黑"/>
               </a:rPr>
-              <a:t>互审太闷：改用「找茬挑战」。</a:t>
+              <a:t>项目四：四格连环画看完之后那一页「课后就这一件」。</a:t>
             </a:r>
           </a:p>
           <a:p>
@@ -6654,7 +6476,7 @@
                 <a:ea typeface="微软雅黑"/>
                 <a:cs typeface="微软雅黑"/>
               </a:rPr>
-              <a:t>只认通用记账凭证。不讲收款、付款、转账三种专用凭证。</a:t>
+              <a:t>实训：打开 10-00，不要打开这一份。</a:t>
             </a:r>
           </a:p>
         </p:txBody>
@@ -6738,7 +6560,7 @@
                 <a:ea typeface="微软雅黑"/>
                 <a:cs typeface="微软雅黑"/>
               </a:rPr>
-              <a:t>现在你：记住今天下课看哪一页。先别写。</a:t>
+              <a:t>现在你：记住，平时不翻这一份。</a:t>
             </a:r>
           </a:p>
         </p:txBody>
@@ -6883,7 +6705,7 @@
                 <a:ea typeface="微软雅黑"/>
                 <a:cs typeface="微软雅黑"/>
               </a:rPr>
-              <a:t>揭晓 3/8</a:t>
+              <a:t>揭晓 8/8</a:t>
             </a:r>
           </a:p>
         </p:txBody>
@@ -6924,7 +6746,7 @@
                 <a:ea typeface="微软雅黑"/>
                 <a:cs typeface="微软雅黑"/>
               </a:rPr>
-              <a:t>实收资本</a:t>
+              <a:t>应付账款</a:t>
             </a:r>
           </a:p>
           <a:p>
@@ -6960,7 +6782,7 @@
                 <a:ea typeface="微软雅黑"/>
                 <a:cs typeface="微软雅黑"/>
               </a:rPr>
-              <a:t>→　所有者权益组举牌</a:t>
+              <a:t>→　负债组举牌</a:t>
             </a:r>
           </a:p>
         </p:txBody>
@@ -7044,7 +6866,7 @@
                 <a:ea typeface="微软雅黑"/>
                 <a:cs typeface="微软雅黑"/>
               </a:rPr>
-              <a:t>现在你：错了，全组用小新腔把这句喊一遍。</a:t>
+              <a:t>现在你：错了，全组用小新腔喊一遍。</a:t>
             </a:r>
           </a:p>
         </p:txBody>
@@ -7082,7 +6904,7 @@
             <a:avLst/>
           </a:prstGeom>
           <a:solidFill>
-            <a:srgbClr val="FFF8E1"/>
+            <a:srgbClr val="E3F2FD"/>
           </a:solidFill>
           <a:ln>
             <a:noFill/>
@@ -7189,7 +7011,7 @@
                 <a:ea typeface="微软雅黑"/>
                 <a:cs typeface="微软雅黑"/>
               </a:rPr>
-              <a:t>举牌 4/8</a:t>
+              <a:t>天平四种　规则</a:t>
             </a:r>
           </a:p>
         </p:txBody>
@@ -7230,7 +7052,25 @@
                 <a:ea typeface="微软雅黑"/>
                 <a:cs typeface="微软雅黑"/>
               </a:rPr>
-              <a:t>主营业务收入</a:t>
+              <a:t>4 组：同增 / 同减 / 左边一增一减 / 右边一增一减</a:t>
+            </a:r>
+          </a:p>
+          <a:p>
+            <a:pPr>
+              <a:spcAft>
+                <a:spcPts val="400"/>
+              </a:spcAft>
+            </a:pPr>
+            <a:r>
+              <a:rPr sz="2200" b="0">
+                <a:solidFill>
+                  <a:srgbClr val="212121"/>
+                </a:solidFill>
+                <a:latin typeface="微软雅黑"/>
+                <a:ea typeface="微软雅黑"/>
+                <a:cs typeface="微软雅黑"/>
+              </a:rPr>
+              <a:t>老师念一笔。是你们这种变化就举牌。</a:t>
             </a:r>
           </a:p>
         </p:txBody>
@@ -7314,7 +7154,7 @@
                 <a:ea typeface="微软雅黑"/>
                 <a:cs typeface="微软雅黑"/>
               </a:rPr>
-              <a:t>现在你：数到 3，是本组的举牌。不是的别举。</a:t>
+              <a:t>现在你：听到口令再举牌。</a:t>
             </a:r>
           </a:p>
         </p:txBody>
@@ -7395,7 +7235,7 @@
             <a:avLst/>
           </a:prstGeom>
           <a:solidFill>
-            <a:srgbClr val="F9A825"/>
+            <a:srgbClr val="BF360C"/>
           </a:solidFill>
           <a:ln>
             <a:noFill/>
@@ -7459,7 +7299,7 @@
                 <a:ea typeface="微软雅黑"/>
                 <a:cs typeface="微软雅黑"/>
               </a:rPr>
-              <a:t>揭晓 4/8</a:t>
+              <a:t>天平 1/4</a:t>
             </a:r>
           </a:p>
         </p:txBody>
@@ -7500,43 +7340,7 @@
                 <a:ea typeface="微软雅黑"/>
                 <a:cs typeface="微软雅黑"/>
               </a:rPr>
-              <a:t>主营业务收入</a:t>
-            </a:r>
-          </a:p>
-          <a:p>
-            <a:pPr>
-              <a:spcAft>
-                <a:spcPts val="400"/>
-              </a:spcAft>
-            </a:pPr>
-            <a:r>
-              <a:rPr sz="2200" b="0">
-                <a:solidFill>
-                  <a:srgbClr val="212121"/>
-                </a:solidFill>
-                <a:latin typeface="微软雅黑"/>
-                <a:ea typeface="微软雅黑"/>
-                <a:cs typeface="微软雅黑"/>
-              </a:rPr>
-              <a:t/>
-            </a:r>
-          </a:p>
-          <a:p>
-            <a:pPr>
-              <a:spcAft>
-                <a:spcPts val="400"/>
-              </a:spcAft>
-            </a:pPr>
-            <a:r>
-              <a:rPr sz="2200" b="0">
-                <a:solidFill>
-                  <a:srgbClr val="212121"/>
-                </a:solidFill>
-                <a:latin typeface="微软雅黑"/>
-                <a:ea typeface="微软雅黑"/>
-                <a:cs typeface="微软雅黑"/>
-              </a:rPr>
-              <a:t>→　收入组举牌</a:t>
+              <a:t>老板往店里投入 20 万现金。</a:t>
             </a:r>
           </a:p>
         </p:txBody>
@@ -7620,7 +7424,7 @@
                 <a:ea typeface="微软雅黑"/>
                 <a:cs typeface="微软雅黑"/>
               </a:rPr>
-              <a:t>现在你：错了，全组用小新腔把这句喊一遍。</a:t>
+              <a:t>现在你：是本组这种变化就举牌。</a:t>
             </a:r>
           </a:p>
         </p:txBody>
@@ -7701,7 +7505,7 @@
             <a:avLst/>
           </a:prstGeom>
           <a:solidFill>
-            <a:srgbClr val="BF360C"/>
+            <a:srgbClr val="F9A825"/>
           </a:solidFill>
           <a:ln>
             <a:noFill/>
@@ -7765,7 +7569,7 @@
                 <a:ea typeface="微软雅黑"/>
                 <a:cs typeface="微软雅黑"/>
               </a:rPr>
-              <a:t>举牌 5/8</a:t>
+              <a:t>揭晓 1/4</a:t>
             </a:r>
           </a:p>
         </p:txBody>
@@ -7806,7 +7610,7 @@
                 <a:ea typeface="微软雅黑"/>
                 <a:cs typeface="微软雅黑"/>
               </a:rPr>
-              <a:t>管理费用</a:t>
+              <a:t>同增。银行存款增加，实收资本增加。</a:t>
             </a:r>
           </a:p>
         </p:txBody>
@@ -7890,7 +7694,7 @@
                 <a:ea typeface="微软雅黑"/>
                 <a:cs typeface="微软雅黑"/>
               </a:rPr>
-              <a:t>现在你：数到 3，是本组的举牌。不是的别举。</a:t>
+              <a:t>现在你：错了，全组用小新腔喊一遍。</a:t>
             </a:r>
           </a:p>
         </p:txBody>
@@ -7971,7 +7775,7 @@
             <a:avLst/>
           </a:prstGeom>
           <a:solidFill>
-            <a:srgbClr val="F9A825"/>
+            <a:srgbClr val="BF360C"/>
           </a:solidFill>
           <a:ln>
             <a:noFill/>
@@ -8035,7 +7839,7 @@
                 <a:ea typeface="微软雅黑"/>
                 <a:cs typeface="微软雅黑"/>
               </a:rPr>
-              <a:t>揭晓 5/8</a:t>
+              <a:t>天平 2/4</a:t>
             </a:r>
           </a:p>
         </p:txBody>
@@ -8076,43 +7880,7 @@
                 <a:ea typeface="微软雅黑"/>
                 <a:cs typeface="微软雅黑"/>
               </a:rPr>
-              <a:t>管理费用</a:t>
-            </a:r>
-          </a:p>
-          <a:p>
-            <a:pPr>
-              <a:spcAft>
-                <a:spcPts val="400"/>
-              </a:spcAft>
-            </a:pPr>
-            <a:r>
-              <a:rPr sz="2200" b="0">
-                <a:solidFill>
-                  <a:srgbClr val="212121"/>
-                </a:solidFill>
-                <a:latin typeface="微软雅黑"/>
-                <a:ea typeface="微软雅黑"/>
-                <a:cs typeface="微软雅黑"/>
-              </a:rPr>
-              <a:t/>
-            </a:r>
-          </a:p>
-          <a:p>
-            <a:pPr>
-              <a:spcAft>
-                <a:spcPts val="400"/>
-              </a:spcAft>
-            </a:pPr>
-            <a:r>
-              <a:rPr sz="2200" b="0">
-                <a:solidFill>
-                  <a:srgbClr val="212121"/>
-                </a:solidFill>
-                <a:latin typeface="微软雅黑"/>
-                <a:ea typeface="微软雅黑"/>
-                <a:cs typeface="微软雅黑"/>
-              </a:rPr>
-              <a:t>→　费用组举牌</a:t>
+              <a:t>用银行存款还短期借款 5 万。</a:t>
             </a:r>
           </a:p>
         </p:txBody>
@@ -8196,7 +7964,7 @@
                 <a:ea typeface="微软雅黑"/>
                 <a:cs typeface="微软雅黑"/>
               </a:rPr>
-              <a:t>现在你：错了，全组用小新腔把这句喊一遍。</a:t>
+              <a:t>现在你：是本组这种变化就举牌。</a:t>
             </a:r>
           </a:p>
         </p:txBody>
@@ -8277,7 +8045,7 @@
             <a:avLst/>
           </a:prstGeom>
           <a:solidFill>
-            <a:srgbClr val="BF360C"/>
+            <a:srgbClr val="F9A825"/>
           </a:solidFill>
           <a:ln>
             <a:noFill/>
@@ -8341,7 +8109,7 @@
                 <a:ea typeface="微软雅黑"/>
                 <a:cs typeface="微软雅黑"/>
               </a:rPr>
-              <a:t>举牌 6/8</a:t>
+              <a:t>揭晓 2/4</a:t>
             </a:r>
           </a:p>
         </p:txBody>
@@ -8382,7 +8150,7 @@
                 <a:ea typeface="微软雅黑"/>
                 <a:cs typeface="微软雅黑"/>
               </a:rPr>
-              <a:t>本年利润</a:t>
+              <a:t>同减。银行存款减少，短期借款减少。</a:t>
             </a:r>
           </a:p>
         </p:txBody>
@@ -8466,7 +8234,7 @@
                 <a:ea typeface="微软雅黑"/>
                 <a:cs typeface="微软雅黑"/>
               </a:rPr>
-              <a:t>现在你：数到 3，是本组的举牌。不是的别举。</a:t>
+              <a:t>现在你：错了，全组用小新腔喊一遍。</a:t>
             </a:r>
           </a:p>
         </p:txBody>
@@ -8547,7 +8315,7 @@
             <a:avLst/>
           </a:prstGeom>
           <a:solidFill>
-            <a:srgbClr val="F9A825"/>
+            <a:srgbClr val="BF360C"/>
           </a:solidFill>
           <a:ln>
             <a:noFill/>
@@ -8611,7 +8379,7 @@
                 <a:ea typeface="微软雅黑"/>
                 <a:cs typeface="微软雅黑"/>
               </a:rPr>
-              <a:t>揭晓 6/8</a:t>
+              <a:t>天平 3/4</a:t>
             </a:r>
           </a:p>
         </p:txBody>
@@ -8652,43 +8420,7 @@
                 <a:ea typeface="微软雅黑"/>
                 <a:cs typeface="微软雅黑"/>
               </a:rPr>
-              <a:t>本年利润</a:t>
-            </a:r>
-          </a:p>
-          <a:p>
-            <a:pPr>
-              <a:spcAft>
-                <a:spcPts val="400"/>
-              </a:spcAft>
-            </a:pPr>
-            <a:r>
-              <a:rPr sz="2200" b="0">
-                <a:solidFill>
-                  <a:srgbClr val="212121"/>
-                </a:solidFill>
-                <a:latin typeface="微软雅黑"/>
-                <a:ea typeface="微软雅黑"/>
-                <a:cs typeface="微软雅黑"/>
-              </a:rPr>
-              <a:t/>
-            </a:r>
-          </a:p>
-          <a:p>
-            <a:pPr>
-              <a:spcAft>
-                <a:spcPts val="400"/>
-              </a:spcAft>
-            </a:pPr>
-            <a:r>
-              <a:rPr sz="2200" b="0">
-                <a:solidFill>
-                  <a:srgbClr val="212121"/>
-                </a:solidFill>
-                <a:latin typeface="微软雅黑"/>
-                <a:ea typeface="微软雅黑"/>
-                <a:cs typeface="微软雅黑"/>
-              </a:rPr>
-              <a:t>→　利润组举牌</a:t>
+              <a:t>用银行存款买一台设备 8 万。</a:t>
             </a:r>
           </a:p>
         </p:txBody>
@@ -8772,7 +8504,7 @@
                 <a:ea typeface="微软雅黑"/>
                 <a:cs typeface="微软雅黑"/>
               </a:rPr>
-              <a:t>现在你：错了，全组用小新腔把这句喊一遍。</a:t>
+              <a:t>现在你：是本组这种变化就举牌。</a:t>
             </a:r>
           </a:p>
         </p:txBody>
@@ -8853,7 +8585,7 @@
             <a:avLst/>
           </a:prstGeom>
           <a:solidFill>
-            <a:srgbClr val="BF360C"/>
+            <a:srgbClr val="F9A825"/>
           </a:solidFill>
           <a:ln>
             <a:noFill/>
@@ -8917,7 +8649,7 @@
                 <a:ea typeface="微软雅黑"/>
                 <a:cs typeface="微软雅黑"/>
               </a:rPr>
-              <a:t>举牌 7/8</a:t>
+              <a:t>揭晓 3/4</a:t>
             </a:r>
           </a:p>
         </p:txBody>
@@ -8958,7 +8690,7 @@
                 <a:ea typeface="微软雅黑"/>
                 <a:cs typeface="微软雅黑"/>
               </a:rPr>
-              <a:t>原材料</a:t>
+              <a:t>左边一增一减。固定资产增加，银行存款减少。</a:t>
             </a:r>
           </a:p>
         </p:txBody>
@@ -9042,7 +8774,7 @@
                 <a:ea typeface="微软雅黑"/>
                 <a:cs typeface="微软雅黑"/>
               </a:rPr>
-              <a:t>现在你：数到 3，是本组的举牌。不是的别举。</a:t>
+              <a:t>现在你：错了，全组用小新腔喊一遍。</a:t>
             </a:r>
           </a:p>
         </p:txBody>
@@ -9123,7 +8855,7 @@
             <a:avLst/>
           </a:prstGeom>
           <a:solidFill>
-            <a:srgbClr val="F9A825"/>
+            <a:srgbClr val="BF360C"/>
           </a:solidFill>
           <a:ln>
             <a:noFill/>
@@ -9187,7 +8919,7 @@
                 <a:ea typeface="微软雅黑"/>
                 <a:cs typeface="微软雅黑"/>
               </a:rPr>
-              <a:t>揭晓 7/8</a:t>
+              <a:t>天平 4/4</a:t>
             </a:r>
           </a:p>
         </p:txBody>
@@ -9228,43 +8960,7 @@
                 <a:ea typeface="微软雅黑"/>
                 <a:cs typeface="微软雅黑"/>
               </a:rPr>
-              <a:t>原材料</a:t>
-            </a:r>
-          </a:p>
-          <a:p>
-            <a:pPr>
-              <a:spcAft>
-                <a:spcPts val="400"/>
-              </a:spcAft>
-            </a:pPr>
-            <a:r>
-              <a:rPr sz="2200" b="0">
-                <a:solidFill>
-                  <a:srgbClr val="212121"/>
-                </a:solidFill>
-                <a:latin typeface="微软雅黑"/>
-                <a:ea typeface="微软雅黑"/>
-                <a:cs typeface="微软雅黑"/>
-              </a:rPr>
-              <a:t/>
-            </a:r>
-          </a:p>
-          <a:p>
-            <a:pPr>
-              <a:spcAft>
-                <a:spcPts val="400"/>
-              </a:spcAft>
-            </a:pPr>
-            <a:r>
-              <a:rPr sz="2200" b="0">
-                <a:solidFill>
-                  <a:srgbClr val="212121"/>
-                </a:solidFill>
-                <a:latin typeface="微软雅黑"/>
-                <a:ea typeface="微软雅黑"/>
-                <a:cs typeface="微软雅黑"/>
-              </a:rPr>
-              <a:t>→　资产组举牌</a:t>
+              <a:t>用资本公积 3 万转增实收资本。</a:t>
             </a:r>
           </a:p>
         </p:txBody>
@@ -9348,7 +9044,7 @@
                 <a:ea typeface="微软雅黑"/>
                 <a:cs typeface="微软雅黑"/>
               </a:rPr>
-              <a:t>现在你：错了，全组用小新腔把这句喊一遍。</a:t>
+              <a:t>现在你：是本组这种变化就举牌。</a:t>
             </a:r>
           </a:p>
         </p:txBody>
@@ -9429,7 +9125,7 @@
             <a:avLst/>
           </a:prstGeom>
           <a:solidFill>
-            <a:srgbClr val="BF360C"/>
+            <a:srgbClr val="F9A825"/>
           </a:solidFill>
           <a:ln>
             <a:noFill/>
@@ -9493,7 +9189,7 @@
                 <a:ea typeface="微软雅黑"/>
                 <a:cs typeface="微软雅黑"/>
               </a:rPr>
-              <a:t>举牌 8/8</a:t>
+              <a:t>揭晓 4/4</a:t>
             </a:r>
           </a:p>
         </p:txBody>
@@ -9534,7 +9230,7 @@
                 <a:ea typeface="微软雅黑"/>
                 <a:cs typeface="微软雅黑"/>
               </a:rPr>
-              <a:t>应付账款</a:t>
+              <a:t>右边一增一减。实收资本增加，资本公积减少。</a:t>
             </a:r>
           </a:p>
         </p:txBody>
@@ -9618,7 +9314,7 @@
                 <a:ea typeface="微软雅黑"/>
                 <a:cs typeface="微软雅黑"/>
               </a:rPr>
-              <a:t>现在你：数到 3，是本组的举牌。不是的别举。</a:t>
+              <a:t>现在你：错了，全组用小新腔喊一遍。</a:t>
             </a:r>
           </a:p>
         </p:txBody>
@@ -9763,7 +9459,7 @@
                 <a:ea typeface="微软雅黑"/>
                 <a:cs typeface="微软雅黑"/>
               </a:rPr>
-              <a:t>任务①　给图配音</a:t>
+              <a:t>活动日　怎么上</a:t>
             </a:r>
           </a:p>
         </p:txBody>
@@ -9804,7 +9500,7 @@
                 <a:ea typeface="微软雅黑"/>
                 <a:cs typeface="微软雅黑"/>
               </a:rPr>
-              <a:t>老师把图投出来（或发群）。你用手机录音 20～40 秒。</a:t>
+              <a:t>每个项目最多 1 次。前一天群里发名单和牌上的字。</a:t>
             </a:r>
           </a:p>
           <a:p>
@@ -9822,7 +9518,7 @@
                 <a:ea typeface="微软雅黑"/>
                 <a:cs typeface="微软雅黑"/>
               </a:rPr>
-              <a:t>用自己的声音把图里的人说活。科目、借贷说对了算过关。</a:t>
+              <a:t>进门按桌签坐。10～15 分钟。结束收回。</a:t>
             </a:r>
           </a:p>
           <a:p>
@@ -9840,7 +9536,7 @@
                 <a:ea typeface="微软雅黑"/>
                 <a:cs typeface="微软雅黑"/>
               </a:rPr>
-              <a:t>小新腔、东北话都行。发班级群。不用交本子。</a:t>
+              <a:t>口令在投影上，每题只有一个答案。</a:t>
             </a:r>
           </a:p>
           <a:p>
@@ -9858,7 +9554,7 @@
                 <a:ea typeface="微软雅黑"/>
                 <a:cs typeface="微软雅黑"/>
               </a:rPr>
-              <a:t>交了 2 分。科目和借贷都说对 5 分。</a:t>
+              <a:t>没接住：全组用小新腔把正确答案喊一遍，20 秒。</a:t>
             </a:r>
           </a:p>
         </p:txBody>
@@ -9942,2833 +9638,7 @@
                 <a:ea typeface="微软雅黑"/>
                 <a:cs typeface="微软雅黑"/>
               </a:rPr>
-              <a:t>现在你：课后录音发群。不用交本子。不用举手。</a:t>
-            </a:r>
-          </a:p>
-        </p:txBody>
-      </p:sp>
-    </p:spTree>
-  </p:cSld>
-  <p:clrMapOvr>
-    <a:masterClrMapping/>
-  </p:clrMapOvr>
-</p:sld>
-</file>
-
-<file path=ppt/slides/slide30.xml><?xml version="1.0" encoding="utf-8"?>
-<p:sld xmlns:a="http://schemas.openxmlformats.org/drawingml/2006/main" xmlns:p="http://schemas.openxmlformats.org/presentationml/2006/main" xmlns:r="http://schemas.openxmlformats.org/officeDocument/2006/relationships">
-  <p:cSld>
-    <p:spTree>
-      <p:nvGrpSpPr>
-        <p:cNvPr id="1" name=""/>
-        <p:cNvGrpSpPr/>
-        <p:nvPr/>
-      </p:nvGrpSpPr>
-      <p:grpSpPr/>
-      <p:sp>
-        <p:nvSpPr>
-          <p:cNvPr id="2" name="Rectangle 1"/>
-          <p:cNvSpPr/>
-          <p:nvPr/>
-        </p:nvSpPr>
-        <p:spPr>
-          <a:xfrm>
-            <a:off x="0" y="0"/>
-            <a:ext cx="12191695" cy="6858000"/>
-          </a:xfrm>
-          <a:prstGeom prst="rect">
-            <a:avLst/>
-          </a:prstGeom>
-          <a:solidFill>
-            <a:srgbClr val="FFF8E1"/>
-          </a:solidFill>
-          <a:ln>
-            <a:noFill/>
-          </a:ln>
-        </p:spPr>
-        <p:style>
-          <a:lnRef idx="1">
-            <a:schemeClr val="accent1"/>
-          </a:lnRef>
-          <a:fillRef idx="3">
-            <a:schemeClr val="accent1"/>
-          </a:fillRef>
-          <a:effectRef idx="2">
-            <a:schemeClr val="accent1"/>
-          </a:effectRef>
-          <a:fontRef idx="minor">
-            <a:schemeClr val="lt1"/>
-          </a:fontRef>
-        </p:style>
-        <p:txBody>
-          <a:bodyPr rtlCol="0" anchor="ctr"/>
-          <a:lstStyle/>
-          <a:p>
-            <a:pPr algn="ctr"/>
-          </a:p>
-        </p:txBody>
-      </p:sp>
-      <p:sp>
-        <p:nvSpPr>
-          <p:cNvPr id="3" name="Rectangle 2"/>
-          <p:cNvSpPr/>
-          <p:nvPr/>
-        </p:nvSpPr>
-        <p:spPr>
-          <a:xfrm>
-            <a:off x="0" y="0"/>
-            <a:ext cx="12191695" cy="749808"/>
-          </a:xfrm>
-          <a:prstGeom prst="rect">
-            <a:avLst/>
-          </a:prstGeom>
-          <a:solidFill>
-            <a:srgbClr val="F9A825"/>
-          </a:solidFill>
-          <a:ln>
-            <a:noFill/>
-          </a:ln>
-        </p:spPr>
-        <p:style>
-          <a:lnRef idx="1">
-            <a:schemeClr val="accent1"/>
-          </a:lnRef>
-          <a:fillRef idx="3">
-            <a:schemeClr val="accent1"/>
-          </a:fillRef>
-          <a:effectRef idx="2">
-            <a:schemeClr val="accent1"/>
-          </a:effectRef>
-          <a:fontRef idx="minor">
-            <a:schemeClr val="lt1"/>
-          </a:fontRef>
-        </p:style>
-        <p:txBody>
-          <a:bodyPr rtlCol="0" anchor="ctr"/>
-          <a:lstStyle/>
-          <a:p>
-            <a:pPr algn="ctr"/>
-          </a:p>
-        </p:txBody>
-      </p:sp>
-      <p:sp>
-        <p:nvSpPr>
-          <p:cNvPr id="4" name="TextBox 3"/>
-          <p:cNvSpPr txBox="1"/>
-          <p:nvPr/>
-        </p:nvSpPr>
-        <p:spPr>
-          <a:xfrm>
-            <a:off x="274320" y="128016"/>
-            <a:ext cx="11612880" cy="512064"/>
-          </a:xfrm>
-          <a:prstGeom prst="rect">
-            <a:avLst/>
-          </a:prstGeom>
-          <a:noFill/>
-        </p:spPr>
-        <p:txBody>
-          <a:bodyPr wrap="square">
-            <a:spAutoFit/>
-          </a:bodyPr>
-          <a:lstStyle/>
-          <a:p>
-            <a:pPr>
-              <a:spcAft>
-                <a:spcPts val="400"/>
-              </a:spcAft>
-            </a:pPr>
-            <a:r>
-              <a:rPr sz="2200" b="1">
-                <a:solidFill>
-                  <a:srgbClr val="FFFFFF"/>
-                </a:solidFill>
-                <a:latin typeface="微软雅黑"/>
-                <a:ea typeface="微软雅黑"/>
-                <a:cs typeface="微软雅黑"/>
-              </a:rPr>
-              <a:t>揭晓 8/8</a:t>
-            </a:r>
-          </a:p>
-        </p:txBody>
-      </p:sp>
-      <p:sp>
-        <p:nvSpPr>
-          <p:cNvPr id="5" name="TextBox 4"/>
-          <p:cNvSpPr txBox="1"/>
-          <p:nvPr/>
-        </p:nvSpPr>
-        <p:spPr>
-          <a:xfrm>
-            <a:off x="457200" y="960120"/>
-            <a:ext cx="11247120" cy="4754880"/>
-          </a:xfrm>
-          <a:prstGeom prst="rect">
-            <a:avLst/>
-          </a:prstGeom>
-          <a:noFill/>
-        </p:spPr>
-        <p:txBody>
-          <a:bodyPr wrap="square">
-            <a:spAutoFit/>
-          </a:bodyPr>
-          <a:lstStyle/>
-          <a:p>
-            <a:pPr>
-              <a:spcAft>
-                <a:spcPts val="400"/>
-              </a:spcAft>
-            </a:pPr>
-            <a:r>
-              <a:rPr sz="2200" b="0">
-                <a:solidFill>
-                  <a:srgbClr val="212121"/>
-                </a:solidFill>
-                <a:latin typeface="微软雅黑"/>
-                <a:ea typeface="微软雅黑"/>
-                <a:cs typeface="微软雅黑"/>
-              </a:rPr>
-              <a:t>应付账款</a:t>
-            </a:r>
-          </a:p>
-          <a:p>
-            <a:pPr>
-              <a:spcAft>
-                <a:spcPts val="400"/>
-              </a:spcAft>
-            </a:pPr>
-            <a:r>
-              <a:rPr sz="2200" b="0">
-                <a:solidFill>
-                  <a:srgbClr val="212121"/>
-                </a:solidFill>
-                <a:latin typeface="微软雅黑"/>
-                <a:ea typeface="微软雅黑"/>
-                <a:cs typeface="微软雅黑"/>
-              </a:rPr>
-              <a:t/>
-            </a:r>
-          </a:p>
-          <a:p>
-            <a:pPr>
-              <a:spcAft>
-                <a:spcPts val="400"/>
-              </a:spcAft>
-            </a:pPr>
-            <a:r>
-              <a:rPr sz="2200" b="0">
-                <a:solidFill>
-                  <a:srgbClr val="212121"/>
-                </a:solidFill>
-                <a:latin typeface="微软雅黑"/>
-                <a:ea typeface="微软雅黑"/>
-                <a:cs typeface="微软雅黑"/>
-              </a:rPr>
-              <a:t>→　负债组举牌</a:t>
-            </a:r>
-          </a:p>
-        </p:txBody>
-      </p:sp>
-      <p:sp>
-        <p:nvSpPr>
-          <p:cNvPr id="6" name="Rectangle 5"/>
-          <p:cNvSpPr/>
-          <p:nvPr/>
-        </p:nvSpPr>
-        <p:spPr>
-          <a:xfrm>
-            <a:off x="0" y="5897880"/>
-            <a:ext cx="12191695" cy="960120"/>
-          </a:xfrm>
-          <a:prstGeom prst="rect">
-            <a:avLst/>
-          </a:prstGeom>
-          <a:solidFill>
-            <a:srgbClr val="2E7D32"/>
-          </a:solidFill>
-          <a:ln>
-            <a:noFill/>
-          </a:ln>
-        </p:spPr>
-        <p:style>
-          <a:lnRef idx="1">
-            <a:schemeClr val="accent1"/>
-          </a:lnRef>
-          <a:fillRef idx="3">
-            <a:schemeClr val="accent1"/>
-          </a:fillRef>
-          <a:effectRef idx="2">
-            <a:schemeClr val="accent1"/>
-          </a:effectRef>
-          <a:fontRef idx="minor">
-            <a:schemeClr val="lt1"/>
-          </a:fontRef>
-        </p:style>
-        <p:txBody>
-          <a:bodyPr rtlCol="0" anchor="ctr"/>
-          <a:lstStyle/>
-          <a:p>
-            <a:pPr algn="ctr"/>
-          </a:p>
-        </p:txBody>
-      </p:sp>
-      <p:sp>
-        <p:nvSpPr>
-          <p:cNvPr id="7" name="TextBox 6"/>
-          <p:cNvSpPr txBox="1"/>
-          <p:nvPr/>
-        </p:nvSpPr>
-        <p:spPr>
-          <a:xfrm>
-            <a:off x="274320" y="5961888"/>
-            <a:ext cx="11612880" cy="841248"/>
-          </a:xfrm>
-          <a:prstGeom prst="rect">
-            <a:avLst/>
-          </a:prstGeom>
-          <a:noFill/>
-        </p:spPr>
-        <p:txBody>
-          <a:bodyPr wrap="square">
-            <a:spAutoFit/>
-          </a:bodyPr>
-          <a:lstStyle/>
-          <a:p>
-            <a:pPr>
-              <a:spcAft>
-                <a:spcPts val="400"/>
-              </a:spcAft>
-            </a:pPr>
-            <a:r>
-              <a:rPr sz="1500" b="1">
-                <a:solidFill>
-                  <a:srgbClr val="FFFFFF"/>
-                </a:solidFill>
-                <a:latin typeface="微软雅黑"/>
-                <a:ea typeface="微软雅黑"/>
-                <a:cs typeface="微软雅黑"/>
-              </a:rPr>
-              <a:t>现在你：错了，全组用小新腔把这句喊一遍。</a:t>
-            </a:r>
-          </a:p>
-        </p:txBody>
-      </p:sp>
-    </p:spTree>
-  </p:cSld>
-  <p:clrMapOvr>
-    <a:masterClrMapping/>
-  </p:clrMapOvr>
-</p:sld>
-</file>
-
-<file path=ppt/slides/slide31.xml><?xml version="1.0" encoding="utf-8"?>
-<p:sld xmlns:a="http://schemas.openxmlformats.org/drawingml/2006/main" xmlns:p="http://schemas.openxmlformats.org/presentationml/2006/main" xmlns:r="http://schemas.openxmlformats.org/officeDocument/2006/relationships">
-  <p:cSld>
-    <p:spTree>
-      <p:nvGrpSpPr>
-        <p:cNvPr id="1" name=""/>
-        <p:cNvGrpSpPr/>
-        <p:nvPr/>
-      </p:nvGrpSpPr>
-      <p:grpSpPr/>
-      <p:sp>
-        <p:nvSpPr>
-          <p:cNvPr id="2" name="Rectangle 1"/>
-          <p:cNvSpPr/>
-          <p:nvPr/>
-        </p:nvSpPr>
-        <p:spPr>
-          <a:xfrm>
-            <a:off x="0" y="0"/>
-            <a:ext cx="12191695" cy="6858000"/>
-          </a:xfrm>
-          <a:prstGeom prst="rect">
-            <a:avLst/>
-          </a:prstGeom>
-          <a:solidFill>
-            <a:srgbClr val="E3F2FD"/>
-          </a:solidFill>
-          <a:ln>
-            <a:noFill/>
-          </a:ln>
-        </p:spPr>
-        <p:style>
-          <a:lnRef idx="1">
-            <a:schemeClr val="accent1"/>
-          </a:lnRef>
-          <a:fillRef idx="3">
-            <a:schemeClr val="accent1"/>
-          </a:fillRef>
-          <a:effectRef idx="2">
-            <a:schemeClr val="accent1"/>
-          </a:effectRef>
-          <a:fontRef idx="minor">
-            <a:schemeClr val="lt1"/>
-          </a:fontRef>
-        </p:style>
-        <p:txBody>
-          <a:bodyPr rtlCol="0" anchor="ctr"/>
-          <a:lstStyle/>
-          <a:p>
-            <a:pPr algn="ctr"/>
-          </a:p>
-        </p:txBody>
-      </p:sp>
-      <p:sp>
-        <p:nvSpPr>
-          <p:cNvPr id="3" name="Rectangle 2"/>
-          <p:cNvSpPr/>
-          <p:nvPr/>
-        </p:nvSpPr>
-        <p:spPr>
-          <a:xfrm>
-            <a:off x="0" y="0"/>
-            <a:ext cx="12191695" cy="749808"/>
-          </a:xfrm>
-          <a:prstGeom prst="rect">
-            <a:avLst/>
-          </a:prstGeom>
-          <a:solidFill>
-            <a:srgbClr val="BF360C"/>
-          </a:solidFill>
-          <a:ln>
-            <a:noFill/>
-          </a:ln>
-        </p:spPr>
-        <p:style>
-          <a:lnRef idx="1">
-            <a:schemeClr val="accent1"/>
-          </a:lnRef>
-          <a:fillRef idx="3">
-            <a:schemeClr val="accent1"/>
-          </a:fillRef>
-          <a:effectRef idx="2">
-            <a:schemeClr val="accent1"/>
-          </a:effectRef>
-          <a:fontRef idx="minor">
-            <a:schemeClr val="lt1"/>
-          </a:fontRef>
-        </p:style>
-        <p:txBody>
-          <a:bodyPr rtlCol="0" anchor="ctr"/>
-          <a:lstStyle/>
-          <a:p>
-            <a:pPr algn="ctr"/>
-          </a:p>
-        </p:txBody>
-      </p:sp>
-      <p:sp>
-        <p:nvSpPr>
-          <p:cNvPr id="4" name="TextBox 3"/>
-          <p:cNvSpPr txBox="1"/>
-          <p:nvPr/>
-        </p:nvSpPr>
-        <p:spPr>
-          <a:xfrm>
-            <a:off x="274320" y="128016"/>
-            <a:ext cx="11612880" cy="512064"/>
-          </a:xfrm>
-          <a:prstGeom prst="rect">
-            <a:avLst/>
-          </a:prstGeom>
-          <a:noFill/>
-        </p:spPr>
-        <p:txBody>
-          <a:bodyPr wrap="square">
-            <a:spAutoFit/>
-          </a:bodyPr>
-          <a:lstStyle/>
-          <a:p>
-            <a:pPr>
-              <a:spcAft>
-                <a:spcPts val="400"/>
-              </a:spcAft>
-            </a:pPr>
-            <a:r>
-              <a:rPr sz="2200" b="1">
-                <a:solidFill>
-                  <a:srgbClr val="FFFFFF"/>
-                </a:solidFill>
-                <a:latin typeface="微软雅黑"/>
-                <a:ea typeface="微软雅黑"/>
-                <a:cs typeface="微软雅黑"/>
-              </a:rPr>
-              <a:t>活动日　天平四种变化　规则</a:t>
-            </a:r>
-          </a:p>
-        </p:txBody>
-      </p:sp>
-      <p:sp>
-        <p:nvSpPr>
-          <p:cNvPr id="5" name="TextBox 4"/>
-          <p:cNvSpPr txBox="1"/>
-          <p:nvPr/>
-        </p:nvSpPr>
-        <p:spPr>
-          <a:xfrm>
-            <a:off x="457200" y="960120"/>
-            <a:ext cx="11247120" cy="4754880"/>
-          </a:xfrm>
-          <a:prstGeom prst="rect">
-            <a:avLst/>
-          </a:prstGeom>
-          <a:noFill/>
-        </p:spPr>
-        <p:txBody>
-          <a:bodyPr wrap="square">
-            <a:spAutoFit/>
-          </a:bodyPr>
-          <a:lstStyle/>
-          <a:p>
-            <a:pPr>
-              <a:spcAft>
-                <a:spcPts val="400"/>
-              </a:spcAft>
-            </a:pPr>
-            <a:r>
-              <a:rPr sz="2200" b="0">
-                <a:solidFill>
-                  <a:srgbClr val="212121"/>
-                </a:solidFill>
-                <a:latin typeface="微软雅黑"/>
-                <a:ea typeface="微软雅黑"/>
-                <a:cs typeface="微软雅黑"/>
-              </a:rPr>
-              <a:t>4 组：同增 / 同减 / 左边一增一减 / 右边一增一减</a:t>
-            </a:r>
-          </a:p>
-          <a:p>
-            <a:pPr>
-              <a:spcAft>
-                <a:spcPts val="400"/>
-              </a:spcAft>
-            </a:pPr>
-            <a:r>
-              <a:rPr sz="2200" b="0">
-                <a:solidFill>
-                  <a:srgbClr val="212121"/>
-                </a:solidFill>
-                <a:latin typeface="微软雅黑"/>
-                <a:ea typeface="微软雅黑"/>
-                <a:cs typeface="微软雅黑"/>
-              </a:rPr>
-              <a:t>老师念一笔业务。是你们这种变化就举牌。只有一种答案。</a:t>
-            </a:r>
-          </a:p>
-        </p:txBody>
-      </p:sp>
-      <p:sp>
-        <p:nvSpPr>
-          <p:cNvPr id="6" name="Rectangle 5"/>
-          <p:cNvSpPr/>
-          <p:nvPr/>
-        </p:nvSpPr>
-        <p:spPr>
-          <a:xfrm>
-            <a:off x="0" y="5897880"/>
-            <a:ext cx="12191695" cy="960120"/>
-          </a:xfrm>
-          <a:prstGeom prst="rect">
-            <a:avLst/>
-          </a:prstGeom>
-          <a:solidFill>
-            <a:srgbClr val="2E7D32"/>
-          </a:solidFill>
-          <a:ln>
-            <a:noFill/>
-          </a:ln>
-        </p:spPr>
-        <p:style>
-          <a:lnRef idx="1">
-            <a:schemeClr val="accent1"/>
-          </a:lnRef>
-          <a:fillRef idx="3">
-            <a:schemeClr val="accent1"/>
-          </a:fillRef>
-          <a:effectRef idx="2">
-            <a:schemeClr val="accent1"/>
-          </a:effectRef>
-          <a:fontRef idx="minor">
-            <a:schemeClr val="lt1"/>
-          </a:fontRef>
-        </p:style>
-        <p:txBody>
-          <a:bodyPr rtlCol="0" anchor="ctr"/>
-          <a:lstStyle/>
-          <a:p>
-            <a:pPr algn="ctr"/>
-          </a:p>
-        </p:txBody>
-      </p:sp>
-      <p:sp>
-        <p:nvSpPr>
-          <p:cNvPr id="7" name="TextBox 6"/>
-          <p:cNvSpPr txBox="1"/>
-          <p:nvPr/>
-        </p:nvSpPr>
-        <p:spPr>
-          <a:xfrm>
-            <a:off x="274320" y="5961888"/>
-            <a:ext cx="11612880" cy="841248"/>
-          </a:xfrm>
-          <a:prstGeom prst="rect">
-            <a:avLst/>
-          </a:prstGeom>
-          <a:noFill/>
-        </p:spPr>
-        <p:txBody>
-          <a:bodyPr wrap="square">
-            <a:spAutoFit/>
-          </a:bodyPr>
-          <a:lstStyle/>
-          <a:p>
-            <a:pPr>
-              <a:spcAft>
-                <a:spcPts val="400"/>
-              </a:spcAft>
-            </a:pPr>
-            <a:r>
-              <a:rPr sz="1500" b="1">
-                <a:solidFill>
-                  <a:srgbClr val="FFFFFF"/>
-                </a:solidFill>
-                <a:latin typeface="微软雅黑"/>
-                <a:ea typeface="微软雅黑"/>
-                <a:cs typeface="微软雅黑"/>
-              </a:rPr>
-              <a:t>现在你：按桌签入座。听到口令再举牌。</a:t>
-            </a:r>
-          </a:p>
-        </p:txBody>
-      </p:sp>
-    </p:spTree>
-  </p:cSld>
-  <p:clrMapOvr>
-    <a:masterClrMapping/>
-  </p:clrMapOvr>
-</p:sld>
-</file>
-
-<file path=ppt/slides/slide32.xml><?xml version="1.0" encoding="utf-8"?>
-<p:sld xmlns:a="http://schemas.openxmlformats.org/drawingml/2006/main" xmlns:p="http://schemas.openxmlformats.org/presentationml/2006/main" xmlns:r="http://schemas.openxmlformats.org/officeDocument/2006/relationships">
-  <p:cSld>
-    <p:spTree>
-      <p:nvGrpSpPr>
-        <p:cNvPr id="1" name=""/>
-        <p:cNvGrpSpPr/>
-        <p:nvPr/>
-      </p:nvGrpSpPr>
-      <p:grpSpPr/>
-      <p:sp>
-        <p:nvSpPr>
-          <p:cNvPr id="2" name="Rectangle 1"/>
-          <p:cNvSpPr/>
-          <p:nvPr/>
-        </p:nvSpPr>
-        <p:spPr>
-          <a:xfrm>
-            <a:off x="0" y="0"/>
-            <a:ext cx="12191695" cy="6858000"/>
-          </a:xfrm>
-          <a:prstGeom prst="rect">
-            <a:avLst/>
-          </a:prstGeom>
-          <a:solidFill>
-            <a:srgbClr val="FFF8E1"/>
-          </a:solidFill>
-          <a:ln>
-            <a:noFill/>
-          </a:ln>
-        </p:spPr>
-        <p:style>
-          <a:lnRef idx="1">
-            <a:schemeClr val="accent1"/>
-          </a:lnRef>
-          <a:fillRef idx="3">
-            <a:schemeClr val="accent1"/>
-          </a:fillRef>
-          <a:effectRef idx="2">
-            <a:schemeClr val="accent1"/>
-          </a:effectRef>
-          <a:fontRef idx="minor">
-            <a:schemeClr val="lt1"/>
-          </a:fontRef>
-        </p:style>
-        <p:txBody>
-          <a:bodyPr rtlCol="0" anchor="ctr"/>
-          <a:lstStyle/>
-          <a:p>
-            <a:pPr algn="ctr"/>
-          </a:p>
-        </p:txBody>
-      </p:sp>
-      <p:sp>
-        <p:nvSpPr>
-          <p:cNvPr id="3" name="Rectangle 2"/>
-          <p:cNvSpPr/>
-          <p:nvPr/>
-        </p:nvSpPr>
-        <p:spPr>
-          <a:xfrm>
-            <a:off x="0" y="0"/>
-            <a:ext cx="12191695" cy="749808"/>
-          </a:xfrm>
-          <a:prstGeom prst="rect">
-            <a:avLst/>
-          </a:prstGeom>
-          <a:solidFill>
-            <a:srgbClr val="BF360C"/>
-          </a:solidFill>
-          <a:ln>
-            <a:noFill/>
-          </a:ln>
-        </p:spPr>
-        <p:style>
-          <a:lnRef idx="1">
-            <a:schemeClr val="accent1"/>
-          </a:lnRef>
-          <a:fillRef idx="3">
-            <a:schemeClr val="accent1"/>
-          </a:fillRef>
-          <a:effectRef idx="2">
-            <a:schemeClr val="accent1"/>
-          </a:effectRef>
-          <a:fontRef idx="minor">
-            <a:schemeClr val="lt1"/>
-          </a:fontRef>
-        </p:style>
-        <p:txBody>
-          <a:bodyPr rtlCol="0" anchor="ctr"/>
-          <a:lstStyle/>
-          <a:p>
-            <a:pPr algn="ctr"/>
-          </a:p>
-        </p:txBody>
-      </p:sp>
-      <p:sp>
-        <p:nvSpPr>
-          <p:cNvPr id="4" name="TextBox 3"/>
-          <p:cNvSpPr txBox="1"/>
-          <p:nvPr/>
-        </p:nvSpPr>
-        <p:spPr>
-          <a:xfrm>
-            <a:off x="274320" y="128016"/>
-            <a:ext cx="11612880" cy="512064"/>
-          </a:xfrm>
-          <a:prstGeom prst="rect">
-            <a:avLst/>
-          </a:prstGeom>
-          <a:noFill/>
-        </p:spPr>
-        <p:txBody>
-          <a:bodyPr wrap="square">
-            <a:spAutoFit/>
-          </a:bodyPr>
-          <a:lstStyle/>
-          <a:p>
-            <a:pPr>
-              <a:spcAft>
-                <a:spcPts val="400"/>
-              </a:spcAft>
-            </a:pPr>
-            <a:r>
-              <a:rPr sz="2200" b="1">
-                <a:solidFill>
-                  <a:srgbClr val="FFFFFF"/>
-                </a:solidFill>
-                <a:latin typeface="微软雅黑"/>
-                <a:ea typeface="微软雅黑"/>
-                <a:cs typeface="微软雅黑"/>
-              </a:rPr>
-              <a:t>天平 1/4</a:t>
-            </a:r>
-          </a:p>
-        </p:txBody>
-      </p:sp>
-      <p:sp>
-        <p:nvSpPr>
-          <p:cNvPr id="5" name="TextBox 4"/>
-          <p:cNvSpPr txBox="1"/>
-          <p:nvPr/>
-        </p:nvSpPr>
-        <p:spPr>
-          <a:xfrm>
-            <a:off x="457200" y="960120"/>
-            <a:ext cx="11247120" cy="4754880"/>
-          </a:xfrm>
-          <a:prstGeom prst="rect">
-            <a:avLst/>
-          </a:prstGeom>
-          <a:noFill/>
-        </p:spPr>
-        <p:txBody>
-          <a:bodyPr wrap="square">
-            <a:spAutoFit/>
-          </a:bodyPr>
-          <a:lstStyle/>
-          <a:p>
-            <a:pPr>
-              <a:spcAft>
-                <a:spcPts val="400"/>
-              </a:spcAft>
-            </a:pPr>
-            <a:r>
-              <a:rPr sz="2200" b="0">
-                <a:solidFill>
-                  <a:srgbClr val="212121"/>
-                </a:solidFill>
-                <a:latin typeface="微软雅黑"/>
-                <a:ea typeface="微软雅黑"/>
-                <a:cs typeface="微软雅黑"/>
-              </a:rPr>
-              <a:t>老板往店里投入 20 万现金。</a:t>
-            </a:r>
-          </a:p>
-        </p:txBody>
-      </p:sp>
-      <p:sp>
-        <p:nvSpPr>
-          <p:cNvPr id="6" name="Rectangle 5"/>
-          <p:cNvSpPr/>
-          <p:nvPr/>
-        </p:nvSpPr>
-        <p:spPr>
-          <a:xfrm>
-            <a:off x="0" y="5897880"/>
-            <a:ext cx="12191695" cy="960120"/>
-          </a:xfrm>
-          <a:prstGeom prst="rect">
-            <a:avLst/>
-          </a:prstGeom>
-          <a:solidFill>
-            <a:srgbClr val="2E7D32"/>
-          </a:solidFill>
-          <a:ln>
-            <a:noFill/>
-          </a:ln>
-        </p:spPr>
-        <p:style>
-          <a:lnRef idx="1">
-            <a:schemeClr val="accent1"/>
-          </a:lnRef>
-          <a:fillRef idx="3">
-            <a:schemeClr val="accent1"/>
-          </a:fillRef>
-          <a:effectRef idx="2">
-            <a:schemeClr val="accent1"/>
-          </a:effectRef>
-          <a:fontRef idx="minor">
-            <a:schemeClr val="lt1"/>
-          </a:fontRef>
-        </p:style>
-        <p:txBody>
-          <a:bodyPr rtlCol="0" anchor="ctr"/>
-          <a:lstStyle/>
-          <a:p>
-            <a:pPr algn="ctr"/>
-          </a:p>
-        </p:txBody>
-      </p:sp>
-      <p:sp>
-        <p:nvSpPr>
-          <p:cNvPr id="7" name="TextBox 6"/>
-          <p:cNvSpPr txBox="1"/>
-          <p:nvPr/>
-        </p:nvSpPr>
-        <p:spPr>
-          <a:xfrm>
-            <a:off x="274320" y="5961888"/>
-            <a:ext cx="11612880" cy="841248"/>
-          </a:xfrm>
-          <a:prstGeom prst="rect">
-            <a:avLst/>
-          </a:prstGeom>
-          <a:noFill/>
-        </p:spPr>
-        <p:txBody>
-          <a:bodyPr wrap="square">
-            <a:spAutoFit/>
-          </a:bodyPr>
-          <a:lstStyle/>
-          <a:p>
-            <a:pPr>
-              <a:spcAft>
-                <a:spcPts val="400"/>
-              </a:spcAft>
-            </a:pPr>
-            <a:r>
-              <a:rPr sz="1500" b="1">
-                <a:solidFill>
-                  <a:srgbClr val="FFFFFF"/>
-                </a:solidFill>
-                <a:latin typeface="微软雅黑"/>
-                <a:ea typeface="微软雅黑"/>
-                <a:cs typeface="微软雅黑"/>
-              </a:rPr>
-              <a:t>现在你：是本组这种变化就举牌。</a:t>
-            </a:r>
-          </a:p>
-        </p:txBody>
-      </p:sp>
-    </p:spTree>
-  </p:cSld>
-  <p:clrMapOvr>
-    <a:masterClrMapping/>
-  </p:clrMapOvr>
-</p:sld>
-</file>
-
-<file path=ppt/slides/slide33.xml><?xml version="1.0" encoding="utf-8"?>
-<p:sld xmlns:a="http://schemas.openxmlformats.org/drawingml/2006/main" xmlns:p="http://schemas.openxmlformats.org/presentationml/2006/main" xmlns:r="http://schemas.openxmlformats.org/officeDocument/2006/relationships">
-  <p:cSld>
-    <p:spTree>
-      <p:nvGrpSpPr>
-        <p:cNvPr id="1" name=""/>
-        <p:cNvGrpSpPr/>
-        <p:nvPr/>
-      </p:nvGrpSpPr>
-      <p:grpSpPr/>
-      <p:sp>
-        <p:nvSpPr>
-          <p:cNvPr id="2" name="Rectangle 1"/>
-          <p:cNvSpPr/>
-          <p:nvPr/>
-        </p:nvSpPr>
-        <p:spPr>
-          <a:xfrm>
-            <a:off x="0" y="0"/>
-            <a:ext cx="12191695" cy="6858000"/>
-          </a:xfrm>
-          <a:prstGeom prst="rect">
-            <a:avLst/>
-          </a:prstGeom>
-          <a:solidFill>
-            <a:srgbClr val="FFF8E1"/>
-          </a:solidFill>
-          <a:ln>
-            <a:noFill/>
-          </a:ln>
-        </p:spPr>
-        <p:style>
-          <a:lnRef idx="1">
-            <a:schemeClr val="accent1"/>
-          </a:lnRef>
-          <a:fillRef idx="3">
-            <a:schemeClr val="accent1"/>
-          </a:fillRef>
-          <a:effectRef idx="2">
-            <a:schemeClr val="accent1"/>
-          </a:effectRef>
-          <a:fontRef idx="minor">
-            <a:schemeClr val="lt1"/>
-          </a:fontRef>
-        </p:style>
-        <p:txBody>
-          <a:bodyPr rtlCol="0" anchor="ctr"/>
-          <a:lstStyle/>
-          <a:p>
-            <a:pPr algn="ctr"/>
-          </a:p>
-        </p:txBody>
-      </p:sp>
-      <p:sp>
-        <p:nvSpPr>
-          <p:cNvPr id="3" name="Rectangle 2"/>
-          <p:cNvSpPr/>
-          <p:nvPr/>
-        </p:nvSpPr>
-        <p:spPr>
-          <a:xfrm>
-            <a:off x="0" y="0"/>
-            <a:ext cx="12191695" cy="749808"/>
-          </a:xfrm>
-          <a:prstGeom prst="rect">
-            <a:avLst/>
-          </a:prstGeom>
-          <a:solidFill>
-            <a:srgbClr val="F9A825"/>
-          </a:solidFill>
-          <a:ln>
-            <a:noFill/>
-          </a:ln>
-        </p:spPr>
-        <p:style>
-          <a:lnRef idx="1">
-            <a:schemeClr val="accent1"/>
-          </a:lnRef>
-          <a:fillRef idx="3">
-            <a:schemeClr val="accent1"/>
-          </a:fillRef>
-          <a:effectRef idx="2">
-            <a:schemeClr val="accent1"/>
-          </a:effectRef>
-          <a:fontRef idx="minor">
-            <a:schemeClr val="lt1"/>
-          </a:fontRef>
-        </p:style>
-        <p:txBody>
-          <a:bodyPr rtlCol="0" anchor="ctr"/>
-          <a:lstStyle/>
-          <a:p>
-            <a:pPr algn="ctr"/>
-          </a:p>
-        </p:txBody>
-      </p:sp>
-      <p:sp>
-        <p:nvSpPr>
-          <p:cNvPr id="4" name="TextBox 3"/>
-          <p:cNvSpPr txBox="1"/>
-          <p:nvPr/>
-        </p:nvSpPr>
-        <p:spPr>
-          <a:xfrm>
-            <a:off x="274320" y="128016"/>
-            <a:ext cx="11612880" cy="512064"/>
-          </a:xfrm>
-          <a:prstGeom prst="rect">
-            <a:avLst/>
-          </a:prstGeom>
-          <a:noFill/>
-        </p:spPr>
-        <p:txBody>
-          <a:bodyPr wrap="square">
-            <a:spAutoFit/>
-          </a:bodyPr>
-          <a:lstStyle/>
-          <a:p>
-            <a:pPr>
-              <a:spcAft>
-                <a:spcPts val="400"/>
-              </a:spcAft>
-            </a:pPr>
-            <a:r>
-              <a:rPr sz="2200" b="1">
-                <a:solidFill>
-                  <a:srgbClr val="FFFFFF"/>
-                </a:solidFill>
-                <a:latin typeface="微软雅黑"/>
-                <a:ea typeface="微软雅黑"/>
-                <a:cs typeface="微软雅黑"/>
-              </a:rPr>
-              <a:t>揭晓 1/4</a:t>
-            </a:r>
-          </a:p>
-        </p:txBody>
-      </p:sp>
-      <p:sp>
-        <p:nvSpPr>
-          <p:cNvPr id="5" name="TextBox 4"/>
-          <p:cNvSpPr txBox="1"/>
-          <p:nvPr/>
-        </p:nvSpPr>
-        <p:spPr>
-          <a:xfrm>
-            <a:off x="457200" y="960120"/>
-            <a:ext cx="11247120" cy="4754880"/>
-          </a:xfrm>
-          <a:prstGeom prst="rect">
-            <a:avLst/>
-          </a:prstGeom>
-          <a:noFill/>
-        </p:spPr>
-        <p:txBody>
-          <a:bodyPr wrap="square">
-            <a:spAutoFit/>
-          </a:bodyPr>
-          <a:lstStyle/>
-          <a:p>
-            <a:pPr>
-              <a:spcAft>
-                <a:spcPts val="400"/>
-              </a:spcAft>
-            </a:pPr>
-            <a:r>
-              <a:rPr sz="2200" b="0">
-                <a:solidFill>
-                  <a:srgbClr val="212121"/>
-                </a:solidFill>
-                <a:latin typeface="微软雅黑"/>
-                <a:ea typeface="微软雅黑"/>
-                <a:cs typeface="微软雅黑"/>
-              </a:rPr>
-              <a:t>同增</a:t>
-            </a:r>
-          </a:p>
-          <a:p>
-            <a:pPr>
-              <a:spcAft>
-                <a:spcPts val="400"/>
-              </a:spcAft>
-            </a:pPr>
-            <a:r>
-              <a:rPr sz="2200" b="0">
-                <a:solidFill>
-                  <a:srgbClr val="212121"/>
-                </a:solidFill>
-                <a:latin typeface="微软雅黑"/>
-                <a:ea typeface="微软雅黑"/>
-                <a:cs typeface="微软雅黑"/>
-              </a:rPr>
-              <a:t>银行存款增加，实收资本增加。</a:t>
-            </a:r>
-          </a:p>
-        </p:txBody>
-      </p:sp>
-      <p:sp>
-        <p:nvSpPr>
-          <p:cNvPr id="6" name="Rectangle 5"/>
-          <p:cNvSpPr/>
-          <p:nvPr/>
-        </p:nvSpPr>
-        <p:spPr>
-          <a:xfrm>
-            <a:off x="0" y="5897880"/>
-            <a:ext cx="12191695" cy="960120"/>
-          </a:xfrm>
-          <a:prstGeom prst="rect">
-            <a:avLst/>
-          </a:prstGeom>
-          <a:solidFill>
-            <a:srgbClr val="2E7D32"/>
-          </a:solidFill>
-          <a:ln>
-            <a:noFill/>
-          </a:ln>
-        </p:spPr>
-        <p:style>
-          <a:lnRef idx="1">
-            <a:schemeClr val="accent1"/>
-          </a:lnRef>
-          <a:fillRef idx="3">
-            <a:schemeClr val="accent1"/>
-          </a:fillRef>
-          <a:effectRef idx="2">
-            <a:schemeClr val="accent1"/>
-          </a:effectRef>
-          <a:fontRef idx="minor">
-            <a:schemeClr val="lt1"/>
-          </a:fontRef>
-        </p:style>
-        <p:txBody>
-          <a:bodyPr rtlCol="0" anchor="ctr"/>
-          <a:lstStyle/>
-          <a:p>
-            <a:pPr algn="ctr"/>
-          </a:p>
-        </p:txBody>
-      </p:sp>
-      <p:sp>
-        <p:nvSpPr>
-          <p:cNvPr id="7" name="TextBox 6"/>
-          <p:cNvSpPr txBox="1"/>
-          <p:nvPr/>
-        </p:nvSpPr>
-        <p:spPr>
-          <a:xfrm>
-            <a:off x="274320" y="5961888"/>
-            <a:ext cx="11612880" cy="841248"/>
-          </a:xfrm>
-          <a:prstGeom prst="rect">
-            <a:avLst/>
-          </a:prstGeom>
-          <a:noFill/>
-        </p:spPr>
-        <p:txBody>
-          <a:bodyPr wrap="square">
-            <a:spAutoFit/>
-          </a:bodyPr>
-          <a:lstStyle/>
-          <a:p>
-            <a:pPr>
-              <a:spcAft>
-                <a:spcPts val="400"/>
-              </a:spcAft>
-            </a:pPr>
-            <a:r>
-              <a:rPr sz="1500" b="1">
-                <a:solidFill>
-                  <a:srgbClr val="FFFFFF"/>
-                </a:solidFill>
-                <a:latin typeface="微软雅黑"/>
-                <a:ea typeface="微软雅黑"/>
-                <a:cs typeface="微软雅黑"/>
-              </a:rPr>
-              <a:t>现在你：错了，全组用小新腔喊一遍。</a:t>
-            </a:r>
-          </a:p>
-        </p:txBody>
-      </p:sp>
-    </p:spTree>
-  </p:cSld>
-  <p:clrMapOvr>
-    <a:masterClrMapping/>
-  </p:clrMapOvr>
-</p:sld>
-</file>
-
-<file path=ppt/slides/slide34.xml><?xml version="1.0" encoding="utf-8"?>
-<p:sld xmlns:a="http://schemas.openxmlformats.org/drawingml/2006/main" xmlns:p="http://schemas.openxmlformats.org/presentationml/2006/main" xmlns:r="http://schemas.openxmlformats.org/officeDocument/2006/relationships">
-  <p:cSld>
-    <p:spTree>
-      <p:nvGrpSpPr>
-        <p:cNvPr id="1" name=""/>
-        <p:cNvGrpSpPr/>
-        <p:nvPr/>
-      </p:nvGrpSpPr>
-      <p:grpSpPr/>
-      <p:sp>
-        <p:nvSpPr>
-          <p:cNvPr id="2" name="Rectangle 1"/>
-          <p:cNvSpPr/>
-          <p:nvPr/>
-        </p:nvSpPr>
-        <p:spPr>
-          <a:xfrm>
-            <a:off x="0" y="0"/>
-            <a:ext cx="12191695" cy="6858000"/>
-          </a:xfrm>
-          <a:prstGeom prst="rect">
-            <a:avLst/>
-          </a:prstGeom>
-          <a:solidFill>
-            <a:srgbClr val="FFF8E1"/>
-          </a:solidFill>
-          <a:ln>
-            <a:noFill/>
-          </a:ln>
-        </p:spPr>
-        <p:style>
-          <a:lnRef idx="1">
-            <a:schemeClr val="accent1"/>
-          </a:lnRef>
-          <a:fillRef idx="3">
-            <a:schemeClr val="accent1"/>
-          </a:fillRef>
-          <a:effectRef idx="2">
-            <a:schemeClr val="accent1"/>
-          </a:effectRef>
-          <a:fontRef idx="minor">
-            <a:schemeClr val="lt1"/>
-          </a:fontRef>
-        </p:style>
-        <p:txBody>
-          <a:bodyPr rtlCol="0" anchor="ctr"/>
-          <a:lstStyle/>
-          <a:p>
-            <a:pPr algn="ctr"/>
-          </a:p>
-        </p:txBody>
-      </p:sp>
-      <p:sp>
-        <p:nvSpPr>
-          <p:cNvPr id="3" name="Rectangle 2"/>
-          <p:cNvSpPr/>
-          <p:nvPr/>
-        </p:nvSpPr>
-        <p:spPr>
-          <a:xfrm>
-            <a:off x="0" y="0"/>
-            <a:ext cx="12191695" cy="749808"/>
-          </a:xfrm>
-          <a:prstGeom prst="rect">
-            <a:avLst/>
-          </a:prstGeom>
-          <a:solidFill>
-            <a:srgbClr val="BF360C"/>
-          </a:solidFill>
-          <a:ln>
-            <a:noFill/>
-          </a:ln>
-        </p:spPr>
-        <p:style>
-          <a:lnRef idx="1">
-            <a:schemeClr val="accent1"/>
-          </a:lnRef>
-          <a:fillRef idx="3">
-            <a:schemeClr val="accent1"/>
-          </a:fillRef>
-          <a:effectRef idx="2">
-            <a:schemeClr val="accent1"/>
-          </a:effectRef>
-          <a:fontRef idx="minor">
-            <a:schemeClr val="lt1"/>
-          </a:fontRef>
-        </p:style>
-        <p:txBody>
-          <a:bodyPr rtlCol="0" anchor="ctr"/>
-          <a:lstStyle/>
-          <a:p>
-            <a:pPr algn="ctr"/>
-          </a:p>
-        </p:txBody>
-      </p:sp>
-      <p:sp>
-        <p:nvSpPr>
-          <p:cNvPr id="4" name="TextBox 3"/>
-          <p:cNvSpPr txBox="1"/>
-          <p:nvPr/>
-        </p:nvSpPr>
-        <p:spPr>
-          <a:xfrm>
-            <a:off x="274320" y="128016"/>
-            <a:ext cx="11612880" cy="512064"/>
-          </a:xfrm>
-          <a:prstGeom prst="rect">
-            <a:avLst/>
-          </a:prstGeom>
-          <a:noFill/>
-        </p:spPr>
-        <p:txBody>
-          <a:bodyPr wrap="square">
-            <a:spAutoFit/>
-          </a:bodyPr>
-          <a:lstStyle/>
-          <a:p>
-            <a:pPr>
-              <a:spcAft>
-                <a:spcPts val="400"/>
-              </a:spcAft>
-            </a:pPr>
-            <a:r>
-              <a:rPr sz="2200" b="1">
-                <a:solidFill>
-                  <a:srgbClr val="FFFFFF"/>
-                </a:solidFill>
-                <a:latin typeface="微软雅黑"/>
-                <a:ea typeface="微软雅黑"/>
-                <a:cs typeface="微软雅黑"/>
-              </a:rPr>
-              <a:t>天平 2/4</a:t>
-            </a:r>
-          </a:p>
-        </p:txBody>
-      </p:sp>
-      <p:sp>
-        <p:nvSpPr>
-          <p:cNvPr id="5" name="TextBox 4"/>
-          <p:cNvSpPr txBox="1"/>
-          <p:nvPr/>
-        </p:nvSpPr>
-        <p:spPr>
-          <a:xfrm>
-            <a:off x="457200" y="960120"/>
-            <a:ext cx="11247120" cy="4754880"/>
-          </a:xfrm>
-          <a:prstGeom prst="rect">
-            <a:avLst/>
-          </a:prstGeom>
-          <a:noFill/>
-        </p:spPr>
-        <p:txBody>
-          <a:bodyPr wrap="square">
-            <a:spAutoFit/>
-          </a:bodyPr>
-          <a:lstStyle/>
-          <a:p>
-            <a:pPr>
-              <a:spcAft>
-                <a:spcPts val="400"/>
-              </a:spcAft>
-            </a:pPr>
-            <a:r>
-              <a:rPr sz="2200" b="0">
-                <a:solidFill>
-                  <a:srgbClr val="212121"/>
-                </a:solidFill>
-                <a:latin typeface="微软雅黑"/>
-                <a:ea typeface="微软雅黑"/>
-                <a:cs typeface="微软雅黑"/>
-              </a:rPr>
-              <a:t>用银行存款还短期借款 5 万。</a:t>
-            </a:r>
-          </a:p>
-        </p:txBody>
-      </p:sp>
-      <p:sp>
-        <p:nvSpPr>
-          <p:cNvPr id="6" name="Rectangle 5"/>
-          <p:cNvSpPr/>
-          <p:nvPr/>
-        </p:nvSpPr>
-        <p:spPr>
-          <a:xfrm>
-            <a:off x="0" y="5897880"/>
-            <a:ext cx="12191695" cy="960120"/>
-          </a:xfrm>
-          <a:prstGeom prst="rect">
-            <a:avLst/>
-          </a:prstGeom>
-          <a:solidFill>
-            <a:srgbClr val="2E7D32"/>
-          </a:solidFill>
-          <a:ln>
-            <a:noFill/>
-          </a:ln>
-        </p:spPr>
-        <p:style>
-          <a:lnRef idx="1">
-            <a:schemeClr val="accent1"/>
-          </a:lnRef>
-          <a:fillRef idx="3">
-            <a:schemeClr val="accent1"/>
-          </a:fillRef>
-          <a:effectRef idx="2">
-            <a:schemeClr val="accent1"/>
-          </a:effectRef>
-          <a:fontRef idx="minor">
-            <a:schemeClr val="lt1"/>
-          </a:fontRef>
-        </p:style>
-        <p:txBody>
-          <a:bodyPr rtlCol="0" anchor="ctr"/>
-          <a:lstStyle/>
-          <a:p>
-            <a:pPr algn="ctr"/>
-          </a:p>
-        </p:txBody>
-      </p:sp>
-      <p:sp>
-        <p:nvSpPr>
-          <p:cNvPr id="7" name="TextBox 6"/>
-          <p:cNvSpPr txBox="1"/>
-          <p:nvPr/>
-        </p:nvSpPr>
-        <p:spPr>
-          <a:xfrm>
-            <a:off x="274320" y="5961888"/>
-            <a:ext cx="11612880" cy="841248"/>
-          </a:xfrm>
-          <a:prstGeom prst="rect">
-            <a:avLst/>
-          </a:prstGeom>
-          <a:noFill/>
-        </p:spPr>
-        <p:txBody>
-          <a:bodyPr wrap="square">
-            <a:spAutoFit/>
-          </a:bodyPr>
-          <a:lstStyle/>
-          <a:p>
-            <a:pPr>
-              <a:spcAft>
-                <a:spcPts val="400"/>
-              </a:spcAft>
-            </a:pPr>
-            <a:r>
-              <a:rPr sz="1500" b="1">
-                <a:solidFill>
-                  <a:srgbClr val="FFFFFF"/>
-                </a:solidFill>
-                <a:latin typeface="微软雅黑"/>
-                <a:ea typeface="微软雅黑"/>
-                <a:cs typeface="微软雅黑"/>
-              </a:rPr>
-              <a:t>现在你：是本组这种变化就举牌。</a:t>
-            </a:r>
-          </a:p>
-        </p:txBody>
-      </p:sp>
-    </p:spTree>
-  </p:cSld>
-  <p:clrMapOvr>
-    <a:masterClrMapping/>
-  </p:clrMapOvr>
-</p:sld>
-</file>
-
-<file path=ppt/slides/slide35.xml><?xml version="1.0" encoding="utf-8"?>
-<p:sld xmlns:a="http://schemas.openxmlformats.org/drawingml/2006/main" xmlns:p="http://schemas.openxmlformats.org/presentationml/2006/main" xmlns:r="http://schemas.openxmlformats.org/officeDocument/2006/relationships">
-  <p:cSld>
-    <p:spTree>
-      <p:nvGrpSpPr>
-        <p:cNvPr id="1" name=""/>
-        <p:cNvGrpSpPr/>
-        <p:nvPr/>
-      </p:nvGrpSpPr>
-      <p:grpSpPr/>
-      <p:sp>
-        <p:nvSpPr>
-          <p:cNvPr id="2" name="Rectangle 1"/>
-          <p:cNvSpPr/>
-          <p:nvPr/>
-        </p:nvSpPr>
-        <p:spPr>
-          <a:xfrm>
-            <a:off x="0" y="0"/>
-            <a:ext cx="12191695" cy="6858000"/>
-          </a:xfrm>
-          <a:prstGeom prst="rect">
-            <a:avLst/>
-          </a:prstGeom>
-          <a:solidFill>
-            <a:srgbClr val="FFF8E1"/>
-          </a:solidFill>
-          <a:ln>
-            <a:noFill/>
-          </a:ln>
-        </p:spPr>
-        <p:style>
-          <a:lnRef idx="1">
-            <a:schemeClr val="accent1"/>
-          </a:lnRef>
-          <a:fillRef idx="3">
-            <a:schemeClr val="accent1"/>
-          </a:fillRef>
-          <a:effectRef idx="2">
-            <a:schemeClr val="accent1"/>
-          </a:effectRef>
-          <a:fontRef idx="minor">
-            <a:schemeClr val="lt1"/>
-          </a:fontRef>
-        </p:style>
-        <p:txBody>
-          <a:bodyPr rtlCol="0" anchor="ctr"/>
-          <a:lstStyle/>
-          <a:p>
-            <a:pPr algn="ctr"/>
-          </a:p>
-        </p:txBody>
-      </p:sp>
-      <p:sp>
-        <p:nvSpPr>
-          <p:cNvPr id="3" name="Rectangle 2"/>
-          <p:cNvSpPr/>
-          <p:nvPr/>
-        </p:nvSpPr>
-        <p:spPr>
-          <a:xfrm>
-            <a:off x="0" y="0"/>
-            <a:ext cx="12191695" cy="749808"/>
-          </a:xfrm>
-          <a:prstGeom prst="rect">
-            <a:avLst/>
-          </a:prstGeom>
-          <a:solidFill>
-            <a:srgbClr val="F9A825"/>
-          </a:solidFill>
-          <a:ln>
-            <a:noFill/>
-          </a:ln>
-        </p:spPr>
-        <p:style>
-          <a:lnRef idx="1">
-            <a:schemeClr val="accent1"/>
-          </a:lnRef>
-          <a:fillRef idx="3">
-            <a:schemeClr val="accent1"/>
-          </a:fillRef>
-          <a:effectRef idx="2">
-            <a:schemeClr val="accent1"/>
-          </a:effectRef>
-          <a:fontRef idx="minor">
-            <a:schemeClr val="lt1"/>
-          </a:fontRef>
-        </p:style>
-        <p:txBody>
-          <a:bodyPr rtlCol="0" anchor="ctr"/>
-          <a:lstStyle/>
-          <a:p>
-            <a:pPr algn="ctr"/>
-          </a:p>
-        </p:txBody>
-      </p:sp>
-      <p:sp>
-        <p:nvSpPr>
-          <p:cNvPr id="4" name="TextBox 3"/>
-          <p:cNvSpPr txBox="1"/>
-          <p:nvPr/>
-        </p:nvSpPr>
-        <p:spPr>
-          <a:xfrm>
-            <a:off x="274320" y="128016"/>
-            <a:ext cx="11612880" cy="512064"/>
-          </a:xfrm>
-          <a:prstGeom prst="rect">
-            <a:avLst/>
-          </a:prstGeom>
-          <a:noFill/>
-        </p:spPr>
-        <p:txBody>
-          <a:bodyPr wrap="square">
-            <a:spAutoFit/>
-          </a:bodyPr>
-          <a:lstStyle/>
-          <a:p>
-            <a:pPr>
-              <a:spcAft>
-                <a:spcPts val="400"/>
-              </a:spcAft>
-            </a:pPr>
-            <a:r>
-              <a:rPr sz="2200" b="1">
-                <a:solidFill>
-                  <a:srgbClr val="FFFFFF"/>
-                </a:solidFill>
-                <a:latin typeface="微软雅黑"/>
-                <a:ea typeface="微软雅黑"/>
-                <a:cs typeface="微软雅黑"/>
-              </a:rPr>
-              <a:t>揭晓 2/4</a:t>
-            </a:r>
-          </a:p>
-        </p:txBody>
-      </p:sp>
-      <p:sp>
-        <p:nvSpPr>
-          <p:cNvPr id="5" name="TextBox 4"/>
-          <p:cNvSpPr txBox="1"/>
-          <p:nvPr/>
-        </p:nvSpPr>
-        <p:spPr>
-          <a:xfrm>
-            <a:off x="457200" y="960120"/>
-            <a:ext cx="11247120" cy="4754880"/>
-          </a:xfrm>
-          <a:prstGeom prst="rect">
-            <a:avLst/>
-          </a:prstGeom>
-          <a:noFill/>
-        </p:spPr>
-        <p:txBody>
-          <a:bodyPr wrap="square">
-            <a:spAutoFit/>
-          </a:bodyPr>
-          <a:lstStyle/>
-          <a:p>
-            <a:pPr>
-              <a:spcAft>
-                <a:spcPts val="400"/>
-              </a:spcAft>
-            </a:pPr>
-            <a:r>
-              <a:rPr sz="2200" b="0">
-                <a:solidFill>
-                  <a:srgbClr val="212121"/>
-                </a:solidFill>
-                <a:latin typeface="微软雅黑"/>
-                <a:ea typeface="微软雅黑"/>
-                <a:cs typeface="微软雅黑"/>
-              </a:rPr>
-              <a:t>同减</a:t>
-            </a:r>
-          </a:p>
-          <a:p>
-            <a:pPr>
-              <a:spcAft>
-                <a:spcPts val="400"/>
-              </a:spcAft>
-            </a:pPr>
-            <a:r>
-              <a:rPr sz="2200" b="0">
-                <a:solidFill>
-                  <a:srgbClr val="212121"/>
-                </a:solidFill>
-                <a:latin typeface="微软雅黑"/>
-                <a:ea typeface="微软雅黑"/>
-                <a:cs typeface="微软雅黑"/>
-              </a:rPr>
-              <a:t>银行存款减少，短期借款减少。</a:t>
-            </a:r>
-          </a:p>
-        </p:txBody>
-      </p:sp>
-      <p:sp>
-        <p:nvSpPr>
-          <p:cNvPr id="6" name="Rectangle 5"/>
-          <p:cNvSpPr/>
-          <p:nvPr/>
-        </p:nvSpPr>
-        <p:spPr>
-          <a:xfrm>
-            <a:off x="0" y="5897880"/>
-            <a:ext cx="12191695" cy="960120"/>
-          </a:xfrm>
-          <a:prstGeom prst="rect">
-            <a:avLst/>
-          </a:prstGeom>
-          <a:solidFill>
-            <a:srgbClr val="2E7D32"/>
-          </a:solidFill>
-          <a:ln>
-            <a:noFill/>
-          </a:ln>
-        </p:spPr>
-        <p:style>
-          <a:lnRef idx="1">
-            <a:schemeClr val="accent1"/>
-          </a:lnRef>
-          <a:fillRef idx="3">
-            <a:schemeClr val="accent1"/>
-          </a:fillRef>
-          <a:effectRef idx="2">
-            <a:schemeClr val="accent1"/>
-          </a:effectRef>
-          <a:fontRef idx="minor">
-            <a:schemeClr val="lt1"/>
-          </a:fontRef>
-        </p:style>
-        <p:txBody>
-          <a:bodyPr rtlCol="0" anchor="ctr"/>
-          <a:lstStyle/>
-          <a:p>
-            <a:pPr algn="ctr"/>
-          </a:p>
-        </p:txBody>
-      </p:sp>
-      <p:sp>
-        <p:nvSpPr>
-          <p:cNvPr id="7" name="TextBox 6"/>
-          <p:cNvSpPr txBox="1"/>
-          <p:nvPr/>
-        </p:nvSpPr>
-        <p:spPr>
-          <a:xfrm>
-            <a:off x="274320" y="5961888"/>
-            <a:ext cx="11612880" cy="841248"/>
-          </a:xfrm>
-          <a:prstGeom prst="rect">
-            <a:avLst/>
-          </a:prstGeom>
-          <a:noFill/>
-        </p:spPr>
-        <p:txBody>
-          <a:bodyPr wrap="square">
-            <a:spAutoFit/>
-          </a:bodyPr>
-          <a:lstStyle/>
-          <a:p>
-            <a:pPr>
-              <a:spcAft>
-                <a:spcPts val="400"/>
-              </a:spcAft>
-            </a:pPr>
-            <a:r>
-              <a:rPr sz="1500" b="1">
-                <a:solidFill>
-                  <a:srgbClr val="FFFFFF"/>
-                </a:solidFill>
-                <a:latin typeface="微软雅黑"/>
-                <a:ea typeface="微软雅黑"/>
-                <a:cs typeface="微软雅黑"/>
-              </a:rPr>
-              <a:t>现在你：错了，全组用小新腔喊一遍。</a:t>
-            </a:r>
-          </a:p>
-        </p:txBody>
-      </p:sp>
-    </p:spTree>
-  </p:cSld>
-  <p:clrMapOvr>
-    <a:masterClrMapping/>
-  </p:clrMapOvr>
-</p:sld>
-</file>
-
-<file path=ppt/slides/slide36.xml><?xml version="1.0" encoding="utf-8"?>
-<p:sld xmlns:a="http://schemas.openxmlformats.org/drawingml/2006/main" xmlns:p="http://schemas.openxmlformats.org/presentationml/2006/main" xmlns:r="http://schemas.openxmlformats.org/officeDocument/2006/relationships">
-  <p:cSld>
-    <p:spTree>
-      <p:nvGrpSpPr>
-        <p:cNvPr id="1" name=""/>
-        <p:cNvGrpSpPr/>
-        <p:nvPr/>
-      </p:nvGrpSpPr>
-      <p:grpSpPr/>
-      <p:sp>
-        <p:nvSpPr>
-          <p:cNvPr id="2" name="Rectangle 1"/>
-          <p:cNvSpPr/>
-          <p:nvPr/>
-        </p:nvSpPr>
-        <p:spPr>
-          <a:xfrm>
-            <a:off x="0" y="0"/>
-            <a:ext cx="12191695" cy="6858000"/>
-          </a:xfrm>
-          <a:prstGeom prst="rect">
-            <a:avLst/>
-          </a:prstGeom>
-          <a:solidFill>
-            <a:srgbClr val="FFF8E1"/>
-          </a:solidFill>
-          <a:ln>
-            <a:noFill/>
-          </a:ln>
-        </p:spPr>
-        <p:style>
-          <a:lnRef idx="1">
-            <a:schemeClr val="accent1"/>
-          </a:lnRef>
-          <a:fillRef idx="3">
-            <a:schemeClr val="accent1"/>
-          </a:fillRef>
-          <a:effectRef idx="2">
-            <a:schemeClr val="accent1"/>
-          </a:effectRef>
-          <a:fontRef idx="minor">
-            <a:schemeClr val="lt1"/>
-          </a:fontRef>
-        </p:style>
-        <p:txBody>
-          <a:bodyPr rtlCol="0" anchor="ctr"/>
-          <a:lstStyle/>
-          <a:p>
-            <a:pPr algn="ctr"/>
-          </a:p>
-        </p:txBody>
-      </p:sp>
-      <p:sp>
-        <p:nvSpPr>
-          <p:cNvPr id="3" name="Rectangle 2"/>
-          <p:cNvSpPr/>
-          <p:nvPr/>
-        </p:nvSpPr>
-        <p:spPr>
-          <a:xfrm>
-            <a:off x="0" y="0"/>
-            <a:ext cx="12191695" cy="749808"/>
-          </a:xfrm>
-          <a:prstGeom prst="rect">
-            <a:avLst/>
-          </a:prstGeom>
-          <a:solidFill>
-            <a:srgbClr val="BF360C"/>
-          </a:solidFill>
-          <a:ln>
-            <a:noFill/>
-          </a:ln>
-        </p:spPr>
-        <p:style>
-          <a:lnRef idx="1">
-            <a:schemeClr val="accent1"/>
-          </a:lnRef>
-          <a:fillRef idx="3">
-            <a:schemeClr val="accent1"/>
-          </a:fillRef>
-          <a:effectRef idx="2">
-            <a:schemeClr val="accent1"/>
-          </a:effectRef>
-          <a:fontRef idx="minor">
-            <a:schemeClr val="lt1"/>
-          </a:fontRef>
-        </p:style>
-        <p:txBody>
-          <a:bodyPr rtlCol="0" anchor="ctr"/>
-          <a:lstStyle/>
-          <a:p>
-            <a:pPr algn="ctr"/>
-          </a:p>
-        </p:txBody>
-      </p:sp>
-      <p:sp>
-        <p:nvSpPr>
-          <p:cNvPr id="4" name="TextBox 3"/>
-          <p:cNvSpPr txBox="1"/>
-          <p:nvPr/>
-        </p:nvSpPr>
-        <p:spPr>
-          <a:xfrm>
-            <a:off x="274320" y="128016"/>
-            <a:ext cx="11612880" cy="512064"/>
-          </a:xfrm>
-          <a:prstGeom prst="rect">
-            <a:avLst/>
-          </a:prstGeom>
-          <a:noFill/>
-        </p:spPr>
-        <p:txBody>
-          <a:bodyPr wrap="square">
-            <a:spAutoFit/>
-          </a:bodyPr>
-          <a:lstStyle/>
-          <a:p>
-            <a:pPr>
-              <a:spcAft>
-                <a:spcPts val="400"/>
-              </a:spcAft>
-            </a:pPr>
-            <a:r>
-              <a:rPr sz="2200" b="1">
-                <a:solidFill>
-                  <a:srgbClr val="FFFFFF"/>
-                </a:solidFill>
-                <a:latin typeface="微软雅黑"/>
-                <a:ea typeface="微软雅黑"/>
-                <a:cs typeface="微软雅黑"/>
-              </a:rPr>
-              <a:t>天平 3/4</a:t>
-            </a:r>
-          </a:p>
-        </p:txBody>
-      </p:sp>
-      <p:sp>
-        <p:nvSpPr>
-          <p:cNvPr id="5" name="TextBox 4"/>
-          <p:cNvSpPr txBox="1"/>
-          <p:nvPr/>
-        </p:nvSpPr>
-        <p:spPr>
-          <a:xfrm>
-            <a:off x="457200" y="960120"/>
-            <a:ext cx="11247120" cy="4754880"/>
-          </a:xfrm>
-          <a:prstGeom prst="rect">
-            <a:avLst/>
-          </a:prstGeom>
-          <a:noFill/>
-        </p:spPr>
-        <p:txBody>
-          <a:bodyPr wrap="square">
-            <a:spAutoFit/>
-          </a:bodyPr>
-          <a:lstStyle/>
-          <a:p>
-            <a:pPr>
-              <a:spcAft>
-                <a:spcPts val="400"/>
-              </a:spcAft>
-            </a:pPr>
-            <a:r>
-              <a:rPr sz="2200" b="0">
-                <a:solidFill>
-                  <a:srgbClr val="212121"/>
-                </a:solidFill>
-                <a:latin typeface="微软雅黑"/>
-                <a:ea typeface="微软雅黑"/>
-                <a:cs typeface="微软雅黑"/>
-              </a:rPr>
-              <a:t>用银行存款买一台设备 8 万。</a:t>
-            </a:r>
-          </a:p>
-        </p:txBody>
-      </p:sp>
-      <p:sp>
-        <p:nvSpPr>
-          <p:cNvPr id="6" name="Rectangle 5"/>
-          <p:cNvSpPr/>
-          <p:nvPr/>
-        </p:nvSpPr>
-        <p:spPr>
-          <a:xfrm>
-            <a:off x="0" y="5897880"/>
-            <a:ext cx="12191695" cy="960120"/>
-          </a:xfrm>
-          <a:prstGeom prst="rect">
-            <a:avLst/>
-          </a:prstGeom>
-          <a:solidFill>
-            <a:srgbClr val="2E7D32"/>
-          </a:solidFill>
-          <a:ln>
-            <a:noFill/>
-          </a:ln>
-        </p:spPr>
-        <p:style>
-          <a:lnRef idx="1">
-            <a:schemeClr val="accent1"/>
-          </a:lnRef>
-          <a:fillRef idx="3">
-            <a:schemeClr val="accent1"/>
-          </a:fillRef>
-          <a:effectRef idx="2">
-            <a:schemeClr val="accent1"/>
-          </a:effectRef>
-          <a:fontRef idx="minor">
-            <a:schemeClr val="lt1"/>
-          </a:fontRef>
-        </p:style>
-        <p:txBody>
-          <a:bodyPr rtlCol="0" anchor="ctr"/>
-          <a:lstStyle/>
-          <a:p>
-            <a:pPr algn="ctr"/>
-          </a:p>
-        </p:txBody>
-      </p:sp>
-      <p:sp>
-        <p:nvSpPr>
-          <p:cNvPr id="7" name="TextBox 6"/>
-          <p:cNvSpPr txBox="1"/>
-          <p:nvPr/>
-        </p:nvSpPr>
-        <p:spPr>
-          <a:xfrm>
-            <a:off x="274320" y="5961888"/>
-            <a:ext cx="11612880" cy="841248"/>
-          </a:xfrm>
-          <a:prstGeom prst="rect">
-            <a:avLst/>
-          </a:prstGeom>
-          <a:noFill/>
-        </p:spPr>
-        <p:txBody>
-          <a:bodyPr wrap="square">
-            <a:spAutoFit/>
-          </a:bodyPr>
-          <a:lstStyle/>
-          <a:p>
-            <a:pPr>
-              <a:spcAft>
-                <a:spcPts val="400"/>
-              </a:spcAft>
-            </a:pPr>
-            <a:r>
-              <a:rPr sz="1500" b="1">
-                <a:solidFill>
-                  <a:srgbClr val="FFFFFF"/>
-                </a:solidFill>
-                <a:latin typeface="微软雅黑"/>
-                <a:ea typeface="微软雅黑"/>
-                <a:cs typeface="微软雅黑"/>
-              </a:rPr>
-              <a:t>现在你：是本组这种变化就举牌。</a:t>
-            </a:r>
-          </a:p>
-        </p:txBody>
-      </p:sp>
-    </p:spTree>
-  </p:cSld>
-  <p:clrMapOvr>
-    <a:masterClrMapping/>
-  </p:clrMapOvr>
-</p:sld>
-</file>
-
-<file path=ppt/slides/slide37.xml><?xml version="1.0" encoding="utf-8"?>
-<p:sld xmlns:a="http://schemas.openxmlformats.org/drawingml/2006/main" xmlns:p="http://schemas.openxmlformats.org/presentationml/2006/main" xmlns:r="http://schemas.openxmlformats.org/officeDocument/2006/relationships">
-  <p:cSld>
-    <p:spTree>
-      <p:nvGrpSpPr>
-        <p:cNvPr id="1" name=""/>
-        <p:cNvGrpSpPr/>
-        <p:nvPr/>
-      </p:nvGrpSpPr>
-      <p:grpSpPr/>
-      <p:sp>
-        <p:nvSpPr>
-          <p:cNvPr id="2" name="Rectangle 1"/>
-          <p:cNvSpPr/>
-          <p:nvPr/>
-        </p:nvSpPr>
-        <p:spPr>
-          <a:xfrm>
-            <a:off x="0" y="0"/>
-            <a:ext cx="12191695" cy="6858000"/>
-          </a:xfrm>
-          <a:prstGeom prst="rect">
-            <a:avLst/>
-          </a:prstGeom>
-          <a:solidFill>
-            <a:srgbClr val="FFF8E1"/>
-          </a:solidFill>
-          <a:ln>
-            <a:noFill/>
-          </a:ln>
-        </p:spPr>
-        <p:style>
-          <a:lnRef idx="1">
-            <a:schemeClr val="accent1"/>
-          </a:lnRef>
-          <a:fillRef idx="3">
-            <a:schemeClr val="accent1"/>
-          </a:fillRef>
-          <a:effectRef idx="2">
-            <a:schemeClr val="accent1"/>
-          </a:effectRef>
-          <a:fontRef idx="minor">
-            <a:schemeClr val="lt1"/>
-          </a:fontRef>
-        </p:style>
-        <p:txBody>
-          <a:bodyPr rtlCol="0" anchor="ctr"/>
-          <a:lstStyle/>
-          <a:p>
-            <a:pPr algn="ctr"/>
-          </a:p>
-        </p:txBody>
-      </p:sp>
-      <p:sp>
-        <p:nvSpPr>
-          <p:cNvPr id="3" name="Rectangle 2"/>
-          <p:cNvSpPr/>
-          <p:nvPr/>
-        </p:nvSpPr>
-        <p:spPr>
-          <a:xfrm>
-            <a:off x="0" y="0"/>
-            <a:ext cx="12191695" cy="749808"/>
-          </a:xfrm>
-          <a:prstGeom prst="rect">
-            <a:avLst/>
-          </a:prstGeom>
-          <a:solidFill>
-            <a:srgbClr val="F9A825"/>
-          </a:solidFill>
-          <a:ln>
-            <a:noFill/>
-          </a:ln>
-        </p:spPr>
-        <p:style>
-          <a:lnRef idx="1">
-            <a:schemeClr val="accent1"/>
-          </a:lnRef>
-          <a:fillRef idx="3">
-            <a:schemeClr val="accent1"/>
-          </a:fillRef>
-          <a:effectRef idx="2">
-            <a:schemeClr val="accent1"/>
-          </a:effectRef>
-          <a:fontRef idx="minor">
-            <a:schemeClr val="lt1"/>
-          </a:fontRef>
-        </p:style>
-        <p:txBody>
-          <a:bodyPr rtlCol="0" anchor="ctr"/>
-          <a:lstStyle/>
-          <a:p>
-            <a:pPr algn="ctr"/>
-          </a:p>
-        </p:txBody>
-      </p:sp>
-      <p:sp>
-        <p:nvSpPr>
-          <p:cNvPr id="4" name="TextBox 3"/>
-          <p:cNvSpPr txBox="1"/>
-          <p:nvPr/>
-        </p:nvSpPr>
-        <p:spPr>
-          <a:xfrm>
-            <a:off x="274320" y="128016"/>
-            <a:ext cx="11612880" cy="512064"/>
-          </a:xfrm>
-          <a:prstGeom prst="rect">
-            <a:avLst/>
-          </a:prstGeom>
-          <a:noFill/>
-        </p:spPr>
-        <p:txBody>
-          <a:bodyPr wrap="square">
-            <a:spAutoFit/>
-          </a:bodyPr>
-          <a:lstStyle/>
-          <a:p>
-            <a:pPr>
-              <a:spcAft>
-                <a:spcPts val="400"/>
-              </a:spcAft>
-            </a:pPr>
-            <a:r>
-              <a:rPr sz="2200" b="1">
-                <a:solidFill>
-                  <a:srgbClr val="FFFFFF"/>
-                </a:solidFill>
-                <a:latin typeface="微软雅黑"/>
-                <a:ea typeface="微软雅黑"/>
-                <a:cs typeface="微软雅黑"/>
-              </a:rPr>
-              <a:t>揭晓 3/4</a:t>
-            </a:r>
-          </a:p>
-        </p:txBody>
-      </p:sp>
-      <p:sp>
-        <p:nvSpPr>
-          <p:cNvPr id="5" name="TextBox 4"/>
-          <p:cNvSpPr txBox="1"/>
-          <p:nvPr/>
-        </p:nvSpPr>
-        <p:spPr>
-          <a:xfrm>
-            <a:off x="457200" y="960120"/>
-            <a:ext cx="11247120" cy="4754880"/>
-          </a:xfrm>
-          <a:prstGeom prst="rect">
-            <a:avLst/>
-          </a:prstGeom>
-          <a:noFill/>
-        </p:spPr>
-        <p:txBody>
-          <a:bodyPr wrap="square">
-            <a:spAutoFit/>
-          </a:bodyPr>
-          <a:lstStyle/>
-          <a:p>
-            <a:pPr>
-              <a:spcAft>
-                <a:spcPts val="400"/>
-              </a:spcAft>
-            </a:pPr>
-            <a:r>
-              <a:rPr sz="2200" b="0">
-                <a:solidFill>
-                  <a:srgbClr val="212121"/>
-                </a:solidFill>
-                <a:latin typeface="微软雅黑"/>
-                <a:ea typeface="微软雅黑"/>
-                <a:cs typeface="微软雅黑"/>
-              </a:rPr>
-              <a:t>左边一增一减</a:t>
-            </a:r>
-          </a:p>
-          <a:p>
-            <a:pPr>
-              <a:spcAft>
-                <a:spcPts val="400"/>
-              </a:spcAft>
-            </a:pPr>
-            <a:r>
-              <a:rPr sz="2200" b="0">
-                <a:solidFill>
-                  <a:srgbClr val="212121"/>
-                </a:solidFill>
-                <a:latin typeface="微软雅黑"/>
-                <a:ea typeface="微软雅黑"/>
-                <a:cs typeface="微软雅黑"/>
-              </a:rPr>
-              <a:t>固定资产增加，银行存款减少。</a:t>
-            </a:r>
-          </a:p>
-        </p:txBody>
-      </p:sp>
-      <p:sp>
-        <p:nvSpPr>
-          <p:cNvPr id="6" name="Rectangle 5"/>
-          <p:cNvSpPr/>
-          <p:nvPr/>
-        </p:nvSpPr>
-        <p:spPr>
-          <a:xfrm>
-            <a:off x="0" y="5897880"/>
-            <a:ext cx="12191695" cy="960120"/>
-          </a:xfrm>
-          <a:prstGeom prst="rect">
-            <a:avLst/>
-          </a:prstGeom>
-          <a:solidFill>
-            <a:srgbClr val="2E7D32"/>
-          </a:solidFill>
-          <a:ln>
-            <a:noFill/>
-          </a:ln>
-        </p:spPr>
-        <p:style>
-          <a:lnRef idx="1">
-            <a:schemeClr val="accent1"/>
-          </a:lnRef>
-          <a:fillRef idx="3">
-            <a:schemeClr val="accent1"/>
-          </a:fillRef>
-          <a:effectRef idx="2">
-            <a:schemeClr val="accent1"/>
-          </a:effectRef>
-          <a:fontRef idx="minor">
-            <a:schemeClr val="lt1"/>
-          </a:fontRef>
-        </p:style>
-        <p:txBody>
-          <a:bodyPr rtlCol="0" anchor="ctr"/>
-          <a:lstStyle/>
-          <a:p>
-            <a:pPr algn="ctr"/>
-          </a:p>
-        </p:txBody>
-      </p:sp>
-      <p:sp>
-        <p:nvSpPr>
-          <p:cNvPr id="7" name="TextBox 6"/>
-          <p:cNvSpPr txBox="1"/>
-          <p:nvPr/>
-        </p:nvSpPr>
-        <p:spPr>
-          <a:xfrm>
-            <a:off x="274320" y="5961888"/>
-            <a:ext cx="11612880" cy="841248"/>
-          </a:xfrm>
-          <a:prstGeom prst="rect">
-            <a:avLst/>
-          </a:prstGeom>
-          <a:noFill/>
-        </p:spPr>
-        <p:txBody>
-          <a:bodyPr wrap="square">
-            <a:spAutoFit/>
-          </a:bodyPr>
-          <a:lstStyle/>
-          <a:p>
-            <a:pPr>
-              <a:spcAft>
-                <a:spcPts val="400"/>
-              </a:spcAft>
-            </a:pPr>
-            <a:r>
-              <a:rPr sz="1500" b="1">
-                <a:solidFill>
-                  <a:srgbClr val="FFFFFF"/>
-                </a:solidFill>
-                <a:latin typeface="微软雅黑"/>
-                <a:ea typeface="微软雅黑"/>
-                <a:cs typeface="微软雅黑"/>
-              </a:rPr>
-              <a:t>现在你：错了，全组用小新腔喊一遍。</a:t>
-            </a:r>
-          </a:p>
-        </p:txBody>
-      </p:sp>
-    </p:spTree>
-  </p:cSld>
-  <p:clrMapOvr>
-    <a:masterClrMapping/>
-  </p:clrMapOvr>
-</p:sld>
-</file>
-
-<file path=ppt/slides/slide38.xml><?xml version="1.0" encoding="utf-8"?>
-<p:sld xmlns:a="http://schemas.openxmlformats.org/drawingml/2006/main" xmlns:p="http://schemas.openxmlformats.org/presentationml/2006/main" xmlns:r="http://schemas.openxmlformats.org/officeDocument/2006/relationships">
-  <p:cSld>
-    <p:spTree>
-      <p:nvGrpSpPr>
-        <p:cNvPr id="1" name=""/>
-        <p:cNvGrpSpPr/>
-        <p:nvPr/>
-      </p:nvGrpSpPr>
-      <p:grpSpPr/>
-      <p:sp>
-        <p:nvSpPr>
-          <p:cNvPr id="2" name="Rectangle 1"/>
-          <p:cNvSpPr/>
-          <p:nvPr/>
-        </p:nvSpPr>
-        <p:spPr>
-          <a:xfrm>
-            <a:off x="0" y="0"/>
-            <a:ext cx="12191695" cy="6858000"/>
-          </a:xfrm>
-          <a:prstGeom prst="rect">
-            <a:avLst/>
-          </a:prstGeom>
-          <a:solidFill>
-            <a:srgbClr val="FFF8E1"/>
-          </a:solidFill>
-          <a:ln>
-            <a:noFill/>
-          </a:ln>
-        </p:spPr>
-        <p:style>
-          <a:lnRef idx="1">
-            <a:schemeClr val="accent1"/>
-          </a:lnRef>
-          <a:fillRef idx="3">
-            <a:schemeClr val="accent1"/>
-          </a:fillRef>
-          <a:effectRef idx="2">
-            <a:schemeClr val="accent1"/>
-          </a:effectRef>
-          <a:fontRef idx="minor">
-            <a:schemeClr val="lt1"/>
-          </a:fontRef>
-        </p:style>
-        <p:txBody>
-          <a:bodyPr rtlCol="0" anchor="ctr"/>
-          <a:lstStyle/>
-          <a:p>
-            <a:pPr algn="ctr"/>
-          </a:p>
-        </p:txBody>
-      </p:sp>
-      <p:sp>
-        <p:nvSpPr>
-          <p:cNvPr id="3" name="Rectangle 2"/>
-          <p:cNvSpPr/>
-          <p:nvPr/>
-        </p:nvSpPr>
-        <p:spPr>
-          <a:xfrm>
-            <a:off x="0" y="0"/>
-            <a:ext cx="12191695" cy="749808"/>
-          </a:xfrm>
-          <a:prstGeom prst="rect">
-            <a:avLst/>
-          </a:prstGeom>
-          <a:solidFill>
-            <a:srgbClr val="BF360C"/>
-          </a:solidFill>
-          <a:ln>
-            <a:noFill/>
-          </a:ln>
-        </p:spPr>
-        <p:style>
-          <a:lnRef idx="1">
-            <a:schemeClr val="accent1"/>
-          </a:lnRef>
-          <a:fillRef idx="3">
-            <a:schemeClr val="accent1"/>
-          </a:fillRef>
-          <a:effectRef idx="2">
-            <a:schemeClr val="accent1"/>
-          </a:effectRef>
-          <a:fontRef idx="minor">
-            <a:schemeClr val="lt1"/>
-          </a:fontRef>
-        </p:style>
-        <p:txBody>
-          <a:bodyPr rtlCol="0" anchor="ctr"/>
-          <a:lstStyle/>
-          <a:p>
-            <a:pPr algn="ctr"/>
-          </a:p>
-        </p:txBody>
-      </p:sp>
-      <p:sp>
-        <p:nvSpPr>
-          <p:cNvPr id="4" name="TextBox 3"/>
-          <p:cNvSpPr txBox="1"/>
-          <p:nvPr/>
-        </p:nvSpPr>
-        <p:spPr>
-          <a:xfrm>
-            <a:off x="274320" y="128016"/>
-            <a:ext cx="11612880" cy="512064"/>
-          </a:xfrm>
-          <a:prstGeom prst="rect">
-            <a:avLst/>
-          </a:prstGeom>
-          <a:noFill/>
-        </p:spPr>
-        <p:txBody>
-          <a:bodyPr wrap="square">
-            <a:spAutoFit/>
-          </a:bodyPr>
-          <a:lstStyle/>
-          <a:p>
-            <a:pPr>
-              <a:spcAft>
-                <a:spcPts val="400"/>
-              </a:spcAft>
-            </a:pPr>
-            <a:r>
-              <a:rPr sz="2200" b="1">
-                <a:solidFill>
-                  <a:srgbClr val="FFFFFF"/>
-                </a:solidFill>
-                <a:latin typeface="微软雅黑"/>
-                <a:ea typeface="微软雅黑"/>
-                <a:cs typeface="微软雅黑"/>
-              </a:rPr>
-              <a:t>天平 4/4</a:t>
-            </a:r>
-          </a:p>
-        </p:txBody>
-      </p:sp>
-      <p:sp>
-        <p:nvSpPr>
-          <p:cNvPr id="5" name="TextBox 4"/>
-          <p:cNvSpPr txBox="1"/>
-          <p:nvPr/>
-        </p:nvSpPr>
-        <p:spPr>
-          <a:xfrm>
-            <a:off x="457200" y="960120"/>
-            <a:ext cx="11247120" cy="4754880"/>
-          </a:xfrm>
-          <a:prstGeom prst="rect">
-            <a:avLst/>
-          </a:prstGeom>
-          <a:noFill/>
-        </p:spPr>
-        <p:txBody>
-          <a:bodyPr wrap="square">
-            <a:spAutoFit/>
-          </a:bodyPr>
-          <a:lstStyle/>
-          <a:p>
-            <a:pPr>
-              <a:spcAft>
-                <a:spcPts val="400"/>
-              </a:spcAft>
-            </a:pPr>
-            <a:r>
-              <a:rPr sz="2200" b="0">
-                <a:solidFill>
-                  <a:srgbClr val="212121"/>
-                </a:solidFill>
-                <a:latin typeface="微软雅黑"/>
-                <a:ea typeface="微软雅黑"/>
-                <a:cs typeface="微软雅黑"/>
-              </a:rPr>
-              <a:t>用资本公积 3 万转增实收资本。</a:t>
-            </a:r>
-          </a:p>
-        </p:txBody>
-      </p:sp>
-      <p:sp>
-        <p:nvSpPr>
-          <p:cNvPr id="6" name="Rectangle 5"/>
-          <p:cNvSpPr/>
-          <p:nvPr/>
-        </p:nvSpPr>
-        <p:spPr>
-          <a:xfrm>
-            <a:off x="0" y="5897880"/>
-            <a:ext cx="12191695" cy="960120"/>
-          </a:xfrm>
-          <a:prstGeom prst="rect">
-            <a:avLst/>
-          </a:prstGeom>
-          <a:solidFill>
-            <a:srgbClr val="2E7D32"/>
-          </a:solidFill>
-          <a:ln>
-            <a:noFill/>
-          </a:ln>
-        </p:spPr>
-        <p:style>
-          <a:lnRef idx="1">
-            <a:schemeClr val="accent1"/>
-          </a:lnRef>
-          <a:fillRef idx="3">
-            <a:schemeClr val="accent1"/>
-          </a:fillRef>
-          <a:effectRef idx="2">
-            <a:schemeClr val="accent1"/>
-          </a:effectRef>
-          <a:fontRef idx="minor">
-            <a:schemeClr val="lt1"/>
-          </a:fontRef>
-        </p:style>
-        <p:txBody>
-          <a:bodyPr rtlCol="0" anchor="ctr"/>
-          <a:lstStyle/>
-          <a:p>
-            <a:pPr algn="ctr"/>
-          </a:p>
-        </p:txBody>
-      </p:sp>
-      <p:sp>
-        <p:nvSpPr>
-          <p:cNvPr id="7" name="TextBox 6"/>
-          <p:cNvSpPr txBox="1"/>
-          <p:nvPr/>
-        </p:nvSpPr>
-        <p:spPr>
-          <a:xfrm>
-            <a:off x="274320" y="5961888"/>
-            <a:ext cx="11612880" cy="841248"/>
-          </a:xfrm>
-          <a:prstGeom prst="rect">
-            <a:avLst/>
-          </a:prstGeom>
-          <a:noFill/>
-        </p:spPr>
-        <p:txBody>
-          <a:bodyPr wrap="square">
-            <a:spAutoFit/>
-          </a:bodyPr>
-          <a:lstStyle/>
-          <a:p>
-            <a:pPr>
-              <a:spcAft>
-                <a:spcPts val="400"/>
-              </a:spcAft>
-            </a:pPr>
-            <a:r>
-              <a:rPr sz="1500" b="1">
-                <a:solidFill>
-                  <a:srgbClr val="FFFFFF"/>
-                </a:solidFill>
-                <a:latin typeface="微软雅黑"/>
-                <a:ea typeface="微软雅黑"/>
-                <a:cs typeface="微软雅黑"/>
-              </a:rPr>
-              <a:t>现在你：是本组这种变化就举牌。</a:t>
-            </a:r>
-          </a:p>
-        </p:txBody>
-      </p:sp>
-    </p:spTree>
-  </p:cSld>
-  <p:clrMapOvr>
-    <a:masterClrMapping/>
-  </p:clrMapOvr>
-</p:sld>
-</file>
-
-<file path=ppt/slides/slide39.xml><?xml version="1.0" encoding="utf-8"?>
-<p:sld xmlns:a="http://schemas.openxmlformats.org/drawingml/2006/main" xmlns:p="http://schemas.openxmlformats.org/presentationml/2006/main" xmlns:r="http://schemas.openxmlformats.org/officeDocument/2006/relationships">
-  <p:cSld>
-    <p:spTree>
-      <p:nvGrpSpPr>
-        <p:cNvPr id="1" name=""/>
-        <p:cNvGrpSpPr/>
-        <p:nvPr/>
-      </p:nvGrpSpPr>
-      <p:grpSpPr/>
-      <p:sp>
-        <p:nvSpPr>
-          <p:cNvPr id="2" name="Rectangle 1"/>
-          <p:cNvSpPr/>
-          <p:nvPr/>
-        </p:nvSpPr>
-        <p:spPr>
-          <a:xfrm>
-            <a:off x="0" y="0"/>
-            <a:ext cx="12191695" cy="6858000"/>
-          </a:xfrm>
-          <a:prstGeom prst="rect">
-            <a:avLst/>
-          </a:prstGeom>
-          <a:solidFill>
-            <a:srgbClr val="FFF8E1"/>
-          </a:solidFill>
-          <a:ln>
-            <a:noFill/>
-          </a:ln>
-        </p:spPr>
-        <p:style>
-          <a:lnRef idx="1">
-            <a:schemeClr val="accent1"/>
-          </a:lnRef>
-          <a:fillRef idx="3">
-            <a:schemeClr val="accent1"/>
-          </a:fillRef>
-          <a:effectRef idx="2">
-            <a:schemeClr val="accent1"/>
-          </a:effectRef>
-          <a:fontRef idx="minor">
-            <a:schemeClr val="lt1"/>
-          </a:fontRef>
-        </p:style>
-        <p:txBody>
-          <a:bodyPr rtlCol="0" anchor="ctr"/>
-          <a:lstStyle/>
-          <a:p>
-            <a:pPr algn="ctr"/>
-          </a:p>
-        </p:txBody>
-      </p:sp>
-      <p:sp>
-        <p:nvSpPr>
-          <p:cNvPr id="3" name="Rectangle 2"/>
-          <p:cNvSpPr/>
-          <p:nvPr/>
-        </p:nvSpPr>
-        <p:spPr>
-          <a:xfrm>
-            <a:off x="0" y="0"/>
-            <a:ext cx="12191695" cy="749808"/>
-          </a:xfrm>
-          <a:prstGeom prst="rect">
-            <a:avLst/>
-          </a:prstGeom>
-          <a:solidFill>
-            <a:srgbClr val="F9A825"/>
-          </a:solidFill>
-          <a:ln>
-            <a:noFill/>
-          </a:ln>
-        </p:spPr>
-        <p:style>
-          <a:lnRef idx="1">
-            <a:schemeClr val="accent1"/>
-          </a:lnRef>
-          <a:fillRef idx="3">
-            <a:schemeClr val="accent1"/>
-          </a:fillRef>
-          <a:effectRef idx="2">
-            <a:schemeClr val="accent1"/>
-          </a:effectRef>
-          <a:fontRef idx="minor">
-            <a:schemeClr val="lt1"/>
-          </a:fontRef>
-        </p:style>
-        <p:txBody>
-          <a:bodyPr rtlCol="0" anchor="ctr"/>
-          <a:lstStyle/>
-          <a:p>
-            <a:pPr algn="ctr"/>
-          </a:p>
-        </p:txBody>
-      </p:sp>
-      <p:sp>
-        <p:nvSpPr>
-          <p:cNvPr id="4" name="TextBox 3"/>
-          <p:cNvSpPr txBox="1"/>
-          <p:nvPr/>
-        </p:nvSpPr>
-        <p:spPr>
-          <a:xfrm>
-            <a:off x="274320" y="128016"/>
-            <a:ext cx="11612880" cy="512064"/>
-          </a:xfrm>
-          <a:prstGeom prst="rect">
-            <a:avLst/>
-          </a:prstGeom>
-          <a:noFill/>
-        </p:spPr>
-        <p:txBody>
-          <a:bodyPr wrap="square">
-            <a:spAutoFit/>
-          </a:bodyPr>
-          <a:lstStyle/>
-          <a:p>
-            <a:pPr>
-              <a:spcAft>
-                <a:spcPts val="400"/>
-              </a:spcAft>
-            </a:pPr>
-            <a:r>
-              <a:rPr sz="2200" b="1">
-                <a:solidFill>
-                  <a:srgbClr val="FFFFFF"/>
-                </a:solidFill>
-                <a:latin typeface="微软雅黑"/>
-                <a:ea typeface="微软雅黑"/>
-                <a:cs typeface="微软雅黑"/>
-              </a:rPr>
-              <a:t>揭晓 4/4</a:t>
-            </a:r>
-          </a:p>
-        </p:txBody>
-      </p:sp>
-      <p:sp>
-        <p:nvSpPr>
-          <p:cNvPr id="5" name="TextBox 4"/>
-          <p:cNvSpPr txBox="1"/>
-          <p:nvPr/>
-        </p:nvSpPr>
-        <p:spPr>
-          <a:xfrm>
-            <a:off x="457200" y="960120"/>
-            <a:ext cx="11247120" cy="4754880"/>
-          </a:xfrm>
-          <a:prstGeom prst="rect">
-            <a:avLst/>
-          </a:prstGeom>
-          <a:noFill/>
-        </p:spPr>
-        <p:txBody>
-          <a:bodyPr wrap="square">
-            <a:spAutoFit/>
-          </a:bodyPr>
-          <a:lstStyle/>
-          <a:p>
-            <a:pPr>
-              <a:spcAft>
-                <a:spcPts val="400"/>
-              </a:spcAft>
-            </a:pPr>
-            <a:r>
-              <a:rPr sz="2200" b="0">
-                <a:solidFill>
-                  <a:srgbClr val="212121"/>
-                </a:solidFill>
-                <a:latin typeface="微软雅黑"/>
-                <a:ea typeface="微软雅黑"/>
-                <a:cs typeface="微软雅黑"/>
-              </a:rPr>
-              <a:t>右边一增一减</a:t>
-            </a:r>
-          </a:p>
-          <a:p>
-            <a:pPr>
-              <a:spcAft>
-                <a:spcPts val="400"/>
-              </a:spcAft>
-            </a:pPr>
-            <a:r>
-              <a:rPr sz="2200" b="0">
-                <a:solidFill>
-                  <a:srgbClr val="212121"/>
-                </a:solidFill>
-                <a:latin typeface="微软雅黑"/>
-                <a:ea typeface="微软雅黑"/>
-                <a:cs typeface="微软雅黑"/>
-              </a:rPr>
-              <a:t>实收资本增加，资本公积减少。</a:t>
-            </a:r>
-          </a:p>
-        </p:txBody>
-      </p:sp>
-      <p:sp>
-        <p:nvSpPr>
-          <p:cNvPr id="6" name="Rectangle 5"/>
-          <p:cNvSpPr/>
-          <p:nvPr/>
-        </p:nvSpPr>
-        <p:spPr>
-          <a:xfrm>
-            <a:off x="0" y="5897880"/>
-            <a:ext cx="12191695" cy="960120"/>
-          </a:xfrm>
-          <a:prstGeom prst="rect">
-            <a:avLst/>
-          </a:prstGeom>
-          <a:solidFill>
-            <a:srgbClr val="2E7D32"/>
-          </a:solidFill>
-          <a:ln>
-            <a:noFill/>
-          </a:ln>
-        </p:spPr>
-        <p:style>
-          <a:lnRef idx="1">
-            <a:schemeClr val="accent1"/>
-          </a:lnRef>
-          <a:fillRef idx="3">
-            <a:schemeClr val="accent1"/>
-          </a:fillRef>
-          <a:effectRef idx="2">
-            <a:schemeClr val="accent1"/>
-          </a:effectRef>
-          <a:fontRef idx="minor">
-            <a:schemeClr val="lt1"/>
-          </a:fontRef>
-        </p:style>
-        <p:txBody>
-          <a:bodyPr rtlCol="0" anchor="ctr"/>
-          <a:lstStyle/>
-          <a:p>
-            <a:pPr algn="ctr"/>
-          </a:p>
-        </p:txBody>
-      </p:sp>
-      <p:sp>
-        <p:nvSpPr>
-          <p:cNvPr id="7" name="TextBox 6"/>
-          <p:cNvSpPr txBox="1"/>
-          <p:nvPr/>
-        </p:nvSpPr>
-        <p:spPr>
-          <a:xfrm>
-            <a:off x="274320" y="5961888"/>
-            <a:ext cx="11612880" cy="841248"/>
-          </a:xfrm>
-          <a:prstGeom prst="rect">
-            <a:avLst/>
-          </a:prstGeom>
-          <a:noFill/>
-        </p:spPr>
-        <p:txBody>
-          <a:bodyPr wrap="square">
-            <a:spAutoFit/>
-          </a:bodyPr>
-          <a:lstStyle/>
-          <a:p>
-            <a:pPr>
-              <a:spcAft>
-                <a:spcPts val="400"/>
-              </a:spcAft>
-            </a:pPr>
-            <a:r>
-              <a:rPr sz="1500" b="1">
-                <a:solidFill>
-                  <a:srgbClr val="FFFFFF"/>
-                </a:solidFill>
-                <a:latin typeface="微软雅黑"/>
-                <a:ea typeface="微软雅黑"/>
-                <a:cs typeface="微软雅黑"/>
-              </a:rPr>
-              <a:t>现在你：错了，全组用小新腔喊一遍。</a:t>
+              <a:t>现在你：按桌签入座。</a:t>
             </a:r>
           </a:p>
         </p:txBody>
@@ -12800,6 +9670,49 @@
         <p:spPr>
           <a:xfrm>
             <a:off x="0" y="0"/>
+            <a:ext cx="12191695" cy="6858000"/>
+          </a:xfrm>
+          <a:prstGeom prst="rect">
+            <a:avLst/>
+          </a:prstGeom>
+          <a:solidFill>
+            <a:srgbClr val="E3F2FD"/>
+          </a:solidFill>
+          <a:ln>
+            <a:noFill/>
+          </a:ln>
+        </p:spPr>
+        <p:style>
+          <a:lnRef idx="1">
+            <a:schemeClr val="accent1"/>
+          </a:lnRef>
+          <a:fillRef idx="3">
+            <a:schemeClr val="accent1"/>
+          </a:fillRef>
+          <a:effectRef idx="2">
+            <a:schemeClr val="accent1"/>
+          </a:effectRef>
+          <a:fontRef idx="minor">
+            <a:schemeClr val="lt1"/>
+          </a:fontRef>
+        </p:style>
+        <p:txBody>
+          <a:bodyPr rtlCol="0" anchor="ctr"/>
+          <a:lstStyle/>
+          <a:p>
+            <a:pPr algn="ctr"/>
+          </a:p>
+        </p:txBody>
+      </p:sp>
+      <p:sp>
+        <p:nvSpPr>
+          <p:cNvPr id="3" name="Rectangle 2"/>
+          <p:cNvSpPr/>
+          <p:nvPr/>
+        </p:nvSpPr>
+        <p:spPr>
+          <a:xfrm>
+            <a:off x="0" y="0"/>
             <a:ext cx="12191695" cy="749808"/>
           </a:xfrm>
           <a:prstGeom prst="rect">
@@ -12836,7 +9749,7 @@
       </p:sp>
       <p:sp>
         <p:nvSpPr>
-          <p:cNvPr id="3" name="TextBox 2"/>
+          <p:cNvPr id="4" name="TextBox 3"/>
           <p:cNvSpPr txBox="1"/>
           <p:nvPr/>
         </p:nvSpPr>
@@ -12870,38 +9783,91 @@
                 <a:ea typeface="微软雅黑"/>
                 <a:cs typeface="微软雅黑"/>
               </a:rPr>
-              <a:t>项目一配音　小新答不上来</a:t>
-            </a:r>
-          </a:p>
-        </p:txBody>
-      </p:sp>
-      <p:pic>
-        <p:nvPicPr>
-          <p:cNvPr id="4" name="Picture 3" descr="项目一-01_小新答不上来.jpg"/>
-          <p:cNvPicPr>
-            <a:picLocks noChangeAspect="1"/>
-          </p:cNvPicPr>
-          <p:nvPr/>
-        </p:nvPicPr>
-        <p:blipFill>
-          <a:blip r:embed="rId2"/>
-          <a:stretch>
-            <a:fillRect/>
-          </a:stretch>
-        </p:blipFill>
-        <p:spPr>
-          <a:xfrm>
-            <a:off x="365760" y="914400"/>
-            <a:ext cx="8448628" cy="4754880"/>
-          </a:xfrm>
-          <a:prstGeom prst="rect">
-            <a:avLst/>
-          </a:prstGeom>
-        </p:spPr>
-      </p:pic>
-      <p:sp>
-        <p:nvSpPr>
-          <p:cNvPr id="5" name="Rectangle 4"/>
+              <a:t>六要素举牌　规则</a:t>
+            </a:r>
+          </a:p>
+        </p:txBody>
+      </p:sp>
+      <p:sp>
+        <p:nvSpPr>
+          <p:cNvPr id="5" name="TextBox 4"/>
+          <p:cNvSpPr txBox="1"/>
+          <p:nvPr/>
+        </p:nvSpPr>
+        <p:spPr>
+          <a:xfrm>
+            <a:off x="457200" y="960120"/>
+            <a:ext cx="11247120" cy="4754880"/>
+          </a:xfrm>
+          <a:prstGeom prst="rect">
+            <a:avLst/>
+          </a:prstGeom>
+          <a:noFill/>
+        </p:spPr>
+        <p:txBody>
+          <a:bodyPr wrap="square">
+            <a:spAutoFit/>
+          </a:bodyPr>
+          <a:lstStyle/>
+          <a:p>
+            <a:pPr>
+              <a:spcAft>
+                <a:spcPts val="400"/>
+              </a:spcAft>
+            </a:pPr>
+            <a:r>
+              <a:rPr sz="2200" b="0">
+                <a:solidFill>
+                  <a:srgbClr val="212121"/>
+                </a:solidFill>
+                <a:latin typeface="微软雅黑"/>
+                <a:ea typeface="微软雅黑"/>
+                <a:cs typeface="微软雅黑"/>
+              </a:rPr>
+              <a:t>6 组：资产 / 负债 / 所有者权益 / 收入 / 费用 / 利润</a:t>
+            </a:r>
+          </a:p>
+          <a:p>
+            <a:pPr>
+              <a:spcAft>
+                <a:spcPts val="400"/>
+              </a:spcAft>
+            </a:pPr>
+            <a:r>
+              <a:rPr sz="2200" b="0">
+                <a:solidFill>
+                  <a:srgbClr val="212121"/>
+                </a:solidFill>
+                <a:latin typeface="微软雅黑"/>
+                <a:ea typeface="微软雅黑"/>
+                <a:cs typeface="微软雅黑"/>
+              </a:rPr>
+              <a:t>投出科目，数到 3，是本组的举牌。不是的别举。</a:t>
+            </a:r>
+          </a:p>
+          <a:p>
+            <a:pPr>
+              <a:spcAft>
+                <a:spcPts val="400"/>
+              </a:spcAft>
+            </a:pPr>
+            <a:r>
+              <a:rPr sz="2200" b="0">
+                <a:solidFill>
+                  <a:srgbClr val="212121"/>
+                </a:solidFill>
+                <a:latin typeface="微软雅黑"/>
+                <a:ea typeface="微软雅黑"/>
+                <a:cs typeface="微软雅黑"/>
+              </a:rPr>
+              <a:t>举错或该举没举：全组用小新腔喊正确答案。</a:t>
+            </a:r>
+          </a:p>
+        </p:txBody>
+      </p:sp>
+      <p:sp>
+        <p:nvSpPr>
+          <p:cNvPr id="6" name="Rectangle 5"/>
           <p:cNvSpPr/>
           <p:nvPr/>
         </p:nvSpPr>
@@ -12944,7 +9910,7 @@
       </p:sp>
       <p:sp>
         <p:nvSpPr>
-          <p:cNvPr id="6" name="TextBox 5"/>
+          <p:cNvPr id="7" name="TextBox 6"/>
           <p:cNvSpPr txBox="1"/>
           <p:nvPr/>
         </p:nvSpPr>
@@ -12978,1861 +9944,7 @@
                 <a:ea typeface="微软雅黑"/>
                 <a:cs typeface="微软雅黑"/>
               </a:rPr>
-              <a:t>现在你：课后给这张配音 20 秒。妈问「两千五花哪了」，小新说「我不知道」。发群。</a:t>
-            </a:r>
-          </a:p>
-        </p:txBody>
-      </p:sp>
-    </p:spTree>
-  </p:cSld>
-  <p:clrMapOvr>
-    <a:masterClrMapping/>
-  </p:clrMapOvr>
-</p:sld>
-</file>
-
-<file path=ppt/slides/slide40.xml><?xml version="1.0" encoding="utf-8"?>
-<p:sld xmlns:a="http://schemas.openxmlformats.org/drawingml/2006/main" xmlns:p="http://schemas.openxmlformats.org/presentationml/2006/main" xmlns:r="http://schemas.openxmlformats.org/officeDocument/2006/relationships">
-  <p:cSld>
-    <p:spTree>
-      <p:nvGrpSpPr>
-        <p:cNvPr id="1" name=""/>
-        <p:cNvGrpSpPr/>
-        <p:nvPr/>
-      </p:nvGrpSpPr>
-      <p:grpSpPr/>
-      <p:sp>
-        <p:nvSpPr>
-          <p:cNvPr id="2" name="Rectangle 1"/>
-          <p:cNvSpPr/>
-          <p:nvPr/>
-        </p:nvSpPr>
-        <p:spPr>
-          <a:xfrm>
-            <a:off x="0" y="0"/>
-            <a:ext cx="12191695" cy="6858000"/>
-          </a:xfrm>
-          <a:prstGeom prst="rect">
-            <a:avLst/>
-          </a:prstGeom>
-          <a:solidFill>
-            <a:srgbClr val="E3F2FD"/>
-          </a:solidFill>
-          <a:ln>
-            <a:noFill/>
-          </a:ln>
-        </p:spPr>
-        <p:style>
-          <a:lnRef idx="1">
-            <a:schemeClr val="accent1"/>
-          </a:lnRef>
-          <a:fillRef idx="3">
-            <a:schemeClr val="accent1"/>
-          </a:fillRef>
-          <a:effectRef idx="2">
-            <a:schemeClr val="accent1"/>
-          </a:effectRef>
-          <a:fontRef idx="minor">
-            <a:schemeClr val="lt1"/>
-          </a:fontRef>
-        </p:style>
-        <p:txBody>
-          <a:bodyPr rtlCol="0" anchor="ctr"/>
-          <a:lstStyle/>
-          <a:p>
-            <a:pPr algn="ctr"/>
-          </a:p>
-        </p:txBody>
-      </p:sp>
-      <p:sp>
-        <p:nvSpPr>
-          <p:cNvPr id="3" name="Rectangle 2"/>
-          <p:cNvSpPr/>
-          <p:nvPr/>
-        </p:nvSpPr>
-        <p:spPr>
-          <a:xfrm>
-            <a:off x="0" y="0"/>
-            <a:ext cx="12191695" cy="749808"/>
-          </a:xfrm>
-          <a:prstGeom prst="rect">
-            <a:avLst/>
-          </a:prstGeom>
-          <a:solidFill>
-            <a:srgbClr val="BF360C"/>
-          </a:solidFill>
-          <a:ln>
-            <a:noFill/>
-          </a:ln>
-        </p:spPr>
-        <p:style>
-          <a:lnRef idx="1">
-            <a:schemeClr val="accent1"/>
-          </a:lnRef>
-          <a:fillRef idx="3">
-            <a:schemeClr val="accent1"/>
-          </a:fillRef>
-          <a:effectRef idx="2">
-            <a:schemeClr val="accent1"/>
-          </a:effectRef>
-          <a:fontRef idx="minor">
-            <a:schemeClr val="lt1"/>
-          </a:fontRef>
-        </p:style>
-        <p:txBody>
-          <a:bodyPr rtlCol="0" anchor="ctr"/>
-          <a:lstStyle/>
-          <a:p>
-            <a:pPr algn="ctr"/>
-          </a:p>
-        </p:txBody>
-      </p:sp>
-      <p:sp>
-        <p:nvSpPr>
-          <p:cNvPr id="4" name="TextBox 3"/>
-          <p:cNvSpPr txBox="1"/>
-          <p:nvPr/>
-        </p:nvSpPr>
-        <p:spPr>
-          <a:xfrm>
-            <a:off x="274320" y="128016"/>
-            <a:ext cx="11612880" cy="512064"/>
-          </a:xfrm>
-          <a:prstGeom prst="rect">
-            <a:avLst/>
-          </a:prstGeom>
-          <a:noFill/>
-        </p:spPr>
-        <p:txBody>
-          <a:bodyPr wrap="square">
-            <a:spAutoFit/>
-          </a:bodyPr>
-          <a:lstStyle/>
-          <a:p>
-            <a:pPr>
-              <a:spcAft>
-                <a:spcPts val="400"/>
-              </a:spcAft>
-            </a:pPr>
-            <a:r>
-              <a:rPr sz="2200" b="1">
-                <a:solidFill>
-                  <a:srgbClr val="FFFFFF"/>
-                </a:solidFill>
-                <a:latin typeface="微软雅黑"/>
-                <a:ea typeface="微软雅黑"/>
-                <a:cs typeface="微软雅黑"/>
-              </a:rPr>
-              <a:t>下一节带红笔</a:t>
-            </a:r>
-          </a:p>
-        </p:txBody>
-      </p:sp>
-      <p:sp>
-        <p:nvSpPr>
-          <p:cNvPr id="5" name="TextBox 4"/>
-          <p:cNvSpPr txBox="1"/>
-          <p:nvPr/>
-        </p:nvSpPr>
-        <p:spPr>
-          <a:xfrm>
-            <a:off x="457200" y="960120"/>
-            <a:ext cx="11247120" cy="4754880"/>
-          </a:xfrm>
-          <a:prstGeom prst="rect">
-            <a:avLst/>
-          </a:prstGeom>
-          <a:noFill/>
-        </p:spPr>
-        <p:txBody>
-          <a:bodyPr wrap="square">
-            <a:spAutoFit/>
-          </a:bodyPr>
-          <a:lstStyle/>
-          <a:p>
-            <a:pPr>
-              <a:spcAft>
-                <a:spcPts val="400"/>
-              </a:spcAft>
-            </a:pPr>
-            <a:r>
-              <a:rPr sz="2200" b="0">
-                <a:solidFill>
-                  <a:srgbClr val="212121"/>
-                </a:solidFill>
-                <a:latin typeface="微软雅黑"/>
-                <a:ea typeface="微软雅黑"/>
-                <a:cs typeface="微软雅黑"/>
-              </a:rPr>
-              <a:t>下一节带一支红笔。用来找茬，不是用来自己填。</a:t>
-            </a:r>
-          </a:p>
-          <a:p>
-            <a:pPr>
-              <a:spcAft>
-                <a:spcPts val="400"/>
-              </a:spcAft>
-            </a:pPr>
-            <a:r>
-              <a:rPr sz="2200" b="0">
-                <a:solidFill>
-                  <a:srgbClr val="212121"/>
-                </a:solidFill>
-                <a:latin typeface="微软雅黑"/>
-                <a:ea typeface="微软雅黑"/>
-                <a:cs typeface="微软雅黑"/>
-              </a:rPr>
-              <a:t>不带红笔：用另一支颜色，或画圈。不要和制单的字混色。</a:t>
-            </a:r>
-          </a:p>
-          <a:p>
-            <a:pPr>
-              <a:spcAft>
-                <a:spcPts val="400"/>
-              </a:spcAft>
-            </a:pPr>
-            <a:r>
-              <a:rPr sz="2200" b="0">
-                <a:solidFill>
-                  <a:srgbClr val="212121"/>
-                </a:solidFill>
-                <a:latin typeface="微软雅黑"/>
-                <a:ea typeface="微软雅黑"/>
-                <a:cs typeface="微软雅黑"/>
-              </a:rPr>
-              <a:t>自己填用黑笔或蓝笔。找茬用红笔。</a:t>
-            </a:r>
-          </a:p>
-        </p:txBody>
-      </p:sp>
-      <p:sp>
-        <p:nvSpPr>
-          <p:cNvPr id="6" name="Rectangle 5"/>
-          <p:cNvSpPr/>
-          <p:nvPr/>
-        </p:nvSpPr>
-        <p:spPr>
-          <a:xfrm>
-            <a:off x="0" y="5897880"/>
-            <a:ext cx="12191695" cy="960120"/>
-          </a:xfrm>
-          <a:prstGeom prst="rect">
-            <a:avLst/>
-          </a:prstGeom>
-          <a:solidFill>
-            <a:srgbClr val="2E7D32"/>
-          </a:solidFill>
-          <a:ln>
-            <a:noFill/>
-          </a:ln>
-        </p:spPr>
-        <p:style>
-          <a:lnRef idx="1">
-            <a:schemeClr val="accent1"/>
-          </a:lnRef>
-          <a:fillRef idx="3">
-            <a:schemeClr val="accent1"/>
-          </a:fillRef>
-          <a:effectRef idx="2">
-            <a:schemeClr val="accent1"/>
-          </a:effectRef>
-          <a:fontRef idx="minor">
-            <a:schemeClr val="lt1"/>
-          </a:fontRef>
-        </p:style>
-        <p:txBody>
-          <a:bodyPr rtlCol="0" anchor="ctr"/>
-          <a:lstStyle/>
-          <a:p>
-            <a:pPr algn="ctr"/>
-          </a:p>
-        </p:txBody>
-      </p:sp>
-      <p:sp>
-        <p:nvSpPr>
-          <p:cNvPr id="7" name="TextBox 6"/>
-          <p:cNvSpPr txBox="1"/>
-          <p:nvPr/>
-        </p:nvSpPr>
-        <p:spPr>
-          <a:xfrm>
-            <a:off x="274320" y="5961888"/>
-            <a:ext cx="11612880" cy="841248"/>
-          </a:xfrm>
-          <a:prstGeom prst="rect">
-            <a:avLst/>
-          </a:prstGeom>
-          <a:noFill/>
-        </p:spPr>
-        <p:txBody>
-          <a:bodyPr wrap="square">
-            <a:spAutoFit/>
-          </a:bodyPr>
-          <a:lstStyle/>
-          <a:p>
-            <a:pPr>
-              <a:spcAft>
-                <a:spcPts val="400"/>
-              </a:spcAft>
-            </a:pPr>
-            <a:r>
-              <a:rPr sz="1500" b="1">
-                <a:solidFill>
-                  <a:srgbClr val="FFFFFF"/>
-                </a:solidFill>
-                <a:latin typeface="微软雅黑"/>
-                <a:ea typeface="微软雅黑"/>
-                <a:cs typeface="微软雅黑"/>
-              </a:rPr>
-              <a:t>现在你：把「带红笔」写在册子今天这一页最上面。不用交。下节课带来。</a:t>
-            </a:r>
-          </a:p>
-        </p:txBody>
-      </p:sp>
-    </p:spTree>
-  </p:cSld>
-  <p:clrMapOvr>
-    <a:masterClrMapping/>
-  </p:clrMapOvr>
-</p:sld>
-</file>
-
-<file path=ppt/slides/slide41.xml><?xml version="1.0" encoding="utf-8"?>
-<p:sld xmlns:a="http://schemas.openxmlformats.org/drawingml/2006/main" xmlns:p="http://schemas.openxmlformats.org/presentationml/2006/main" xmlns:r="http://schemas.openxmlformats.org/officeDocument/2006/relationships">
-  <p:cSld>
-    <p:spTree>
-      <p:nvGrpSpPr>
-        <p:cNvPr id="1" name=""/>
-        <p:cNvGrpSpPr/>
-        <p:nvPr/>
-      </p:nvGrpSpPr>
-      <p:grpSpPr/>
-      <p:sp>
-        <p:nvSpPr>
-          <p:cNvPr id="2" name="Rectangle 1"/>
-          <p:cNvSpPr/>
-          <p:nvPr/>
-        </p:nvSpPr>
-        <p:spPr>
-          <a:xfrm>
-            <a:off x="0" y="0"/>
-            <a:ext cx="12191695" cy="6858000"/>
-          </a:xfrm>
-          <a:prstGeom prst="rect">
-            <a:avLst/>
-          </a:prstGeom>
-          <a:solidFill>
-            <a:srgbClr val="E3F2FD"/>
-          </a:solidFill>
-          <a:ln>
-            <a:noFill/>
-          </a:ln>
-        </p:spPr>
-        <p:style>
-          <a:lnRef idx="1">
-            <a:schemeClr val="accent1"/>
-          </a:lnRef>
-          <a:fillRef idx="3">
-            <a:schemeClr val="accent1"/>
-          </a:fillRef>
-          <a:effectRef idx="2">
-            <a:schemeClr val="accent1"/>
-          </a:effectRef>
-          <a:fontRef idx="minor">
-            <a:schemeClr val="lt1"/>
-          </a:fontRef>
-        </p:style>
-        <p:txBody>
-          <a:bodyPr rtlCol="0" anchor="ctr"/>
-          <a:lstStyle/>
-          <a:p>
-            <a:pPr algn="ctr"/>
-          </a:p>
-        </p:txBody>
-      </p:sp>
-      <p:sp>
-        <p:nvSpPr>
-          <p:cNvPr id="3" name="Rectangle 2"/>
-          <p:cNvSpPr/>
-          <p:nvPr/>
-        </p:nvSpPr>
-        <p:spPr>
-          <a:xfrm>
-            <a:off x="0" y="0"/>
-            <a:ext cx="12191695" cy="749808"/>
-          </a:xfrm>
-          <a:prstGeom prst="rect">
-            <a:avLst/>
-          </a:prstGeom>
-          <a:solidFill>
-            <a:srgbClr val="BF360C"/>
-          </a:solidFill>
-          <a:ln>
-            <a:noFill/>
-          </a:ln>
-        </p:spPr>
-        <p:style>
-          <a:lnRef idx="1">
-            <a:schemeClr val="accent1"/>
-          </a:lnRef>
-          <a:fillRef idx="3">
-            <a:schemeClr val="accent1"/>
-          </a:fillRef>
-          <a:effectRef idx="2">
-            <a:schemeClr val="accent1"/>
-          </a:effectRef>
-          <a:fontRef idx="minor">
-            <a:schemeClr val="lt1"/>
-          </a:fontRef>
-        </p:style>
-        <p:txBody>
-          <a:bodyPr rtlCol="0" anchor="ctr"/>
-          <a:lstStyle/>
-          <a:p>
-            <a:pPr algn="ctr"/>
-          </a:p>
-        </p:txBody>
-      </p:sp>
-      <p:sp>
-        <p:nvSpPr>
-          <p:cNvPr id="4" name="TextBox 3"/>
-          <p:cNvSpPr txBox="1"/>
-          <p:nvPr/>
-        </p:nvSpPr>
-        <p:spPr>
-          <a:xfrm>
-            <a:off x="274320" y="128016"/>
-            <a:ext cx="11612880" cy="512064"/>
-          </a:xfrm>
-          <a:prstGeom prst="rect">
-            <a:avLst/>
-          </a:prstGeom>
-          <a:noFill/>
-        </p:spPr>
-        <p:txBody>
-          <a:bodyPr wrap="square">
-            <a:spAutoFit/>
-          </a:bodyPr>
-          <a:lstStyle/>
-          <a:p>
-            <a:pPr>
-              <a:spcAft>
-                <a:spcPts val="400"/>
-              </a:spcAft>
-            </a:pPr>
-            <a:r>
-              <a:rPr sz="2200" b="1">
-                <a:solidFill>
-                  <a:srgbClr val="FFFFFF"/>
-                </a:solidFill>
-                <a:latin typeface="微软雅黑"/>
-                <a:ea typeface="微软雅黑"/>
-                <a:cs typeface="微软雅黑"/>
-              </a:rPr>
-              <a:t>书后题怎么算</a:t>
-            </a:r>
-          </a:p>
-        </p:txBody>
-      </p:sp>
-      <p:sp>
-        <p:nvSpPr>
-          <p:cNvPr id="5" name="TextBox 4"/>
-          <p:cNvSpPr txBox="1"/>
-          <p:nvPr/>
-        </p:nvSpPr>
-        <p:spPr>
-          <a:xfrm>
-            <a:off x="457200" y="960120"/>
-            <a:ext cx="11247120" cy="4754880"/>
-          </a:xfrm>
-          <a:prstGeom prst="rect">
-            <a:avLst/>
-          </a:prstGeom>
-          <a:noFill/>
-        </p:spPr>
-        <p:txBody>
-          <a:bodyPr wrap="square">
-            <a:spAutoFit/>
-          </a:bodyPr>
-          <a:lstStyle/>
-          <a:p>
-            <a:pPr>
-              <a:spcAft>
-                <a:spcPts val="400"/>
-              </a:spcAft>
-            </a:pPr>
-            <a:r>
-              <a:rPr sz="2200" b="0">
-                <a:solidFill>
-                  <a:srgbClr val="212121"/>
-                </a:solidFill>
-                <a:latin typeface="微软雅黑"/>
-                <a:ea typeface="微软雅黑"/>
-                <a:cs typeface="微软雅黑"/>
-              </a:rPr>
-              <a:t>每个项目只做收工页写明的那几道。不是全做。</a:t>
-            </a:r>
-          </a:p>
-          <a:p>
-            <a:pPr>
-              <a:spcAft>
-                <a:spcPts val="400"/>
-              </a:spcAft>
-            </a:pPr>
-            <a:r>
-              <a:rPr sz="2200" b="0">
-                <a:solidFill>
-                  <a:srgbClr val="212121"/>
-                </a:solidFill>
-                <a:latin typeface="微软雅黑"/>
-                <a:ea typeface="微软雅黑"/>
-                <a:cs typeface="微软雅黑"/>
-              </a:rPr>
-              <a:t>不用交本子。下节课开头 3 分钟对答案，抽人举册子。</a:t>
-            </a:r>
-          </a:p>
-          <a:p>
-            <a:pPr>
-              <a:spcAft>
-                <a:spcPts val="400"/>
-              </a:spcAft>
-            </a:pPr>
-            <a:r>
-              <a:rPr sz="2200" b="0">
-                <a:solidFill>
-                  <a:srgbClr val="212121"/>
-                </a:solidFill>
-                <a:latin typeface="微软雅黑"/>
-                <a:ea typeface="微软雅黑"/>
-                <a:cs typeface="微软雅黑"/>
-              </a:rPr>
-              <a:t>写了 2 分。能讲清 5 分。没写跳过，不批评。</a:t>
-            </a:r>
-          </a:p>
-          <a:p>
-            <a:pPr>
-              <a:spcAft>
-                <a:spcPts val="400"/>
-              </a:spcAft>
-            </a:pPr>
-            <a:r>
-              <a:rPr sz="2200" b="0">
-                <a:solidFill>
-                  <a:srgbClr val="212121"/>
-                </a:solidFill>
-                <a:latin typeface="微软雅黑"/>
-                <a:ea typeface="微软雅黑"/>
-                <a:cs typeface="微软雅黑"/>
-              </a:rPr>
-              <a:t>大量写凭证放在实训和项目四课堂，不收 42 本。</a:t>
-            </a:r>
-          </a:p>
-        </p:txBody>
-      </p:sp>
-      <p:sp>
-        <p:nvSpPr>
-          <p:cNvPr id="6" name="Rectangle 5"/>
-          <p:cNvSpPr/>
-          <p:nvPr/>
-        </p:nvSpPr>
-        <p:spPr>
-          <a:xfrm>
-            <a:off x="0" y="5897880"/>
-            <a:ext cx="12191695" cy="960120"/>
-          </a:xfrm>
-          <a:prstGeom prst="rect">
-            <a:avLst/>
-          </a:prstGeom>
-          <a:solidFill>
-            <a:srgbClr val="2E7D32"/>
-          </a:solidFill>
-          <a:ln>
-            <a:noFill/>
-          </a:ln>
-        </p:spPr>
-        <p:style>
-          <a:lnRef idx="1">
-            <a:schemeClr val="accent1"/>
-          </a:lnRef>
-          <a:fillRef idx="3">
-            <a:schemeClr val="accent1"/>
-          </a:fillRef>
-          <a:effectRef idx="2">
-            <a:schemeClr val="accent1"/>
-          </a:effectRef>
-          <a:fontRef idx="minor">
-            <a:schemeClr val="lt1"/>
-          </a:fontRef>
-        </p:style>
-        <p:txBody>
-          <a:bodyPr rtlCol="0" anchor="ctr"/>
-          <a:lstStyle/>
-          <a:p>
-            <a:pPr algn="ctr"/>
-          </a:p>
-        </p:txBody>
-      </p:sp>
-      <p:sp>
-        <p:nvSpPr>
-          <p:cNvPr id="7" name="TextBox 6"/>
-          <p:cNvSpPr txBox="1"/>
-          <p:nvPr/>
-        </p:nvSpPr>
-        <p:spPr>
-          <a:xfrm>
-            <a:off x="274320" y="5961888"/>
-            <a:ext cx="11612880" cy="841248"/>
-          </a:xfrm>
-          <a:prstGeom prst="rect">
-            <a:avLst/>
-          </a:prstGeom>
-          <a:noFill/>
-        </p:spPr>
-        <p:txBody>
-          <a:bodyPr wrap="square">
-            <a:spAutoFit/>
-          </a:bodyPr>
-          <a:lstStyle/>
-          <a:p>
-            <a:pPr>
-              <a:spcAft>
-                <a:spcPts val="400"/>
-              </a:spcAft>
-            </a:pPr>
-            <a:r>
-              <a:rPr sz="1500" b="1">
-                <a:solidFill>
-                  <a:srgbClr val="FFFFFF"/>
-                </a:solidFill>
-                <a:latin typeface="微软雅黑"/>
-                <a:ea typeface="微软雅黑"/>
-                <a:cs typeface="微软雅黑"/>
-              </a:rPr>
-              <a:t>现在你：看收工页。先别写。</a:t>
-            </a:r>
-          </a:p>
-        </p:txBody>
-      </p:sp>
-    </p:spTree>
-  </p:cSld>
-  <p:clrMapOvr>
-    <a:masterClrMapping/>
-  </p:clrMapOvr>
-</p:sld>
-</file>
-
-<file path=ppt/slides/slide42.xml><?xml version="1.0" encoding="utf-8"?>
-<p:sld xmlns:a="http://schemas.openxmlformats.org/drawingml/2006/main" xmlns:p="http://schemas.openxmlformats.org/presentationml/2006/main" xmlns:r="http://schemas.openxmlformats.org/officeDocument/2006/relationships">
-  <p:cSld>
-    <p:spTree>
-      <p:nvGrpSpPr>
-        <p:cNvPr id="1" name=""/>
-        <p:cNvGrpSpPr/>
-        <p:nvPr/>
-      </p:nvGrpSpPr>
-      <p:grpSpPr/>
-      <p:sp>
-        <p:nvSpPr>
-          <p:cNvPr id="2" name="Rectangle 1"/>
-          <p:cNvSpPr/>
-          <p:nvPr/>
-        </p:nvSpPr>
-        <p:spPr>
-          <a:xfrm>
-            <a:off x="0" y="0"/>
-            <a:ext cx="12191695" cy="6858000"/>
-          </a:xfrm>
-          <a:prstGeom prst="rect">
-            <a:avLst/>
-          </a:prstGeom>
-          <a:solidFill>
-            <a:srgbClr val="E3F2FD"/>
-          </a:solidFill>
-          <a:ln>
-            <a:noFill/>
-          </a:ln>
-        </p:spPr>
-        <p:style>
-          <a:lnRef idx="1">
-            <a:schemeClr val="accent1"/>
-          </a:lnRef>
-          <a:fillRef idx="3">
-            <a:schemeClr val="accent1"/>
-          </a:fillRef>
-          <a:effectRef idx="2">
-            <a:schemeClr val="accent1"/>
-          </a:effectRef>
-          <a:fontRef idx="minor">
-            <a:schemeClr val="lt1"/>
-          </a:fontRef>
-        </p:style>
-        <p:txBody>
-          <a:bodyPr rtlCol="0" anchor="ctr"/>
-          <a:lstStyle/>
-          <a:p>
-            <a:pPr algn="ctr"/>
-          </a:p>
-        </p:txBody>
-      </p:sp>
-      <p:sp>
-        <p:nvSpPr>
-          <p:cNvPr id="3" name="Rectangle 2"/>
-          <p:cNvSpPr/>
-          <p:nvPr/>
-        </p:nvSpPr>
-        <p:spPr>
-          <a:xfrm>
-            <a:off x="0" y="0"/>
-            <a:ext cx="12191695" cy="749808"/>
-          </a:xfrm>
-          <a:prstGeom prst="rect">
-            <a:avLst/>
-          </a:prstGeom>
-          <a:solidFill>
-            <a:srgbClr val="BF360C"/>
-          </a:solidFill>
-          <a:ln>
-            <a:noFill/>
-          </a:ln>
-        </p:spPr>
-        <p:style>
-          <a:lnRef idx="1">
-            <a:schemeClr val="accent1"/>
-          </a:lnRef>
-          <a:fillRef idx="3">
-            <a:schemeClr val="accent1"/>
-          </a:fillRef>
-          <a:effectRef idx="2">
-            <a:schemeClr val="accent1"/>
-          </a:effectRef>
-          <a:fontRef idx="minor">
-            <a:schemeClr val="lt1"/>
-          </a:fontRef>
-        </p:style>
-        <p:txBody>
-          <a:bodyPr rtlCol="0" anchor="ctr"/>
-          <a:lstStyle/>
-          <a:p>
-            <a:pPr algn="ctr"/>
-          </a:p>
-        </p:txBody>
-      </p:sp>
-      <p:sp>
-        <p:nvSpPr>
-          <p:cNvPr id="4" name="TextBox 3"/>
-          <p:cNvSpPr txBox="1"/>
-          <p:nvPr/>
-        </p:nvSpPr>
-        <p:spPr>
-          <a:xfrm>
-            <a:off x="274320" y="128016"/>
-            <a:ext cx="11612880" cy="512064"/>
-          </a:xfrm>
-          <a:prstGeom prst="rect">
-            <a:avLst/>
-          </a:prstGeom>
-          <a:noFill/>
-        </p:spPr>
-        <p:txBody>
-          <a:bodyPr wrap="square">
-            <a:spAutoFit/>
-          </a:bodyPr>
-          <a:lstStyle/>
-          <a:p>
-            <a:pPr>
-              <a:spcAft>
-                <a:spcPts val="400"/>
-              </a:spcAft>
-            </a:pPr>
-            <a:r>
-              <a:rPr sz="2200" b="1">
-                <a:solidFill>
-                  <a:srgbClr val="FFFFFF"/>
-                </a:solidFill>
-                <a:latin typeface="微软雅黑"/>
-                <a:ea typeface="微软雅黑"/>
-                <a:cs typeface="微软雅黑"/>
-              </a:rPr>
-              <a:t>项目一　收工</a:t>
-            </a:r>
-          </a:p>
-        </p:txBody>
-      </p:sp>
-      <p:sp>
-        <p:nvSpPr>
-          <p:cNvPr id="5" name="TextBox 4"/>
-          <p:cNvSpPr txBox="1"/>
-          <p:nvPr/>
-        </p:nvSpPr>
-        <p:spPr>
-          <a:xfrm>
-            <a:off x="457200" y="960120"/>
-            <a:ext cx="11247120" cy="4754880"/>
-          </a:xfrm>
-          <a:prstGeom prst="rect">
-            <a:avLst/>
-          </a:prstGeom>
-          <a:noFill/>
-        </p:spPr>
-        <p:txBody>
-          <a:bodyPr wrap="square">
-            <a:spAutoFit/>
-          </a:bodyPr>
-          <a:lstStyle/>
-          <a:p>
-            <a:pPr>
-              <a:spcAft>
-                <a:spcPts val="400"/>
-              </a:spcAft>
-            </a:pPr>
-            <a:r>
-              <a:rPr sz="2200" b="0">
-                <a:solidFill>
-                  <a:srgbClr val="212121"/>
-                </a:solidFill>
-                <a:latin typeface="微软雅黑"/>
-                <a:ea typeface="微软雅黑"/>
-                <a:cs typeface="微软雅黑"/>
-              </a:rPr>
-              <a:t>① 给「小新答不上来」配音 20 秒，发群。</a:t>
-            </a:r>
-          </a:p>
-          <a:p>
-            <a:pPr>
-              <a:spcAft>
-                <a:spcPts val="400"/>
-              </a:spcAft>
-            </a:pPr>
-            <a:r>
-              <a:rPr sz="2200" b="0">
-                <a:solidFill>
-                  <a:srgbClr val="212121"/>
-                </a:solidFill>
-                <a:latin typeface="微软雅黑"/>
-                <a:ea typeface="微软雅黑"/>
-                <a:cs typeface="微软雅黑"/>
-              </a:rPr>
-              <a:t>② 教材本项目判断题前 3 道。写在册子或教材上。</a:t>
-            </a:r>
-          </a:p>
-          <a:p>
-            <a:pPr>
-              <a:spcAft>
-                <a:spcPts val="400"/>
-              </a:spcAft>
-            </a:pPr>
-            <a:r>
-              <a:rPr sz="2200" b="0">
-                <a:solidFill>
-                  <a:srgbClr val="212121"/>
-                </a:solidFill>
-                <a:latin typeface="微软雅黑"/>
-                <a:ea typeface="微软雅黑"/>
-                <a:cs typeface="微软雅黑"/>
-              </a:rPr>
-              <a:t>不用交。下节课抽人对判断题。</a:t>
-            </a:r>
-          </a:p>
-        </p:txBody>
-      </p:sp>
-      <p:sp>
-        <p:nvSpPr>
-          <p:cNvPr id="6" name="Rectangle 5"/>
-          <p:cNvSpPr/>
-          <p:nvPr/>
-        </p:nvSpPr>
-        <p:spPr>
-          <a:xfrm>
-            <a:off x="0" y="5897880"/>
-            <a:ext cx="12191695" cy="960120"/>
-          </a:xfrm>
-          <a:prstGeom prst="rect">
-            <a:avLst/>
-          </a:prstGeom>
-          <a:solidFill>
-            <a:srgbClr val="2E7D32"/>
-          </a:solidFill>
-          <a:ln>
-            <a:noFill/>
-          </a:ln>
-        </p:spPr>
-        <p:style>
-          <a:lnRef idx="1">
-            <a:schemeClr val="accent1"/>
-          </a:lnRef>
-          <a:fillRef idx="3">
-            <a:schemeClr val="accent1"/>
-          </a:fillRef>
-          <a:effectRef idx="2">
-            <a:schemeClr val="accent1"/>
-          </a:effectRef>
-          <a:fontRef idx="minor">
-            <a:schemeClr val="lt1"/>
-          </a:fontRef>
-        </p:style>
-        <p:txBody>
-          <a:bodyPr rtlCol="0" anchor="ctr"/>
-          <a:lstStyle/>
-          <a:p>
-            <a:pPr algn="ctr"/>
-          </a:p>
-        </p:txBody>
-      </p:sp>
-      <p:sp>
-        <p:nvSpPr>
-          <p:cNvPr id="7" name="TextBox 6"/>
-          <p:cNvSpPr txBox="1"/>
-          <p:nvPr/>
-        </p:nvSpPr>
-        <p:spPr>
-          <a:xfrm>
-            <a:off x="274320" y="5961888"/>
-            <a:ext cx="11612880" cy="841248"/>
-          </a:xfrm>
-          <a:prstGeom prst="rect">
-            <a:avLst/>
-          </a:prstGeom>
-          <a:noFill/>
-        </p:spPr>
-        <p:txBody>
-          <a:bodyPr wrap="square">
-            <a:spAutoFit/>
-          </a:bodyPr>
-          <a:lstStyle/>
-          <a:p>
-            <a:pPr>
-              <a:spcAft>
-                <a:spcPts val="400"/>
-              </a:spcAft>
-            </a:pPr>
-            <a:r>
-              <a:rPr sz="1500" b="1">
-                <a:solidFill>
-                  <a:srgbClr val="FFFFFF"/>
-                </a:solidFill>
-                <a:latin typeface="微软雅黑"/>
-                <a:ea typeface="微软雅黑"/>
-                <a:cs typeface="微软雅黑"/>
-              </a:rPr>
-              <a:t>现在你：课后做这两件。不用交本子。配音发群。</a:t>
-            </a:r>
-          </a:p>
-        </p:txBody>
-      </p:sp>
-    </p:spTree>
-  </p:cSld>
-  <p:clrMapOvr>
-    <a:masterClrMapping/>
-  </p:clrMapOvr>
-</p:sld>
-</file>
-
-<file path=ppt/slides/slide43.xml><?xml version="1.0" encoding="utf-8"?>
-<p:sld xmlns:a="http://schemas.openxmlformats.org/drawingml/2006/main" xmlns:p="http://schemas.openxmlformats.org/presentationml/2006/main" xmlns:r="http://schemas.openxmlformats.org/officeDocument/2006/relationships">
-  <p:cSld>
-    <p:spTree>
-      <p:nvGrpSpPr>
-        <p:cNvPr id="1" name=""/>
-        <p:cNvGrpSpPr/>
-        <p:nvPr/>
-      </p:nvGrpSpPr>
-      <p:grpSpPr/>
-      <p:sp>
-        <p:nvSpPr>
-          <p:cNvPr id="2" name="Rectangle 1"/>
-          <p:cNvSpPr/>
-          <p:nvPr/>
-        </p:nvSpPr>
-        <p:spPr>
-          <a:xfrm>
-            <a:off x="0" y="0"/>
-            <a:ext cx="12191695" cy="6858000"/>
-          </a:xfrm>
-          <a:prstGeom prst="rect">
-            <a:avLst/>
-          </a:prstGeom>
-          <a:solidFill>
-            <a:srgbClr val="E3F2FD"/>
-          </a:solidFill>
-          <a:ln>
-            <a:noFill/>
-          </a:ln>
-        </p:spPr>
-        <p:style>
-          <a:lnRef idx="1">
-            <a:schemeClr val="accent1"/>
-          </a:lnRef>
-          <a:fillRef idx="3">
-            <a:schemeClr val="accent1"/>
-          </a:fillRef>
-          <a:effectRef idx="2">
-            <a:schemeClr val="accent1"/>
-          </a:effectRef>
-          <a:fontRef idx="minor">
-            <a:schemeClr val="lt1"/>
-          </a:fontRef>
-        </p:style>
-        <p:txBody>
-          <a:bodyPr rtlCol="0" anchor="ctr"/>
-          <a:lstStyle/>
-          <a:p>
-            <a:pPr algn="ctr"/>
-          </a:p>
-        </p:txBody>
-      </p:sp>
-      <p:sp>
-        <p:nvSpPr>
-          <p:cNvPr id="3" name="Rectangle 2"/>
-          <p:cNvSpPr/>
-          <p:nvPr/>
-        </p:nvSpPr>
-        <p:spPr>
-          <a:xfrm>
-            <a:off x="0" y="0"/>
-            <a:ext cx="12191695" cy="749808"/>
-          </a:xfrm>
-          <a:prstGeom prst="rect">
-            <a:avLst/>
-          </a:prstGeom>
-          <a:solidFill>
-            <a:srgbClr val="BF360C"/>
-          </a:solidFill>
-          <a:ln>
-            <a:noFill/>
-          </a:ln>
-        </p:spPr>
-        <p:style>
-          <a:lnRef idx="1">
-            <a:schemeClr val="accent1"/>
-          </a:lnRef>
-          <a:fillRef idx="3">
-            <a:schemeClr val="accent1"/>
-          </a:fillRef>
-          <a:effectRef idx="2">
-            <a:schemeClr val="accent1"/>
-          </a:effectRef>
-          <a:fontRef idx="minor">
-            <a:schemeClr val="lt1"/>
-          </a:fontRef>
-        </p:style>
-        <p:txBody>
-          <a:bodyPr rtlCol="0" anchor="ctr"/>
-          <a:lstStyle/>
-          <a:p>
-            <a:pPr algn="ctr"/>
-          </a:p>
-        </p:txBody>
-      </p:sp>
-      <p:sp>
-        <p:nvSpPr>
-          <p:cNvPr id="4" name="TextBox 3"/>
-          <p:cNvSpPr txBox="1"/>
-          <p:nvPr/>
-        </p:nvSpPr>
-        <p:spPr>
-          <a:xfrm>
-            <a:off x="274320" y="128016"/>
-            <a:ext cx="11612880" cy="512064"/>
-          </a:xfrm>
-          <a:prstGeom prst="rect">
-            <a:avLst/>
-          </a:prstGeom>
-          <a:noFill/>
-        </p:spPr>
-        <p:txBody>
-          <a:bodyPr wrap="square">
-            <a:spAutoFit/>
-          </a:bodyPr>
-          <a:lstStyle/>
-          <a:p>
-            <a:pPr>
-              <a:spcAft>
-                <a:spcPts val="400"/>
-              </a:spcAft>
-            </a:pPr>
-            <a:r>
-              <a:rPr sz="2200" b="1">
-                <a:solidFill>
-                  <a:srgbClr val="FFFFFF"/>
-                </a:solidFill>
-                <a:latin typeface="微软雅黑"/>
-                <a:ea typeface="微软雅黑"/>
-                <a:cs typeface="微软雅黑"/>
-              </a:rPr>
-              <a:t>项目二　收工</a:t>
-            </a:r>
-          </a:p>
-        </p:txBody>
-      </p:sp>
-      <p:sp>
-        <p:nvSpPr>
-          <p:cNvPr id="5" name="TextBox 4"/>
-          <p:cNvSpPr txBox="1"/>
-          <p:nvPr/>
-        </p:nvSpPr>
-        <p:spPr>
-          <a:xfrm>
-            <a:off x="457200" y="960120"/>
-            <a:ext cx="11247120" cy="4754880"/>
-          </a:xfrm>
-          <a:prstGeom prst="rect">
-            <a:avLst/>
-          </a:prstGeom>
-          <a:noFill/>
-        </p:spPr>
-        <p:txBody>
-          <a:bodyPr wrap="square">
-            <a:spAutoFit/>
-          </a:bodyPr>
-          <a:lstStyle/>
-          <a:p>
-            <a:pPr>
-              <a:spcAft>
-                <a:spcPts val="400"/>
-              </a:spcAft>
-            </a:pPr>
-            <a:r>
-              <a:rPr sz="2200" b="0">
-                <a:solidFill>
-                  <a:srgbClr val="212121"/>
-                </a:solidFill>
-                <a:latin typeface="微软雅黑"/>
-                <a:ea typeface="微软雅黑"/>
-                <a:cs typeface="微软雅黑"/>
-              </a:rPr>
-              <a:t>① 抄 3 个还不熟的科目，各写一句：增加记借还是贷。</a:t>
-            </a:r>
-          </a:p>
-          <a:p>
-            <a:pPr>
-              <a:spcAft>
-                <a:spcPts val="400"/>
-              </a:spcAft>
-            </a:pPr>
-            <a:r>
-              <a:rPr sz="2200" b="0">
-                <a:solidFill>
-                  <a:srgbClr val="212121"/>
-                </a:solidFill>
-                <a:latin typeface="微软雅黑"/>
-                <a:ea typeface="微软雅黑"/>
-                <a:cs typeface="微软雅黑"/>
-              </a:rPr>
-              <a:t>② 教材本项目「指出借方贷方」第 1、第 2 道。</a:t>
-            </a:r>
-          </a:p>
-          <a:p>
-            <a:pPr>
-              <a:spcAft>
-                <a:spcPts val="400"/>
-              </a:spcAft>
-            </a:pPr>
-            <a:r>
-              <a:rPr sz="2200" b="0">
-                <a:solidFill>
-                  <a:srgbClr val="212121"/>
-                </a:solidFill>
-                <a:latin typeface="微软雅黑"/>
-                <a:ea typeface="微软雅黑"/>
-                <a:cs typeface="微软雅黑"/>
-              </a:rPr>
-              <a:t>不用交。下节课抽人对。</a:t>
-            </a:r>
-          </a:p>
-        </p:txBody>
-      </p:sp>
-      <p:sp>
-        <p:nvSpPr>
-          <p:cNvPr id="6" name="Rectangle 5"/>
-          <p:cNvSpPr/>
-          <p:nvPr/>
-        </p:nvSpPr>
-        <p:spPr>
-          <a:xfrm>
-            <a:off x="0" y="5897880"/>
-            <a:ext cx="12191695" cy="960120"/>
-          </a:xfrm>
-          <a:prstGeom prst="rect">
-            <a:avLst/>
-          </a:prstGeom>
-          <a:solidFill>
-            <a:srgbClr val="2E7D32"/>
-          </a:solidFill>
-          <a:ln>
-            <a:noFill/>
-          </a:ln>
-        </p:spPr>
-        <p:style>
-          <a:lnRef idx="1">
-            <a:schemeClr val="accent1"/>
-          </a:lnRef>
-          <a:fillRef idx="3">
-            <a:schemeClr val="accent1"/>
-          </a:fillRef>
-          <a:effectRef idx="2">
-            <a:schemeClr val="accent1"/>
-          </a:effectRef>
-          <a:fontRef idx="minor">
-            <a:schemeClr val="lt1"/>
-          </a:fontRef>
-        </p:style>
-        <p:txBody>
-          <a:bodyPr rtlCol="0" anchor="ctr"/>
-          <a:lstStyle/>
-          <a:p>
-            <a:pPr algn="ctr"/>
-          </a:p>
-        </p:txBody>
-      </p:sp>
-      <p:sp>
-        <p:nvSpPr>
-          <p:cNvPr id="7" name="TextBox 6"/>
-          <p:cNvSpPr txBox="1"/>
-          <p:nvPr/>
-        </p:nvSpPr>
-        <p:spPr>
-          <a:xfrm>
-            <a:off x="274320" y="5961888"/>
-            <a:ext cx="11612880" cy="841248"/>
-          </a:xfrm>
-          <a:prstGeom prst="rect">
-            <a:avLst/>
-          </a:prstGeom>
-          <a:noFill/>
-        </p:spPr>
-        <p:txBody>
-          <a:bodyPr wrap="square">
-            <a:spAutoFit/>
-          </a:bodyPr>
-          <a:lstStyle/>
-          <a:p>
-            <a:pPr>
-              <a:spcAft>
-                <a:spcPts val="400"/>
-              </a:spcAft>
-            </a:pPr>
-            <a:r>
-              <a:rPr sz="1500" b="1">
-                <a:solidFill>
-                  <a:srgbClr val="FFFFFF"/>
-                </a:solidFill>
-                <a:latin typeface="微软雅黑"/>
-                <a:ea typeface="微软雅黑"/>
-                <a:cs typeface="微软雅黑"/>
-              </a:rPr>
-              <a:t>现在你：课后做这两件。不用交本子。</a:t>
-            </a:r>
-          </a:p>
-        </p:txBody>
-      </p:sp>
-    </p:spTree>
-  </p:cSld>
-  <p:clrMapOvr>
-    <a:masterClrMapping/>
-  </p:clrMapOvr>
-</p:sld>
-</file>
-
-<file path=ppt/slides/slide44.xml><?xml version="1.0" encoding="utf-8"?>
-<p:sld xmlns:a="http://schemas.openxmlformats.org/drawingml/2006/main" xmlns:p="http://schemas.openxmlformats.org/presentationml/2006/main" xmlns:r="http://schemas.openxmlformats.org/officeDocument/2006/relationships">
-  <p:cSld>
-    <p:spTree>
-      <p:nvGrpSpPr>
-        <p:cNvPr id="1" name=""/>
-        <p:cNvGrpSpPr/>
-        <p:nvPr/>
-      </p:nvGrpSpPr>
-      <p:grpSpPr/>
-      <p:sp>
-        <p:nvSpPr>
-          <p:cNvPr id="2" name="Rectangle 1"/>
-          <p:cNvSpPr/>
-          <p:nvPr/>
-        </p:nvSpPr>
-        <p:spPr>
-          <a:xfrm>
-            <a:off x="0" y="0"/>
-            <a:ext cx="12191695" cy="6858000"/>
-          </a:xfrm>
-          <a:prstGeom prst="rect">
-            <a:avLst/>
-          </a:prstGeom>
-          <a:solidFill>
-            <a:srgbClr val="E3F2FD"/>
-          </a:solidFill>
-          <a:ln>
-            <a:noFill/>
-          </a:ln>
-        </p:spPr>
-        <p:style>
-          <a:lnRef idx="1">
-            <a:schemeClr val="accent1"/>
-          </a:lnRef>
-          <a:fillRef idx="3">
-            <a:schemeClr val="accent1"/>
-          </a:fillRef>
-          <a:effectRef idx="2">
-            <a:schemeClr val="accent1"/>
-          </a:effectRef>
-          <a:fontRef idx="minor">
-            <a:schemeClr val="lt1"/>
-          </a:fontRef>
-        </p:style>
-        <p:txBody>
-          <a:bodyPr rtlCol="0" anchor="ctr"/>
-          <a:lstStyle/>
-          <a:p>
-            <a:pPr algn="ctr"/>
-          </a:p>
-        </p:txBody>
-      </p:sp>
-      <p:sp>
-        <p:nvSpPr>
-          <p:cNvPr id="3" name="Rectangle 2"/>
-          <p:cNvSpPr/>
-          <p:nvPr/>
-        </p:nvSpPr>
-        <p:spPr>
-          <a:xfrm>
-            <a:off x="0" y="0"/>
-            <a:ext cx="12191695" cy="749808"/>
-          </a:xfrm>
-          <a:prstGeom prst="rect">
-            <a:avLst/>
-          </a:prstGeom>
-          <a:solidFill>
-            <a:srgbClr val="BF360C"/>
-          </a:solidFill>
-          <a:ln>
-            <a:noFill/>
-          </a:ln>
-        </p:spPr>
-        <p:style>
-          <a:lnRef idx="1">
-            <a:schemeClr val="accent1"/>
-          </a:lnRef>
-          <a:fillRef idx="3">
-            <a:schemeClr val="accent1"/>
-          </a:fillRef>
-          <a:effectRef idx="2">
-            <a:schemeClr val="accent1"/>
-          </a:effectRef>
-          <a:fontRef idx="minor">
-            <a:schemeClr val="lt1"/>
-          </a:fontRef>
-        </p:style>
-        <p:txBody>
-          <a:bodyPr rtlCol="0" anchor="ctr"/>
-          <a:lstStyle/>
-          <a:p>
-            <a:pPr algn="ctr"/>
-          </a:p>
-        </p:txBody>
-      </p:sp>
-      <p:sp>
-        <p:nvSpPr>
-          <p:cNvPr id="4" name="TextBox 3"/>
-          <p:cNvSpPr txBox="1"/>
-          <p:nvPr/>
-        </p:nvSpPr>
-        <p:spPr>
-          <a:xfrm>
-            <a:off x="274320" y="128016"/>
-            <a:ext cx="11612880" cy="512064"/>
-          </a:xfrm>
-          <a:prstGeom prst="rect">
-            <a:avLst/>
-          </a:prstGeom>
-          <a:noFill/>
-        </p:spPr>
-        <p:txBody>
-          <a:bodyPr wrap="square">
-            <a:spAutoFit/>
-          </a:bodyPr>
-          <a:lstStyle/>
-          <a:p>
-            <a:pPr>
-              <a:spcAft>
-                <a:spcPts val="400"/>
-              </a:spcAft>
-            </a:pPr>
-            <a:r>
-              <a:rPr sz="2200" b="1">
-                <a:solidFill>
-                  <a:srgbClr val="FFFFFF"/>
-                </a:solidFill>
-                <a:latin typeface="微软雅黑"/>
-                <a:ea typeface="微软雅黑"/>
-                <a:cs typeface="微软雅黑"/>
-              </a:rPr>
-              <a:t>项目三　收工 + 带红笔</a:t>
-            </a:r>
-          </a:p>
-        </p:txBody>
-      </p:sp>
-      <p:sp>
-        <p:nvSpPr>
-          <p:cNvPr id="5" name="TextBox 4"/>
-          <p:cNvSpPr txBox="1"/>
-          <p:nvPr/>
-        </p:nvSpPr>
-        <p:spPr>
-          <a:xfrm>
-            <a:off x="457200" y="960120"/>
-            <a:ext cx="11247120" cy="4754880"/>
-          </a:xfrm>
-          <a:prstGeom prst="rect">
-            <a:avLst/>
-          </a:prstGeom>
-          <a:noFill/>
-        </p:spPr>
-        <p:txBody>
-          <a:bodyPr wrap="square">
-            <a:spAutoFit/>
-          </a:bodyPr>
-          <a:lstStyle/>
-          <a:p>
-            <a:pPr>
-              <a:spcAft>
-                <a:spcPts val="400"/>
-              </a:spcAft>
-            </a:pPr>
-            <a:r>
-              <a:rPr sz="2200" b="0">
-                <a:solidFill>
-                  <a:srgbClr val="212121"/>
-                </a:solidFill>
-                <a:latin typeface="微软雅黑"/>
-                <a:ea typeface="微软雅黑"/>
-                <a:cs typeface="微软雅黑"/>
-              </a:rPr>
-              <a:t>① 教材本项目账簿分类判断题前 3 道。</a:t>
-            </a:r>
-          </a:p>
-          <a:p>
-            <a:pPr>
-              <a:spcAft>
-                <a:spcPts val="400"/>
-              </a:spcAft>
-            </a:pPr>
-            <a:r>
-              <a:rPr sz="2200" b="0">
-                <a:solidFill>
-                  <a:srgbClr val="212121"/>
-                </a:solidFill>
-                <a:latin typeface="微软雅黑"/>
-                <a:ea typeface="微软雅黑"/>
-                <a:cs typeface="微软雅黑"/>
-              </a:rPr>
-              <a:t>② 下一节带红笔。把「带红笔」写在册子上。</a:t>
-            </a:r>
-          </a:p>
-          <a:p>
-            <a:pPr>
-              <a:spcAft>
-                <a:spcPts val="400"/>
-              </a:spcAft>
-            </a:pPr>
-            <a:r>
-              <a:rPr sz="2200" b="0">
-                <a:solidFill>
-                  <a:srgbClr val="212121"/>
-                </a:solidFill>
-                <a:latin typeface="微软雅黑"/>
-                <a:ea typeface="微软雅黑"/>
-                <a:cs typeface="微软雅黑"/>
-              </a:rPr>
-              <a:t>不用交本子。</a:t>
-            </a:r>
-          </a:p>
-        </p:txBody>
-      </p:sp>
-      <p:sp>
-        <p:nvSpPr>
-          <p:cNvPr id="6" name="Rectangle 5"/>
-          <p:cNvSpPr/>
-          <p:nvPr/>
-        </p:nvSpPr>
-        <p:spPr>
-          <a:xfrm>
-            <a:off x="0" y="5897880"/>
-            <a:ext cx="12191695" cy="960120"/>
-          </a:xfrm>
-          <a:prstGeom prst="rect">
-            <a:avLst/>
-          </a:prstGeom>
-          <a:solidFill>
-            <a:srgbClr val="2E7D32"/>
-          </a:solidFill>
-          <a:ln>
-            <a:noFill/>
-          </a:ln>
-        </p:spPr>
-        <p:style>
-          <a:lnRef idx="1">
-            <a:schemeClr val="accent1"/>
-          </a:lnRef>
-          <a:fillRef idx="3">
-            <a:schemeClr val="accent1"/>
-          </a:fillRef>
-          <a:effectRef idx="2">
-            <a:schemeClr val="accent1"/>
-          </a:effectRef>
-          <a:fontRef idx="minor">
-            <a:schemeClr val="lt1"/>
-          </a:fontRef>
-        </p:style>
-        <p:txBody>
-          <a:bodyPr rtlCol="0" anchor="ctr"/>
-          <a:lstStyle/>
-          <a:p>
-            <a:pPr algn="ctr"/>
-          </a:p>
-        </p:txBody>
-      </p:sp>
-      <p:sp>
-        <p:nvSpPr>
-          <p:cNvPr id="7" name="TextBox 6"/>
-          <p:cNvSpPr txBox="1"/>
-          <p:nvPr/>
-        </p:nvSpPr>
-        <p:spPr>
-          <a:xfrm>
-            <a:off x="274320" y="5961888"/>
-            <a:ext cx="11612880" cy="841248"/>
-          </a:xfrm>
-          <a:prstGeom prst="rect">
-            <a:avLst/>
-          </a:prstGeom>
-          <a:noFill/>
-        </p:spPr>
-        <p:txBody>
-          <a:bodyPr wrap="square">
-            <a:spAutoFit/>
-          </a:bodyPr>
-          <a:lstStyle/>
-          <a:p>
-            <a:pPr>
-              <a:spcAft>
-                <a:spcPts val="400"/>
-              </a:spcAft>
-            </a:pPr>
-            <a:r>
-              <a:rPr sz="1500" b="1">
-                <a:solidFill>
-                  <a:srgbClr val="FFFFFF"/>
-                </a:solidFill>
-                <a:latin typeface="微软雅黑"/>
-                <a:ea typeface="微软雅黑"/>
-                <a:cs typeface="微软雅黑"/>
-              </a:rPr>
-              <a:t>现在你：写下「带红笔」。课后做 3 道判断。不用交。</a:t>
-            </a:r>
-          </a:p>
-        </p:txBody>
-      </p:sp>
-    </p:spTree>
-  </p:cSld>
-  <p:clrMapOvr>
-    <a:masterClrMapping/>
-  </p:clrMapOvr>
-</p:sld>
-</file>
-
-<file path=ppt/slides/slide45.xml><?xml version="1.0" encoding="utf-8"?>
-<p:sld xmlns:a="http://schemas.openxmlformats.org/drawingml/2006/main" xmlns:p="http://schemas.openxmlformats.org/presentationml/2006/main" xmlns:r="http://schemas.openxmlformats.org/officeDocument/2006/relationships">
-  <p:cSld>
-    <p:spTree>
-      <p:nvGrpSpPr>
-        <p:cNvPr id="1" name=""/>
-        <p:cNvGrpSpPr/>
-        <p:nvPr/>
-      </p:nvGrpSpPr>
-      <p:grpSpPr/>
-      <p:sp>
-        <p:nvSpPr>
-          <p:cNvPr id="2" name="Rectangle 1"/>
-          <p:cNvSpPr/>
-          <p:nvPr/>
-        </p:nvSpPr>
-        <p:spPr>
-          <a:xfrm>
-            <a:off x="0" y="0"/>
-            <a:ext cx="12191695" cy="6858000"/>
-          </a:xfrm>
-          <a:prstGeom prst="rect">
-            <a:avLst/>
-          </a:prstGeom>
-          <a:solidFill>
-            <a:srgbClr val="E3F2FD"/>
-          </a:solidFill>
-          <a:ln>
-            <a:noFill/>
-          </a:ln>
-        </p:spPr>
-        <p:style>
-          <a:lnRef idx="1">
-            <a:schemeClr val="accent1"/>
-          </a:lnRef>
-          <a:fillRef idx="3">
-            <a:schemeClr val="accent1"/>
-          </a:fillRef>
-          <a:effectRef idx="2">
-            <a:schemeClr val="accent1"/>
-          </a:effectRef>
-          <a:fontRef idx="minor">
-            <a:schemeClr val="lt1"/>
-          </a:fontRef>
-        </p:style>
-        <p:txBody>
-          <a:bodyPr rtlCol="0" anchor="ctr"/>
-          <a:lstStyle/>
-          <a:p>
-            <a:pPr algn="ctr"/>
-          </a:p>
-        </p:txBody>
-      </p:sp>
-      <p:sp>
-        <p:nvSpPr>
-          <p:cNvPr id="3" name="Rectangle 2"/>
-          <p:cNvSpPr/>
-          <p:nvPr/>
-        </p:nvSpPr>
-        <p:spPr>
-          <a:xfrm>
-            <a:off x="0" y="0"/>
-            <a:ext cx="12191695" cy="749808"/>
-          </a:xfrm>
-          <a:prstGeom prst="rect">
-            <a:avLst/>
-          </a:prstGeom>
-          <a:solidFill>
-            <a:srgbClr val="BF360C"/>
-          </a:solidFill>
-          <a:ln>
-            <a:noFill/>
-          </a:ln>
-        </p:spPr>
-        <p:style>
-          <a:lnRef idx="1">
-            <a:schemeClr val="accent1"/>
-          </a:lnRef>
-          <a:fillRef idx="3">
-            <a:schemeClr val="accent1"/>
-          </a:fillRef>
-          <a:effectRef idx="2">
-            <a:schemeClr val="accent1"/>
-          </a:effectRef>
-          <a:fontRef idx="minor">
-            <a:schemeClr val="lt1"/>
-          </a:fontRef>
-        </p:style>
-        <p:txBody>
-          <a:bodyPr rtlCol="0" anchor="ctr"/>
-          <a:lstStyle/>
-          <a:p>
-            <a:pPr algn="ctr"/>
-          </a:p>
-        </p:txBody>
-      </p:sp>
-      <p:sp>
-        <p:nvSpPr>
-          <p:cNvPr id="4" name="TextBox 3"/>
-          <p:cNvSpPr txBox="1"/>
-          <p:nvPr/>
-        </p:nvSpPr>
-        <p:spPr>
-          <a:xfrm>
-            <a:off x="274320" y="128016"/>
-            <a:ext cx="11612880" cy="512064"/>
-          </a:xfrm>
-          <a:prstGeom prst="rect">
-            <a:avLst/>
-          </a:prstGeom>
-          <a:noFill/>
-        </p:spPr>
-        <p:txBody>
-          <a:bodyPr wrap="square">
-            <a:spAutoFit/>
-          </a:bodyPr>
-          <a:lstStyle/>
-          <a:p>
-            <a:pPr>
-              <a:spcAft>
-                <a:spcPts val="400"/>
-              </a:spcAft>
-            </a:pPr>
-            <a:r>
-              <a:rPr sz="2200" b="1">
-                <a:solidFill>
-                  <a:srgbClr val="FFFFFF"/>
-                </a:solidFill>
-                <a:latin typeface="微软雅黑"/>
-                <a:ea typeface="微软雅黑"/>
-                <a:cs typeface="微软雅黑"/>
-              </a:rPr>
-              <a:t>项目四　收工</a:t>
-            </a:r>
-          </a:p>
-        </p:txBody>
-      </p:sp>
-      <p:sp>
-        <p:nvSpPr>
-          <p:cNvPr id="5" name="TextBox 4"/>
-          <p:cNvSpPr txBox="1"/>
-          <p:nvPr/>
-        </p:nvSpPr>
-        <p:spPr>
-          <a:xfrm>
-            <a:off x="457200" y="960120"/>
-            <a:ext cx="11247120" cy="4754880"/>
-          </a:xfrm>
-          <a:prstGeom prst="rect">
-            <a:avLst/>
-          </a:prstGeom>
-          <a:noFill/>
-        </p:spPr>
-        <p:txBody>
-          <a:bodyPr wrap="square">
-            <a:spAutoFit/>
-          </a:bodyPr>
-          <a:lstStyle/>
-          <a:p>
-            <a:pPr>
-              <a:spcAft>
-                <a:spcPts val="400"/>
-              </a:spcAft>
-            </a:pPr>
-            <a:r>
-              <a:rPr sz="2200" b="0">
-                <a:solidFill>
-                  <a:srgbClr val="212121"/>
-                </a:solidFill>
-                <a:latin typeface="微软雅黑"/>
-                <a:ea typeface="微软雅黑"/>
-                <a:cs typeface="微软雅黑"/>
-              </a:rPr>
-              <a:t>① 四格连环画配音 40 秒，说清借什么贷什么，发群。只说通用记账凭证。</a:t>
-            </a:r>
-          </a:p>
-          <a:p>
-            <a:pPr>
-              <a:spcAft>
-                <a:spcPts val="400"/>
-              </a:spcAft>
-            </a:pPr>
-            <a:r>
-              <a:rPr sz="2200" b="0">
-                <a:solidFill>
-                  <a:srgbClr val="212121"/>
-                </a:solidFill>
-                <a:latin typeface="微软雅黑"/>
-                <a:ea typeface="微软雅黑"/>
-                <a:cs typeface="微软雅黑"/>
-              </a:rPr>
-              <a:t>② 再填一张：银行存款付电费 800。审核栏空着。</a:t>
-            </a:r>
-          </a:p>
-          <a:p>
-            <a:pPr>
-              <a:spcAft>
-                <a:spcPts val="400"/>
-              </a:spcAft>
-            </a:pPr>
-            <a:r>
-              <a:rPr sz="2200" b="0">
-                <a:solidFill>
-                  <a:srgbClr val="212121"/>
-                </a:solidFill>
-                <a:latin typeface="微软雅黑"/>
-                <a:ea typeface="微软雅黑"/>
-                <a:cs typeface="微软雅黑"/>
-              </a:rPr>
-              <a:t>不用交。下节课做找茬挑战。</a:t>
-            </a:r>
-          </a:p>
-        </p:txBody>
-      </p:sp>
-      <p:sp>
-        <p:nvSpPr>
-          <p:cNvPr id="6" name="Rectangle 5"/>
-          <p:cNvSpPr/>
-          <p:nvPr/>
-        </p:nvSpPr>
-        <p:spPr>
-          <a:xfrm>
-            <a:off x="0" y="5897880"/>
-            <a:ext cx="12191695" cy="960120"/>
-          </a:xfrm>
-          <a:prstGeom prst="rect">
-            <a:avLst/>
-          </a:prstGeom>
-          <a:solidFill>
-            <a:srgbClr val="2E7D32"/>
-          </a:solidFill>
-          <a:ln>
-            <a:noFill/>
-          </a:ln>
-        </p:spPr>
-        <p:style>
-          <a:lnRef idx="1">
-            <a:schemeClr val="accent1"/>
-          </a:lnRef>
-          <a:fillRef idx="3">
-            <a:schemeClr val="accent1"/>
-          </a:fillRef>
-          <a:effectRef idx="2">
-            <a:schemeClr val="accent1"/>
-          </a:effectRef>
-          <a:fontRef idx="minor">
-            <a:schemeClr val="lt1"/>
-          </a:fontRef>
-        </p:style>
-        <p:txBody>
-          <a:bodyPr rtlCol="0" anchor="ctr"/>
-          <a:lstStyle/>
-          <a:p>
-            <a:pPr algn="ctr"/>
-          </a:p>
-        </p:txBody>
-      </p:sp>
-      <p:sp>
-        <p:nvSpPr>
-          <p:cNvPr id="7" name="TextBox 6"/>
-          <p:cNvSpPr txBox="1"/>
-          <p:nvPr/>
-        </p:nvSpPr>
-        <p:spPr>
-          <a:xfrm>
-            <a:off x="274320" y="5961888"/>
-            <a:ext cx="11612880" cy="841248"/>
-          </a:xfrm>
-          <a:prstGeom prst="rect">
-            <a:avLst/>
-          </a:prstGeom>
-          <a:noFill/>
-        </p:spPr>
-        <p:txBody>
-          <a:bodyPr wrap="square">
-            <a:spAutoFit/>
-          </a:bodyPr>
-          <a:lstStyle/>
-          <a:p>
-            <a:pPr>
-              <a:spcAft>
-                <a:spcPts val="400"/>
-              </a:spcAft>
-            </a:pPr>
-            <a:r>
-              <a:rPr sz="1500" b="1">
-                <a:solidFill>
-                  <a:srgbClr val="FFFFFF"/>
-                </a:solidFill>
-                <a:latin typeface="微软雅黑"/>
-                <a:ea typeface="微软雅黑"/>
-                <a:cs typeface="微软雅黑"/>
-              </a:rPr>
-              <a:t>现在你：课后配音发群。再填一张练习纸。不用交。</a:t>
+              <a:t>现在你：听到口令再举牌。</a:t>
             </a:r>
           </a:p>
         </p:txBody>
@@ -14870,7 +9982,7 @@
             <a:avLst/>
           </a:prstGeom>
           <a:solidFill>
-            <a:srgbClr val="E3F2FD"/>
+            <a:srgbClr val="FFF8E1"/>
           </a:solidFill>
           <a:ln>
             <a:noFill/>
@@ -14977,7 +10089,7 @@
                 <a:ea typeface="微软雅黑"/>
                 <a:cs typeface="微软雅黑"/>
               </a:rPr>
-              <a:t>项目四配音　四格连环画</a:t>
+              <a:t>举牌 1/8</a:t>
             </a:r>
           </a:p>
         </p:txBody>
@@ -15018,43 +10130,7 @@
                 <a:ea typeface="微软雅黑"/>
                 <a:cs typeface="微软雅黑"/>
               </a:rPr>
-              <a:t>四格：收到发票 → 想科目 → 填凭证 → 钉在一起。</a:t>
-            </a:r>
-          </a:p>
-          <a:p>
-            <a:pPr>
-              <a:spcAft>
-                <a:spcPts val="400"/>
-              </a:spcAft>
-            </a:pPr>
-            <a:r>
-              <a:rPr sz="2200" b="0">
-                <a:solidFill>
-                  <a:srgbClr val="212121"/>
-                </a:solidFill>
-                <a:latin typeface="微软雅黑"/>
-                <a:ea typeface="微软雅黑"/>
-                <a:cs typeface="微软雅黑"/>
-              </a:rPr>
-              <a:t>按顺序配音，总共不超过 40 秒。必须说出借哪个、贷哪个、金额。</a:t>
-            </a:r>
-          </a:p>
-          <a:p>
-            <a:pPr>
-              <a:spcAft>
-                <a:spcPts val="400"/>
-              </a:spcAft>
-            </a:pPr>
-            <a:r>
-              <a:rPr sz="2200" b="0">
-                <a:solidFill>
-                  <a:srgbClr val="212121"/>
-                </a:solidFill>
-                <a:latin typeface="微软雅黑"/>
-                <a:ea typeface="微软雅黑"/>
-                <a:cs typeface="微软雅黑"/>
-              </a:rPr>
-              <a:t>只说通用记账凭证。不要说收款凭证、付款凭证。</a:t>
+              <a:t>库存现金</a:t>
             </a:r>
           </a:p>
         </p:txBody>
@@ -15138,7 +10214,7 @@
                 <a:ea typeface="微软雅黑"/>
                 <a:cs typeface="微软雅黑"/>
               </a:rPr>
-              <a:t>现在你：四格看完再录音。发群。不用交本子。</a:t>
+              <a:t>现在你：数到 3，是本组的举牌。</a:t>
             </a:r>
           </a:p>
         </p:txBody>
@@ -15170,13 +10246,13 @@
         <p:spPr>
           <a:xfrm>
             <a:off x="0" y="0"/>
-            <a:ext cx="12191695" cy="749808"/>
+            <a:ext cx="12191695" cy="6858000"/>
           </a:xfrm>
           <a:prstGeom prst="rect">
             <a:avLst/>
           </a:prstGeom>
           <a:solidFill>
-            <a:srgbClr val="BF360C"/>
+            <a:srgbClr val="FFF8E1"/>
           </a:solidFill>
           <a:ln>
             <a:noFill/>
@@ -15206,7 +10282,50 @@
       </p:sp>
       <p:sp>
         <p:nvSpPr>
-          <p:cNvPr id="3" name="TextBox 2"/>
+          <p:cNvPr id="3" name="Rectangle 2"/>
+          <p:cNvSpPr/>
+          <p:nvPr/>
+        </p:nvSpPr>
+        <p:spPr>
+          <a:xfrm>
+            <a:off x="0" y="0"/>
+            <a:ext cx="12191695" cy="749808"/>
+          </a:xfrm>
+          <a:prstGeom prst="rect">
+            <a:avLst/>
+          </a:prstGeom>
+          <a:solidFill>
+            <a:srgbClr val="F9A825"/>
+          </a:solidFill>
+          <a:ln>
+            <a:noFill/>
+          </a:ln>
+        </p:spPr>
+        <p:style>
+          <a:lnRef idx="1">
+            <a:schemeClr val="accent1"/>
+          </a:lnRef>
+          <a:fillRef idx="3">
+            <a:schemeClr val="accent1"/>
+          </a:fillRef>
+          <a:effectRef idx="2">
+            <a:schemeClr val="accent1"/>
+          </a:effectRef>
+          <a:fontRef idx="minor">
+            <a:schemeClr val="lt1"/>
+          </a:fontRef>
+        </p:style>
+        <p:txBody>
+          <a:bodyPr rtlCol="0" anchor="ctr"/>
+          <a:lstStyle/>
+          <a:p>
+            <a:pPr algn="ctr"/>
+          </a:p>
+        </p:txBody>
+      </p:sp>
+      <p:sp>
+        <p:nvSpPr>
+          <p:cNvPr id="4" name="TextBox 3"/>
           <p:cNvSpPr txBox="1"/>
           <p:nvPr/>
         </p:nvSpPr>
@@ -15240,38 +10359,91 @@
                 <a:ea typeface="微软雅黑"/>
                 <a:cs typeface="微软雅黑"/>
               </a:rPr>
-              <a:t>连环画① 收到发票</a:t>
-            </a:r>
-          </a:p>
-        </p:txBody>
-      </p:sp>
-      <p:pic>
-        <p:nvPicPr>
-          <p:cNvPr id="4" name="Picture 3" descr="项目四-09_连环画1收到发票.jpg"/>
-          <p:cNvPicPr>
-            <a:picLocks noChangeAspect="1"/>
-          </p:cNvPicPr>
-          <p:nvPr/>
-        </p:nvPicPr>
-        <p:blipFill>
-          <a:blip r:embed="rId2"/>
-          <a:stretch>
-            <a:fillRect/>
-          </a:stretch>
-        </p:blipFill>
-        <p:spPr>
-          <a:xfrm>
-            <a:off x="365760" y="914400"/>
-            <a:ext cx="8453120" cy="4754880"/>
-          </a:xfrm>
-          <a:prstGeom prst="rect">
-            <a:avLst/>
-          </a:prstGeom>
-        </p:spPr>
-      </p:pic>
-      <p:sp>
-        <p:nvSpPr>
-          <p:cNvPr id="5" name="Rectangle 4"/>
+              <a:t>揭晓 1/8</a:t>
+            </a:r>
+          </a:p>
+        </p:txBody>
+      </p:sp>
+      <p:sp>
+        <p:nvSpPr>
+          <p:cNvPr id="5" name="TextBox 4"/>
+          <p:cNvSpPr txBox="1"/>
+          <p:nvPr/>
+        </p:nvSpPr>
+        <p:spPr>
+          <a:xfrm>
+            <a:off x="457200" y="960120"/>
+            <a:ext cx="11247120" cy="4754880"/>
+          </a:xfrm>
+          <a:prstGeom prst="rect">
+            <a:avLst/>
+          </a:prstGeom>
+          <a:noFill/>
+        </p:spPr>
+        <p:txBody>
+          <a:bodyPr wrap="square">
+            <a:spAutoFit/>
+          </a:bodyPr>
+          <a:lstStyle/>
+          <a:p>
+            <a:pPr>
+              <a:spcAft>
+                <a:spcPts val="400"/>
+              </a:spcAft>
+            </a:pPr>
+            <a:r>
+              <a:rPr sz="2200" b="0">
+                <a:solidFill>
+                  <a:srgbClr val="212121"/>
+                </a:solidFill>
+                <a:latin typeface="微软雅黑"/>
+                <a:ea typeface="微软雅黑"/>
+                <a:cs typeface="微软雅黑"/>
+              </a:rPr>
+              <a:t>库存现金</a:t>
+            </a:r>
+          </a:p>
+          <a:p>
+            <a:pPr>
+              <a:spcAft>
+                <a:spcPts val="400"/>
+              </a:spcAft>
+            </a:pPr>
+            <a:r>
+              <a:rPr sz="2200" b="0">
+                <a:solidFill>
+                  <a:srgbClr val="212121"/>
+                </a:solidFill>
+                <a:latin typeface="微软雅黑"/>
+                <a:ea typeface="微软雅黑"/>
+                <a:cs typeface="微软雅黑"/>
+              </a:rPr>
+              <a:t/>
+            </a:r>
+          </a:p>
+          <a:p>
+            <a:pPr>
+              <a:spcAft>
+                <a:spcPts val="400"/>
+              </a:spcAft>
+            </a:pPr>
+            <a:r>
+              <a:rPr sz="2200" b="0">
+                <a:solidFill>
+                  <a:srgbClr val="212121"/>
+                </a:solidFill>
+                <a:latin typeface="微软雅黑"/>
+                <a:ea typeface="微软雅黑"/>
+                <a:cs typeface="微软雅黑"/>
+              </a:rPr>
+              <a:t>→　资产组举牌</a:t>
+            </a:r>
+          </a:p>
+        </p:txBody>
+      </p:sp>
+      <p:sp>
+        <p:nvSpPr>
+          <p:cNvPr id="6" name="Rectangle 5"/>
           <p:cNvSpPr/>
           <p:nvPr/>
         </p:nvSpPr>
@@ -15314,7 +10486,7 @@
       </p:sp>
       <p:sp>
         <p:nvSpPr>
-          <p:cNvPr id="6" name="TextBox 5"/>
+          <p:cNvPr id="7" name="TextBox 6"/>
           <p:cNvSpPr txBox="1"/>
           <p:nvPr/>
         </p:nvSpPr>
@@ -15348,7 +10520,7 @@
                 <a:ea typeface="微软雅黑"/>
                 <a:cs typeface="微软雅黑"/>
               </a:rPr>
-              <a:t>现在你：看图。四格看完再录音。</a:t>
+              <a:t>现在你：错了，全组用小新腔喊一遍。</a:t>
             </a:r>
           </a:p>
         </p:txBody>
@@ -15380,6 +10552,49 @@
         <p:spPr>
           <a:xfrm>
             <a:off x="0" y="0"/>
+            <a:ext cx="12191695" cy="6858000"/>
+          </a:xfrm>
+          <a:prstGeom prst="rect">
+            <a:avLst/>
+          </a:prstGeom>
+          <a:solidFill>
+            <a:srgbClr val="FFF8E1"/>
+          </a:solidFill>
+          <a:ln>
+            <a:noFill/>
+          </a:ln>
+        </p:spPr>
+        <p:style>
+          <a:lnRef idx="1">
+            <a:schemeClr val="accent1"/>
+          </a:lnRef>
+          <a:fillRef idx="3">
+            <a:schemeClr val="accent1"/>
+          </a:fillRef>
+          <a:effectRef idx="2">
+            <a:schemeClr val="accent1"/>
+          </a:effectRef>
+          <a:fontRef idx="minor">
+            <a:schemeClr val="lt1"/>
+          </a:fontRef>
+        </p:style>
+        <p:txBody>
+          <a:bodyPr rtlCol="0" anchor="ctr"/>
+          <a:lstStyle/>
+          <a:p>
+            <a:pPr algn="ctr"/>
+          </a:p>
+        </p:txBody>
+      </p:sp>
+      <p:sp>
+        <p:nvSpPr>
+          <p:cNvPr id="3" name="Rectangle 2"/>
+          <p:cNvSpPr/>
+          <p:nvPr/>
+        </p:nvSpPr>
+        <p:spPr>
+          <a:xfrm>
+            <a:off x="0" y="0"/>
             <a:ext cx="12191695" cy="749808"/>
           </a:xfrm>
           <a:prstGeom prst="rect">
@@ -15416,7 +10631,7 @@
       </p:sp>
       <p:sp>
         <p:nvSpPr>
-          <p:cNvPr id="3" name="TextBox 2"/>
+          <p:cNvPr id="4" name="TextBox 3"/>
           <p:cNvSpPr txBox="1"/>
           <p:nvPr/>
         </p:nvSpPr>
@@ -15450,38 +10665,55 @@
                 <a:ea typeface="微软雅黑"/>
                 <a:cs typeface="微软雅黑"/>
               </a:rPr>
-              <a:t>连环画② 想科目</a:t>
-            </a:r>
-          </a:p>
-        </p:txBody>
-      </p:sp>
-      <p:pic>
-        <p:nvPicPr>
-          <p:cNvPr id="4" name="Picture 3" descr="项目四-10_连环画2判断科目.jpg"/>
-          <p:cNvPicPr>
-            <a:picLocks noChangeAspect="1"/>
-          </p:cNvPicPr>
-          <p:nvPr/>
-        </p:nvPicPr>
-        <p:blipFill>
-          <a:blip r:embed="rId2"/>
-          <a:stretch>
-            <a:fillRect/>
-          </a:stretch>
-        </p:blipFill>
-        <p:spPr>
-          <a:xfrm>
-            <a:off x="365760" y="914400"/>
-            <a:ext cx="8453120" cy="4754880"/>
-          </a:xfrm>
-          <a:prstGeom prst="rect">
-            <a:avLst/>
-          </a:prstGeom>
-        </p:spPr>
-      </p:pic>
-      <p:sp>
-        <p:nvSpPr>
-          <p:cNvPr id="5" name="Rectangle 4"/>
+              <a:t>举牌 2/8</a:t>
+            </a:r>
+          </a:p>
+        </p:txBody>
+      </p:sp>
+      <p:sp>
+        <p:nvSpPr>
+          <p:cNvPr id="5" name="TextBox 4"/>
+          <p:cNvSpPr txBox="1"/>
+          <p:nvPr/>
+        </p:nvSpPr>
+        <p:spPr>
+          <a:xfrm>
+            <a:off x="457200" y="960120"/>
+            <a:ext cx="11247120" cy="4754880"/>
+          </a:xfrm>
+          <a:prstGeom prst="rect">
+            <a:avLst/>
+          </a:prstGeom>
+          <a:noFill/>
+        </p:spPr>
+        <p:txBody>
+          <a:bodyPr wrap="square">
+            <a:spAutoFit/>
+          </a:bodyPr>
+          <a:lstStyle/>
+          <a:p>
+            <a:pPr>
+              <a:spcAft>
+                <a:spcPts val="400"/>
+              </a:spcAft>
+            </a:pPr>
+            <a:r>
+              <a:rPr sz="2200" b="0">
+                <a:solidFill>
+                  <a:srgbClr val="212121"/>
+                </a:solidFill>
+                <a:latin typeface="微软雅黑"/>
+                <a:ea typeface="微软雅黑"/>
+                <a:cs typeface="微软雅黑"/>
+              </a:rPr>
+              <a:t>短期借款</a:t>
+            </a:r>
+          </a:p>
+        </p:txBody>
+      </p:sp>
+      <p:sp>
+        <p:nvSpPr>
+          <p:cNvPr id="6" name="Rectangle 5"/>
           <p:cNvSpPr/>
           <p:nvPr/>
         </p:nvSpPr>
@@ -15524,7 +10756,7 @@
       </p:sp>
       <p:sp>
         <p:nvSpPr>
-          <p:cNvPr id="6" name="TextBox 5"/>
+          <p:cNvPr id="7" name="TextBox 6"/>
           <p:cNvSpPr txBox="1"/>
           <p:nvPr/>
         </p:nvSpPr>
@@ -15558,7 +10790,7 @@
                 <a:ea typeface="微软雅黑"/>
                 <a:cs typeface="微软雅黑"/>
               </a:rPr>
-              <a:t>现在你：看图。先别录。</a:t>
+              <a:t>现在你：数到 3，是本组的举牌。</a:t>
             </a:r>
           </a:p>
         </p:txBody>
@@ -15590,13 +10822,13 @@
         <p:spPr>
           <a:xfrm>
             <a:off x="0" y="0"/>
-            <a:ext cx="12191695" cy="749808"/>
+            <a:ext cx="12191695" cy="6858000"/>
           </a:xfrm>
           <a:prstGeom prst="rect">
             <a:avLst/>
           </a:prstGeom>
           <a:solidFill>
-            <a:srgbClr val="BF360C"/>
+            <a:srgbClr val="FFF8E1"/>
           </a:solidFill>
           <a:ln>
             <a:noFill/>
@@ -15626,7 +10858,50 @@
       </p:sp>
       <p:sp>
         <p:nvSpPr>
-          <p:cNvPr id="3" name="TextBox 2"/>
+          <p:cNvPr id="3" name="Rectangle 2"/>
+          <p:cNvSpPr/>
+          <p:nvPr/>
+        </p:nvSpPr>
+        <p:spPr>
+          <a:xfrm>
+            <a:off x="0" y="0"/>
+            <a:ext cx="12191695" cy="749808"/>
+          </a:xfrm>
+          <a:prstGeom prst="rect">
+            <a:avLst/>
+          </a:prstGeom>
+          <a:solidFill>
+            <a:srgbClr val="F9A825"/>
+          </a:solidFill>
+          <a:ln>
+            <a:noFill/>
+          </a:ln>
+        </p:spPr>
+        <p:style>
+          <a:lnRef idx="1">
+            <a:schemeClr val="accent1"/>
+          </a:lnRef>
+          <a:fillRef idx="3">
+            <a:schemeClr val="accent1"/>
+          </a:fillRef>
+          <a:effectRef idx="2">
+            <a:schemeClr val="accent1"/>
+          </a:effectRef>
+          <a:fontRef idx="minor">
+            <a:schemeClr val="lt1"/>
+          </a:fontRef>
+        </p:style>
+        <p:txBody>
+          <a:bodyPr rtlCol="0" anchor="ctr"/>
+          <a:lstStyle/>
+          <a:p>
+            <a:pPr algn="ctr"/>
+          </a:p>
+        </p:txBody>
+      </p:sp>
+      <p:sp>
+        <p:nvSpPr>
+          <p:cNvPr id="4" name="TextBox 3"/>
           <p:cNvSpPr txBox="1"/>
           <p:nvPr/>
         </p:nvSpPr>
@@ -15660,38 +10935,91 @@
                 <a:ea typeface="微软雅黑"/>
                 <a:cs typeface="微软雅黑"/>
               </a:rPr>
-              <a:t>连环画③ 填凭证</a:t>
-            </a:r>
-          </a:p>
-        </p:txBody>
-      </p:sp>
-      <p:pic>
-        <p:nvPicPr>
-          <p:cNvPr id="4" name="Picture 3" descr="项目四-12_连环画3填凭证.jpg"/>
-          <p:cNvPicPr>
-            <a:picLocks noChangeAspect="1"/>
-          </p:cNvPicPr>
-          <p:nvPr/>
-        </p:nvPicPr>
-        <p:blipFill>
-          <a:blip r:embed="rId2"/>
-          <a:stretch>
-            <a:fillRect/>
-          </a:stretch>
-        </p:blipFill>
-        <p:spPr>
-          <a:xfrm>
-            <a:off x="365760" y="914400"/>
-            <a:ext cx="8453120" cy="4754880"/>
-          </a:xfrm>
-          <a:prstGeom prst="rect">
-            <a:avLst/>
-          </a:prstGeom>
-        </p:spPr>
-      </p:pic>
-      <p:sp>
-        <p:nvSpPr>
-          <p:cNvPr id="5" name="Rectangle 4"/>
+              <a:t>揭晓 2/8</a:t>
+            </a:r>
+          </a:p>
+        </p:txBody>
+      </p:sp>
+      <p:sp>
+        <p:nvSpPr>
+          <p:cNvPr id="5" name="TextBox 4"/>
+          <p:cNvSpPr txBox="1"/>
+          <p:nvPr/>
+        </p:nvSpPr>
+        <p:spPr>
+          <a:xfrm>
+            <a:off x="457200" y="960120"/>
+            <a:ext cx="11247120" cy="4754880"/>
+          </a:xfrm>
+          <a:prstGeom prst="rect">
+            <a:avLst/>
+          </a:prstGeom>
+          <a:noFill/>
+        </p:spPr>
+        <p:txBody>
+          <a:bodyPr wrap="square">
+            <a:spAutoFit/>
+          </a:bodyPr>
+          <a:lstStyle/>
+          <a:p>
+            <a:pPr>
+              <a:spcAft>
+                <a:spcPts val="400"/>
+              </a:spcAft>
+            </a:pPr>
+            <a:r>
+              <a:rPr sz="2200" b="0">
+                <a:solidFill>
+                  <a:srgbClr val="212121"/>
+                </a:solidFill>
+                <a:latin typeface="微软雅黑"/>
+                <a:ea typeface="微软雅黑"/>
+                <a:cs typeface="微软雅黑"/>
+              </a:rPr>
+              <a:t>短期借款</a:t>
+            </a:r>
+          </a:p>
+          <a:p>
+            <a:pPr>
+              <a:spcAft>
+                <a:spcPts val="400"/>
+              </a:spcAft>
+            </a:pPr>
+            <a:r>
+              <a:rPr sz="2200" b="0">
+                <a:solidFill>
+                  <a:srgbClr val="212121"/>
+                </a:solidFill>
+                <a:latin typeface="微软雅黑"/>
+                <a:ea typeface="微软雅黑"/>
+                <a:cs typeface="微软雅黑"/>
+              </a:rPr>
+              <a:t/>
+            </a:r>
+          </a:p>
+          <a:p>
+            <a:pPr>
+              <a:spcAft>
+                <a:spcPts val="400"/>
+              </a:spcAft>
+            </a:pPr>
+            <a:r>
+              <a:rPr sz="2200" b="0">
+                <a:solidFill>
+                  <a:srgbClr val="212121"/>
+                </a:solidFill>
+                <a:latin typeface="微软雅黑"/>
+                <a:ea typeface="微软雅黑"/>
+                <a:cs typeface="微软雅黑"/>
+              </a:rPr>
+              <a:t>→　负债组举牌</a:t>
+            </a:r>
+          </a:p>
+        </p:txBody>
+      </p:sp>
+      <p:sp>
+        <p:nvSpPr>
+          <p:cNvPr id="6" name="Rectangle 5"/>
           <p:cNvSpPr/>
           <p:nvPr/>
         </p:nvSpPr>
@@ -15734,7 +11062,7 @@
       </p:sp>
       <p:sp>
         <p:nvSpPr>
-          <p:cNvPr id="6" name="TextBox 5"/>
+          <p:cNvPr id="7" name="TextBox 6"/>
           <p:cNvSpPr txBox="1"/>
           <p:nvPr/>
         </p:nvSpPr>
@@ -15768,7 +11096,7 @@
                 <a:ea typeface="微软雅黑"/>
                 <a:cs typeface="微软雅黑"/>
               </a:rPr>
-              <a:t>现在你：看图。先别录。</a:t>
+              <a:t>现在你：错了，全组用小新腔喊一遍。</a:t>
             </a:r>
           </a:p>
         </p:txBody>
@@ -15800,6 +11128,49 @@
         <p:spPr>
           <a:xfrm>
             <a:off x="0" y="0"/>
+            <a:ext cx="12191695" cy="6858000"/>
+          </a:xfrm>
+          <a:prstGeom prst="rect">
+            <a:avLst/>
+          </a:prstGeom>
+          <a:solidFill>
+            <a:srgbClr val="FFF8E1"/>
+          </a:solidFill>
+          <a:ln>
+            <a:noFill/>
+          </a:ln>
+        </p:spPr>
+        <p:style>
+          <a:lnRef idx="1">
+            <a:schemeClr val="accent1"/>
+          </a:lnRef>
+          <a:fillRef idx="3">
+            <a:schemeClr val="accent1"/>
+          </a:fillRef>
+          <a:effectRef idx="2">
+            <a:schemeClr val="accent1"/>
+          </a:effectRef>
+          <a:fontRef idx="minor">
+            <a:schemeClr val="lt1"/>
+          </a:fontRef>
+        </p:style>
+        <p:txBody>
+          <a:bodyPr rtlCol="0" anchor="ctr"/>
+          <a:lstStyle/>
+          <a:p>
+            <a:pPr algn="ctr"/>
+          </a:p>
+        </p:txBody>
+      </p:sp>
+      <p:sp>
+        <p:nvSpPr>
+          <p:cNvPr id="3" name="Rectangle 2"/>
+          <p:cNvSpPr/>
+          <p:nvPr/>
+        </p:nvSpPr>
+        <p:spPr>
+          <a:xfrm>
+            <a:off x="0" y="0"/>
             <a:ext cx="12191695" cy="749808"/>
           </a:xfrm>
           <a:prstGeom prst="rect">
@@ -15836,7 +11207,7 @@
       </p:sp>
       <p:sp>
         <p:nvSpPr>
-          <p:cNvPr id="3" name="TextBox 2"/>
+          <p:cNvPr id="4" name="TextBox 3"/>
           <p:cNvSpPr txBox="1"/>
           <p:nvPr/>
         </p:nvSpPr>
@@ -15870,38 +11241,55 @@
                 <a:ea typeface="微软雅黑"/>
                 <a:cs typeface="微软雅黑"/>
               </a:rPr>
-              <a:t>连环画④ 钉在一起</a:t>
-            </a:r>
-          </a:p>
-        </p:txBody>
-      </p:sp>
-      <p:pic>
-        <p:nvPicPr>
-          <p:cNvPr id="4" name="Picture 3" descr="项目四-13_连环画4装订.jpg"/>
-          <p:cNvPicPr>
-            <a:picLocks noChangeAspect="1"/>
-          </p:cNvPicPr>
-          <p:nvPr/>
-        </p:nvPicPr>
-        <p:blipFill>
-          <a:blip r:embed="rId2"/>
-          <a:stretch>
-            <a:fillRect/>
-          </a:stretch>
-        </p:blipFill>
-        <p:spPr>
-          <a:xfrm>
-            <a:off x="365760" y="914400"/>
-            <a:ext cx="8453120" cy="4754880"/>
-          </a:xfrm>
-          <a:prstGeom prst="rect">
-            <a:avLst/>
-          </a:prstGeom>
-        </p:spPr>
-      </p:pic>
-      <p:sp>
-        <p:nvSpPr>
-          <p:cNvPr id="5" name="Rectangle 4"/>
+              <a:t>举牌 3/8</a:t>
+            </a:r>
+          </a:p>
+        </p:txBody>
+      </p:sp>
+      <p:sp>
+        <p:nvSpPr>
+          <p:cNvPr id="5" name="TextBox 4"/>
+          <p:cNvSpPr txBox="1"/>
+          <p:nvPr/>
+        </p:nvSpPr>
+        <p:spPr>
+          <a:xfrm>
+            <a:off x="457200" y="960120"/>
+            <a:ext cx="11247120" cy="4754880"/>
+          </a:xfrm>
+          <a:prstGeom prst="rect">
+            <a:avLst/>
+          </a:prstGeom>
+          <a:noFill/>
+        </p:spPr>
+        <p:txBody>
+          <a:bodyPr wrap="square">
+            <a:spAutoFit/>
+          </a:bodyPr>
+          <a:lstStyle/>
+          <a:p>
+            <a:pPr>
+              <a:spcAft>
+                <a:spcPts val="400"/>
+              </a:spcAft>
+            </a:pPr>
+            <a:r>
+              <a:rPr sz="2200" b="0">
+                <a:solidFill>
+                  <a:srgbClr val="212121"/>
+                </a:solidFill>
+                <a:latin typeface="微软雅黑"/>
+                <a:ea typeface="微软雅黑"/>
+                <a:cs typeface="微软雅黑"/>
+              </a:rPr>
+              <a:t>实收资本</a:t>
+            </a:r>
+          </a:p>
+        </p:txBody>
+      </p:sp>
+      <p:sp>
+        <p:nvSpPr>
+          <p:cNvPr id="6" name="Rectangle 5"/>
           <p:cNvSpPr/>
           <p:nvPr/>
         </p:nvSpPr>
@@ -15944,7 +11332,7 @@
       </p:sp>
       <p:sp>
         <p:nvSpPr>
-          <p:cNvPr id="6" name="TextBox 5"/>
+          <p:cNvPr id="7" name="TextBox 6"/>
           <p:cNvSpPr txBox="1"/>
           <p:nvPr/>
         </p:nvSpPr>
@@ -15978,7 +11366,7 @@
                 <a:ea typeface="微软雅黑"/>
                 <a:cs typeface="微软雅黑"/>
               </a:rPr>
-              <a:t>现在你：课后按顺序配音发群。不用交本子。</a:t>
+              <a:t>现在你：数到 3，是本组的举牌。</a:t>
             </a:r>
           </a:p>
         </p:txBody>

--- a/90_通用工具_全学期复用/90-C14_课堂活动与课后任务_上课投影_v1.0_20260821.pptx
+++ b/90_通用工具_全学期复用/90-C14_课堂活动与课后任务_上课投影_v1.0_20260821.pptx
@@ -3279,7 +3279,7 @@
                 <a:ea typeface="微软雅黑"/>
                 <a:cs typeface="微软雅黑"/>
               </a:rPr>
-              <a:t>下课布置作业：翻正在讲的那份课件最后的「收工」页。</a:t>
+              <a:t>下课布置作业：翻正在讲的那份课件最后的「下课前看这一页」。</a:t>
             </a:r>
           </a:p>
           <a:p>
@@ -6404,7 +6404,7 @@
                 <a:ea typeface="微软雅黑"/>
                 <a:cs typeface="微软雅黑"/>
               </a:rPr>
-              <a:t>项目一：讲完「十二块和二十五块」后面那一页 + 最后「收工」。</a:t>
+              <a:t>项目一：课件最后「下课前看这一页」。中间「四张图连起来」那一页只把意思钉住，不当场录音。</a:t>
             </a:r>
           </a:p>
           <a:p>
@@ -6422,7 +6422,7 @@
                 <a:ea typeface="微软雅黑"/>
                 <a:cs typeface="微软雅黑"/>
               </a:rPr>
-              <a:t>项目二：课件最后「收工」。</a:t>
+              <a:t>项目二：课件最后「下课前看这一页」。</a:t>
             </a:r>
           </a:p>
           <a:p>
@@ -6440,7 +6440,7 @@
                 <a:ea typeface="微软雅黑"/>
                 <a:cs typeface="微软雅黑"/>
               </a:rPr>
-              <a:t>项目三：课件最后「收工」（带红笔）。</a:t>
+              <a:t>项目三：课件最后「下课前看这一页」（带红笔）。</a:t>
             </a:r>
           </a:p>
           <a:p>
@@ -7052,6 +7052,24 @@
                 <a:ea typeface="微软雅黑"/>
                 <a:cs typeface="微软雅黑"/>
               </a:rPr>
+              <a:t>为什么：练的是一笔业务让天平怎么变。每题只有一种变化、只有一个组举。</a:t>
+            </a:r>
+          </a:p>
+          <a:p>
+            <a:pPr>
+              <a:spcAft>
+                <a:spcPts val="400"/>
+              </a:spcAft>
+            </a:pPr>
+            <a:r>
+              <a:rPr sz="2200" b="0">
+                <a:solidFill>
+                  <a:srgbClr val="212121"/>
+                </a:solidFill>
+                <a:latin typeface="微软雅黑"/>
+                <a:ea typeface="微软雅黑"/>
+                <a:cs typeface="微软雅黑"/>
+              </a:rPr>
               <a:t>4 组：同增 / 同减 / 左边一增一减 / 右边一增一减</a:t>
             </a:r>
           </a:p>
@@ -9500,7 +9518,7 @@
                 <a:ea typeface="微软雅黑"/>
                 <a:cs typeface="微软雅黑"/>
               </a:rPr>
-              <a:t>每个项目最多 1 次。前一天群里发名单和牌上的字。</a:t>
+              <a:t>为什么：分组只为了 10～15 分钟里，每题只有一个答案、只有一个组举牌。不是为了每节课都有组。</a:t>
             </a:r>
           </a:p>
           <a:p>
@@ -9518,7 +9536,7 @@
                 <a:ea typeface="微软雅黑"/>
                 <a:cs typeface="微软雅黑"/>
               </a:rPr>
-              <a:t>进门按桌签坐。10～15 分钟。结束收回。</a:t>
+              <a:t>每个项目最多 1 次。前一天群里发名单和牌上的字。</a:t>
             </a:r>
           </a:p>
           <a:p>
@@ -9536,7 +9554,7 @@
                 <a:ea typeface="微软雅黑"/>
                 <a:cs typeface="微软雅黑"/>
               </a:rPr>
-              <a:t>口令在投影上，每题只有一个答案。</a:t>
+              <a:t>进门按桌签坐。结束收回。口令在投影上，每题只有一个答案。</a:t>
             </a:r>
           </a:p>
           <a:p>
@@ -9809,6 +9827,24 @@
             <a:spAutoFit/>
           </a:bodyPr>
           <a:lstStyle/>
+          <a:p>
+            <a:pPr>
+              <a:spcAft>
+                <a:spcPts val="400"/>
+              </a:spcAft>
+            </a:pPr>
+            <a:r>
+              <a:rPr sz="2200" b="0">
+                <a:solidFill>
+                  <a:srgbClr val="212121"/>
+                </a:solidFill>
+                <a:latin typeface="微软雅黑"/>
+                <a:ea typeface="微软雅黑"/>
+                <a:cs typeface="微软雅黑"/>
+              </a:rPr>
+              <a:t>为什么：练的是听到科目，立刻归到六个词里的哪一个。</a:t>
+            </a:r>
+          </a:p>
           <a:p>
             <a:pPr>
               <a:spcAft>

--- a/90_通用工具_全学期复用/90-C14_课堂活动与课后任务_上课投影_v1.0_20260821.pptx
+++ b/90_通用工具_全学期复用/90-C14_课堂活动与课后任务_上课投影_v1.0_20260821.pptx
@@ -6422,7 +6422,7 @@
                 <a:ea typeface="微软雅黑"/>
                 <a:cs typeface="微软雅黑"/>
               </a:rPr>
-              <a:t>项目二：课件最后「下课前看这一页」。</a:t>
+              <a:t>项目二、三：课件最后「下课前看这一页」。</a:t>
             </a:r>
           </a:p>
           <a:p>
@@ -6440,7 +6440,7 @@
                 <a:ea typeface="微软雅黑"/>
                 <a:cs typeface="微软雅黑"/>
               </a:rPr>
-              <a:t>项目三：课件最后「下课前看这一页」（带红笔）。</a:t>
+              <a:t>项目四：四格连环画看完之后那一页「课后就这一件」。</a:t>
             </a:r>
           </a:p>
           <a:p>
@@ -6458,7 +6458,7 @@
                 <a:ea typeface="微软雅黑"/>
                 <a:cs typeface="微软雅黑"/>
               </a:rPr>
-              <a:t>项目四：四格连环画看完之后那一页「课后就这一件」。</a:t>
+              <a:t>项目五、六、七：各有上课投影，课后看最后「下课前看这一页」。</a:t>
             </a:r>
           </a:p>
           <a:p>
@@ -6476,7 +6476,7 @@
                 <a:ea typeface="微软雅黑"/>
                 <a:cs typeface="微软雅黑"/>
               </a:rPr>
-              <a:t>实训：打开 10-00，不要打开这一份。</a:t>
+              <a:t>实训：打开 10-00。活动日才打开这一份。</a:t>
             </a:r>
           </a:p>
         </p:txBody>
